--- a/curriculum/week-01/week1-topic-03-blocks-and-chains.pptx
+++ b/curriculum/week-01/week1-topic-03-blocks-and-chains.pptx
@@ -3270,8 +3270,8 @@
         </p:nvSpPr>
         <p:spPr>
           <a:xfrm>
-            <a:off x="822960" y="1188720"/>
-            <a:ext cx="5486400" cy="1188720"/>
+            <a:off x="822960" y="502920"/>
+            <a:ext cx="9144000" cy="365760"/>
           </a:xfrm>
           <a:prstGeom prst="rect">
             <a:avLst/>
@@ -3290,13 +3290,13 @@
               </a:lnSpc>
             </a:pPr>
             <a:r>
-              <a:rPr sz="10000" b="1" i="0">
-                <a:solidFill>
-                  <a:srgbClr val="FFFFFF"/>
-                </a:solidFill>
-                <a:latin typeface="Century Gothic"/>
-              </a:rPr>
-              <a:t>03</a:t>
+              <a:rPr sz="1300" b="1" i="0">
+                <a:solidFill>
+                  <a:srgbClr val="FFC53D"/>
+                </a:solidFill>
+                <a:latin typeface="Calibri"/>
+              </a:rPr>
+              <a:t>BlockchainCourse · Curriculum · Week 01 · Topic 03 of 04</a:t>
             </a:r>
           </a:p>
         </p:txBody>
@@ -3309,8 +3309,8 @@
         </p:nvSpPr>
         <p:spPr>
           <a:xfrm>
-            <a:off x="822960" y="2423160"/>
-            <a:ext cx="8961120" cy="1554480"/>
+            <a:off x="822960" y="1188720"/>
+            <a:ext cx="5486400" cy="1188720"/>
           </a:xfrm>
           <a:prstGeom prst="rect">
             <a:avLst/>
@@ -3325,17 +3325,17 @@
           <a:p>
             <a:pPr algn="l">
               <a:lnSpc>
-                <a:spcPct val="105000"/>
-              </a:lnSpc>
-            </a:pPr>
-            <a:r>
-              <a:rPr sz="4600" b="1" i="0">
+                <a:spcPct val="115000"/>
+              </a:lnSpc>
+            </a:pPr>
+            <a:r>
+              <a:rPr sz="10000" b="1" i="0">
                 <a:solidFill>
                   <a:srgbClr val="FFFFFF"/>
                 </a:solidFill>
                 <a:latin typeface="Century Gothic"/>
               </a:rPr>
-              <a:t>Blocks &amp; Chains</a:t>
+              <a:t>03</a:t>
             </a:r>
           </a:p>
         </p:txBody>
@@ -3348,8 +3348,8 @@
         </p:nvSpPr>
         <p:spPr>
           <a:xfrm>
-            <a:off x="822960" y="4160520"/>
-            <a:ext cx="6858000" cy="1097280"/>
+            <a:off x="822960" y="2423160"/>
+            <a:ext cx="8961120" cy="1554480"/>
           </a:xfrm>
           <a:prstGeom prst="rect">
             <a:avLst/>
@@ -3364,17 +3364,17 @@
           <a:p>
             <a:pPr algn="l">
               <a:lnSpc>
-                <a:spcPct val="125000"/>
-              </a:lnSpc>
-            </a:pPr>
-            <a:r>
-              <a:rPr sz="1900" b="0" i="0">
+                <a:spcPct val="105000"/>
+              </a:lnSpc>
+            </a:pPr>
+            <a:r>
+              <a:rPr sz="4600" b="1" i="0">
                 <a:solidFill>
                   <a:srgbClr val="FFFFFF"/>
                 </a:solidFill>
-                <a:latin typeface="Calibri"/>
-              </a:rPr>
-              <a:t>Link history together so a single altered link breaks everything after it.</a:t>
+                <a:latin typeface="Century Gothic"/>
+              </a:rPr>
+              <a:t>Blocks &amp; Chains</a:t>
             </a:r>
           </a:p>
         </p:txBody>
@@ -3387,8 +3387,8 @@
         </p:nvSpPr>
         <p:spPr>
           <a:xfrm>
-            <a:off x="822960" y="6446520"/>
-            <a:ext cx="8229600" cy="320040"/>
+            <a:off x="822960" y="4160520"/>
+            <a:ext cx="6858000" cy="1097280"/>
           </a:xfrm>
           <a:prstGeom prst="rect">
             <a:avLst/>
@@ -3403,6 +3403,277 @@
           <a:p>
             <a:pPr algn="l">
               <a:lnSpc>
+                <a:spcPct val="125000"/>
+              </a:lnSpc>
+            </a:pPr>
+            <a:r>
+              <a:rPr sz="1900" b="0" i="0">
+                <a:solidFill>
+                  <a:srgbClr val="FFFFFF"/>
+                </a:solidFill>
+                <a:latin typeface="Calibri"/>
+              </a:rPr>
+              <a:t>Link history together so a single altered link breaks everything after it.</a:t>
+            </a:r>
+          </a:p>
+        </p:txBody>
+      </p:sp>
+      <p:sp>
+        <p:nvSpPr>
+          <p:cNvPr id="10" name="Rounded Rectangle 9"/>
+          <p:cNvSpPr/>
+          <p:nvPr/>
+        </p:nvSpPr>
+        <p:spPr>
+          <a:xfrm>
+            <a:off x="822960" y="5669280"/>
+            <a:ext cx="1100937" cy="402336"/>
+          </a:xfrm>
+          <a:prstGeom prst="roundRect">
+            <a:avLst>
+              <a:gd name="adj" fmla="val 50000"/>
+            </a:avLst>
+          </a:prstGeom>
+          <a:solidFill>
+            <a:srgbClr val="FFFFFF">
+              <a:alpha val="14000"/>
+            </a:srgbClr>
+          </a:solidFill>
+          <a:ln w="9525">
+            <a:solidFill>
+              <a:srgbClr val="FFFFFF"/>
+            </a:solidFill>
+          </a:ln>
+          <a:effectLst/>
+        </p:spPr>
+        <p:style>
+          <a:lnRef idx="1">
+            <a:schemeClr val="accent1"/>
+          </a:lnRef>
+          <a:fillRef idx="3">
+            <a:schemeClr val="accent1"/>
+          </a:fillRef>
+          <a:effectRef idx="2">
+            <a:schemeClr val="accent1"/>
+          </a:effectRef>
+          <a:fontRef idx="minor">
+            <a:schemeClr val="lt1"/>
+          </a:fontRef>
+        </p:style>
+        <p:txBody>
+          <a:bodyPr rtlCol="0" anchor="ctr" lIns="109728" rIns="109728" tIns="18288" bIns="18288" wrap="none"/>
+          <a:lstStyle/>
+          <a:p>
+            <a:pPr algn="ctr"/>
+            <a:r>
+              <a:rPr sz="1100" b="0">
+                <a:solidFill>
+                  <a:srgbClr val="DDD9E8"/>
+                </a:solidFill>
+                <a:latin typeface="Calibri"/>
+              </a:rPr>
+              <a:t>01 · Hashing</a:t>
+            </a:r>
+          </a:p>
+        </p:txBody>
+      </p:sp>
+      <p:sp>
+        <p:nvSpPr>
+          <p:cNvPr id="11" name="Rounded Rectangle 10"/>
+          <p:cNvSpPr/>
+          <p:nvPr/>
+        </p:nvSpPr>
+        <p:spPr>
+          <a:xfrm>
+            <a:off x="2070201" y="5669280"/>
+            <a:ext cx="2022652" cy="402336"/>
+          </a:xfrm>
+          <a:prstGeom prst="roundRect">
+            <a:avLst>
+              <a:gd name="adj" fmla="val 50000"/>
+            </a:avLst>
+          </a:prstGeom>
+          <a:solidFill>
+            <a:srgbClr val="FFFFFF">
+              <a:alpha val="14000"/>
+            </a:srgbClr>
+          </a:solidFill>
+          <a:ln w="9525">
+            <a:solidFill>
+              <a:srgbClr val="FFFFFF"/>
+            </a:solidFill>
+          </a:ln>
+          <a:effectLst/>
+        </p:spPr>
+        <p:style>
+          <a:lnRef idx="1">
+            <a:schemeClr val="accent1"/>
+          </a:lnRef>
+          <a:fillRef idx="3">
+            <a:schemeClr val="accent1"/>
+          </a:fillRef>
+          <a:effectRef idx="2">
+            <a:schemeClr val="accent1"/>
+          </a:effectRef>
+          <a:fontRef idx="minor">
+            <a:schemeClr val="lt1"/>
+          </a:fontRef>
+        </p:style>
+        <p:txBody>
+          <a:bodyPr rtlCol="0" anchor="ctr" lIns="109728" rIns="109728" tIns="18288" bIns="18288" wrap="none"/>
+          <a:lstStyle/>
+          <a:p>
+            <a:pPr algn="ctr"/>
+            <a:r>
+              <a:rPr sz="1100" b="0">
+                <a:solidFill>
+                  <a:srgbClr val="DDD9E8"/>
+                </a:solidFill>
+                <a:latin typeface="Calibri"/>
+              </a:rPr>
+              <a:t>02 · Public / Private Keys</a:t>
+            </a:r>
+          </a:p>
+        </p:txBody>
+      </p:sp>
+      <p:sp>
+        <p:nvSpPr>
+          <p:cNvPr id="12" name="Rounded Rectangle 11"/>
+          <p:cNvSpPr/>
+          <p:nvPr/>
+        </p:nvSpPr>
+        <p:spPr>
+          <a:xfrm>
+            <a:off x="4239157" y="5669280"/>
+            <a:ext cx="1627632" cy="402336"/>
+          </a:xfrm>
+          <a:prstGeom prst="roundRect">
+            <a:avLst>
+              <a:gd name="adj" fmla="val 50000"/>
+            </a:avLst>
+          </a:prstGeom>
+          <a:solidFill>
+            <a:srgbClr val="33506A"/>
+          </a:solidFill>
+          <a:ln>
+            <a:noFill/>
+          </a:ln>
+          <a:effectLst/>
+        </p:spPr>
+        <p:style>
+          <a:lnRef idx="1">
+            <a:schemeClr val="accent1"/>
+          </a:lnRef>
+          <a:fillRef idx="3">
+            <a:schemeClr val="accent1"/>
+          </a:fillRef>
+          <a:effectRef idx="2">
+            <a:schemeClr val="accent1"/>
+          </a:effectRef>
+          <a:fontRef idx="minor">
+            <a:schemeClr val="lt1"/>
+          </a:fontRef>
+        </p:style>
+        <p:txBody>
+          <a:bodyPr rtlCol="0" anchor="ctr" lIns="109728" rIns="109728" tIns="18288" bIns="18288" wrap="none"/>
+          <a:lstStyle/>
+          <a:p>
+            <a:pPr algn="ctr"/>
+            <a:r>
+              <a:rPr sz="1100" b="1">
+                <a:solidFill>
+                  <a:srgbClr val="FFFFFF"/>
+                </a:solidFill>
+                <a:latin typeface="Calibri"/>
+              </a:rPr>
+              <a:t>03 · Blocks &amp; Chains</a:t>
+            </a:r>
+          </a:p>
+        </p:txBody>
+      </p:sp>
+      <p:sp>
+        <p:nvSpPr>
+          <p:cNvPr id="13" name="Rounded Rectangle 12"/>
+          <p:cNvSpPr/>
+          <p:nvPr/>
+        </p:nvSpPr>
+        <p:spPr>
+          <a:xfrm>
+            <a:off x="6013093" y="5669280"/>
+            <a:ext cx="1232611" cy="402336"/>
+          </a:xfrm>
+          <a:prstGeom prst="roundRect">
+            <a:avLst>
+              <a:gd name="adj" fmla="val 50000"/>
+            </a:avLst>
+          </a:prstGeom>
+          <a:solidFill>
+            <a:srgbClr val="FFFFFF">
+              <a:alpha val="14000"/>
+            </a:srgbClr>
+          </a:solidFill>
+          <a:ln w="9525">
+            <a:solidFill>
+              <a:srgbClr val="FFFFFF"/>
+            </a:solidFill>
+          </a:ln>
+          <a:effectLst/>
+        </p:spPr>
+        <p:style>
+          <a:lnRef idx="1">
+            <a:schemeClr val="accent1"/>
+          </a:lnRef>
+          <a:fillRef idx="3">
+            <a:schemeClr val="accent1"/>
+          </a:fillRef>
+          <a:effectRef idx="2">
+            <a:schemeClr val="accent1"/>
+          </a:effectRef>
+          <a:fontRef idx="minor">
+            <a:schemeClr val="lt1"/>
+          </a:fontRef>
+        </p:style>
+        <p:txBody>
+          <a:bodyPr rtlCol="0" anchor="ctr" lIns="109728" rIns="109728" tIns="18288" bIns="18288" wrap="none"/>
+          <a:lstStyle/>
+          <a:p>
+            <a:pPr algn="ctr"/>
+            <a:r>
+              <a:rPr sz="1100" b="0">
+                <a:solidFill>
+                  <a:srgbClr val="DDD9E8"/>
+                </a:solidFill>
+                <a:latin typeface="Calibri"/>
+              </a:rPr>
+              <a:t>04 · Consensus</a:t>
+            </a:r>
+          </a:p>
+        </p:txBody>
+      </p:sp>
+      <p:sp>
+        <p:nvSpPr>
+          <p:cNvPr id="14" name="TextBox 13"/>
+          <p:cNvSpPr txBox="1"/>
+          <p:nvPr/>
+        </p:nvSpPr>
+        <p:spPr>
+          <a:xfrm>
+            <a:off x="822960" y="6446520"/>
+            <a:ext cx="8229600" cy="320040"/>
+          </a:xfrm>
+          <a:prstGeom prst="rect">
+            <a:avLst/>
+          </a:prstGeom>
+          <a:noFill/>
+        </p:spPr>
+        <p:txBody>
+          <a:bodyPr wrap="square" anchor="t" lIns="0" rIns="0" tIns="0" bIns="0">
+            <a:spAutoFit/>
+          </a:bodyPr>
+          <a:lstStyle/>
+          <a:p>
+            <a:pPr algn="l">
+              <a:lnSpc>
                 <a:spcPct val="115000"/>
               </a:lnSpc>
             </a:pPr>
@@ -3420,7 +3691,7 @@
       </p:sp>
       <p:sp>
         <p:nvSpPr>
-          <p:cNvPr id="10" name="TextBox 9"/>
+          <p:cNvPr id="15" name="TextBox 14"/>
           <p:cNvSpPr txBox="1"/>
           <p:nvPr/>
         </p:nvSpPr>

--- a/curriculum/week-01/week1-topic-03-blocks-and-chains.pptx
+++ b/curriculum/week-01/week1-topic-03-blocks-and-chains.pptx
@@ -20,6 +20,9 @@
     <p:sldId id="268" r:id="rId19"/>
     <p:sldId id="269" r:id="rId20"/>
     <p:sldId id="270" r:id="rId21"/>
+    <p:sldId id="271" r:id="rId22"/>
+    <p:sldId id="272" r:id="rId23"/>
+    <p:sldId id="273" r:id="rId24"/>
   </p:sldIdLst>
   <p:sldSz cx="12191695" cy="6858000" type="screen4x3"/>
   <p:notesSz cx="6858000" cy="9144000"/>
@@ -3146,51 +3149,162 @@
           </a:p>
         </p:txBody>
       </p:sp>
-      <p:pic>
-        <p:nvPicPr>
-          <p:cNvPr id="3" name="Picture 2" descr="_cover_03.jpg"/>
-          <p:cNvPicPr>
-            <a:picLocks noChangeAspect="1"/>
-          </p:cNvPicPr>
-          <p:nvPr/>
-        </p:nvPicPr>
-        <p:blipFill>
-          <a:blip r:embed="rId2"/>
-          <a:stretch>
-            <a:fillRect/>
-          </a:stretch>
-        </p:blipFill>
-        <p:spPr>
-          <a:xfrm>
-            <a:off x="0" y="0"/>
-            <a:ext cx="12191695" cy="6858000"/>
-          </a:xfrm>
-          <a:prstGeom prst="rect">
-            <a:avLst/>
-          </a:prstGeom>
-        </p:spPr>
-      </p:pic>
-      <p:sp>
-        <p:nvSpPr>
-          <p:cNvPr id="4" name="Rectangle 3"/>
+      <p:sp>
+        <p:nvSpPr>
+          <p:cNvPr id="3" name="TextBox 2"/>
+          <p:cNvSpPr txBox="1"/>
+          <p:nvPr/>
+        </p:nvSpPr>
+        <p:spPr>
+          <a:xfrm>
+            <a:off x="822960" y="822960"/>
+            <a:ext cx="10058400" cy="365760"/>
+          </a:xfrm>
+          <a:prstGeom prst="rect">
+            <a:avLst/>
+          </a:prstGeom>
+          <a:noFill/>
+        </p:spPr>
+        <p:txBody>
+          <a:bodyPr wrap="square" anchor="t" lIns="0" rIns="0" tIns="0" bIns="0">
+            <a:spAutoFit/>
+          </a:bodyPr>
+          <a:lstStyle/>
+          <a:p>
+            <a:pPr algn="l">
+              <a:lnSpc>
+                <a:spcPct val="115000"/>
+              </a:lnSpc>
+            </a:pPr>
+            <a:r>
+              <a:rPr sz="1300" b="1" i="0">
+                <a:solidFill>
+                  <a:srgbClr val="FFC53D"/>
+                </a:solidFill>
+                <a:latin typeface="Calibri"/>
+              </a:rPr>
+              <a:t>BLOCKCHAINCOURSE</a:t>
+            </a:r>
+          </a:p>
+        </p:txBody>
+      </p:sp>
+      <p:sp>
+        <p:nvSpPr>
+          <p:cNvPr id="4" name="TextBox 3"/>
+          <p:cNvSpPr txBox="1"/>
+          <p:nvPr/>
+        </p:nvSpPr>
+        <p:spPr>
+          <a:xfrm>
+            <a:off x="822960" y="1371600"/>
+            <a:ext cx="9144000" cy="1600200"/>
+          </a:xfrm>
+          <a:prstGeom prst="rect">
+            <a:avLst/>
+          </a:prstGeom>
+          <a:noFill/>
+        </p:spPr>
+        <p:txBody>
+          <a:bodyPr wrap="square" anchor="t" lIns="0" rIns="0" tIns="0" bIns="0">
+            <a:spAutoFit/>
+          </a:bodyPr>
+          <a:lstStyle/>
+          <a:p>
+            <a:pPr algn="l">
+              <a:lnSpc>
+                <a:spcPct val="105000"/>
+              </a:lnSpc>
+            </a:pPr>
+            <a:r>
+              <a:rPr sz="4200" b="1" i="0">
+                <a:solidFill>
+                  <a:srgbClr val="FFFFFF"/>
+                </a:solidFill>
+                <a:latin typeface="Century Gothic"/>
+              </a:rPr>
+              <a:t>Practical Engineering</a:t>
+            </a:r>
+          </a:p>
+          <a:p>
+            <a:pPr algn="l">
+              <a:lnSpc>
+                <a:spcPct val="105000"/>
+              </a:lnSpc>
+            </a:pPr>
+            <a:r>
+              <a:rPr sz="4200" b="1" i="0">
+                <a:solidFill>
+                  <a:srgbClr val="FFFFFF"/>
+                </a:solidFill>
+                <a:latin typeface="Century Gothic"/>
+              </a:rPr>
+              <a:t>Over Hype</a:t>
+            </a:r>
+          </a:p>
+        </p:txBody>
+      </p:sp>
+      <p:sp>
+        <p:nvSpPr>
+          <p:cNvPr id="5" name="TextBox 4"/>
+          <p:cNvSpPr txBox="1"/>
+          <p:nvPr/>
+        </p:nvSpPr>
+        <p:spPr>
+          <a:xfrm>
+            <a:off x="822960" y="3246120"/>
+            <a:ext cx="8961120" cy="1463040"/>
+          </a:xfrm>
+          <a:prstGeom prst="rect">
+            <a:avLst/>
+          </a:prstGeom>
+          <a:noFill/>
+        </p:spPr>
+        <p:txBody>
+          <a:bodyPr wrap="square" anchor="t" lIns="0" rIns="0" tIns="0" bIns="0">
+            <a:spAutoFit/>
+          </a:bodyPr>
+          <a:lstStyle/>
+          <a:p>
+            <a:pPr algn="l">
+              <a:lnSpc>
+                <a:spcPct val="140000"/>
+              </a:lnSpc>
+            </a:pPr>
+            <a:r>
+              <a:rPr sz="1650" b="0" i="0">
+                <a:solidFill>
+                  <a:srgbClr val="D8D3E8"/>
+                </a:solidFill>
+                <a:latin typeface="Calibri"/>
+              </a:rPr>
+              <a:t>Most newcomers memorize buzzwords or copy-paste Solidity templates they can't explain. This course is built differently: understand EVM execution, state transitions, and security trade-offs — before you ever touch a framework.</a:t>
+            </a:r>
+          </a:p>
+        </p:txBody>
+      </p:sp>
+      <p:sp>
+        <p:nvSpPr>
+          <p:cNvPr id="6" name="Rounded Rectangle 5"/>
           <p:cNvSpPr/>
           <p:nvPr/>
         </p:nvSpPr>
         <p:spPr>
           <a:xfrm>
-            <a:off x="0" y="0"/>
-            <a:ext cx="12191695" cy="6858000"/>
-          </a:xfrm>
-          <a:prstGeom prst="rect">
-            <a:avLst/>
+            <a:off x="822960" y="4892040"/>
+            <a:ext cx="822960" cy="384048"/>
+          </a:xfrm>
+          <a:prstGeom prst="roundRect">
+            <a:avLst>
+              <a:gd name="adj" fmla="val 50000"/>
+            </a:avLst>
           </a:prstGeom>
           <a:solidFill>
-            <a:srgbClr val="1C1730">
-              <a:alpha val="45000"/>
-            </a:srgbClr>
+            <a:srgbClr val="FFF9EB"/>
           </a:solidFill>
-          <a:ln>
-            <a:noFill/>
+          <a:ln w="12700">
+            <a:solidFill>
+              <a:srgbClr val="FFC53D"/>
+            </a:solidFill>
           </a:ln>
           <a:effectLst/>
         </p:spPr>
@@ -3209,34 +3323,45 @@
           </a:fontRef>
         </p:style>
         <p:txBody>
-          <a:bodyPr rtlCol="0" anchor="ctr"/>
+          <a:bodyPr rtlCol="0" anchor="ctr" lIns="109728" rIns="109728" tIns="18288" bIns="18288" wrap="none"/>
           <a:lstStyle/>
           <a:p>
             <a:pPr algn="ctr"/>
-          </a:p>
-        </p:txBody>
-      </p:sp>
-      <p:sp>
-        <p:nvSpPr>
-          <p:cNvPr id="5" name="Rectangle 4"/>
+            <a:r>
+              <a:rPr sz="1200" b="1">
+                <a:solidFill>
+                  <a:srgbClr val="FFC53D"/>
+                </a:solidFill>
+                <a:latin typeface="Calibri"/>
+              </a:rPr>
+              <a:t>2 Halves</a:t>
+            </a:r>
+          </a:p>
+        </p:txBody>
+      </p:sp>
+      <p:sp>
+        <p:nvSpPr>
+          <p:cNvPr id="7" name="Rounded Rectangle 6"/>
           <p:cNvSpPr/>
           <p:nvPr/>
         </p:nvSpPr>
         <p:spPr>
           <a:xfrm>
-            <a:off x="0" y="0"/>
-            <a:ext cx="12191695" cy="6858000"/>
-          </a:xfrm>
-          <a:prstGeom prst="rect">
-            <a:avLst/>
+            <a:off x="1783080" y="4892040"/>
+            <a:ext cx="745236" cy="384048"/>
+          </a:xfrm>
+          <a:prstGeom prst="roundRect">
+            <a:avLst>
+              <a:gd name="adj" fmla="val 50000"/>
+            </a:avLst>
           </a:prstGeom>
           <a:solidFill>
-            <a:srgbClr val="33506A">
-              <a:alpha val="35000"/>
-            </a:srgbClr>
+            <a:srgbClr val="FFF9EB"/>
           </a:solidFill>
-          <a:ln>
-            <a:noFill/>
+          <a:ln w="12700">
+            <a:solidFill>
+              <a:srgbClr val="FFC53D"/>
+            </a:solidFill>
           </a:ln>
           <a:effectLst/>
         </p:spPr>
@@ -3255,179 +3380,32 @@
           </a:fontRef>
         </p:style>
         <p:txBody>
-          <a:bodyPr rtlCol="0" anchor="ctr"/>
+          <a:bodyPr rtlCol="0" anchor="ctr" lIns="109728" rIns="109728" tIns="18288" bIns="18288" wrap="none"/>
           <a:lstStyle/>
           <a:p>
             <a:pPr algn="ctr"/>
-          </a:p>
-        </p:txBody>
-      </p:sp>
-      <p:sp>
-        <p:nvSpPr>
-          <p:cNvPr id="6" name="TextBox 5"/>
-          <p:cNvSpPr txBox="1"/>
-          <p:nvPr/>
-        </p:nvSpPr>
-        <p:spPr>
-          <a:xfrm>
-            <a:off x="822960" y="502920"/>
-            <a:ext cx="9144000" cy="365760"/>
-          </a:xfrm>
-          <a:prstGeom prst="rect">
-            <a:avLst/>
-          </a:prstGeom>
-          <a:noFill/>
-        </p:spPr>
-        <p:txBody>
-          <a:bodyPr wrap="square" anchor="t" lIns="0" rIns="0" tIns="0" bIns="0">
-            <a:spAutoFit/>
-          </a:bodyPr>
-          <a:lstStyle/>
-          <a:p>
-            <a:pPr algn="l">
-              <a:lnSpc>
-                <a:spcPct val="115000"/>
-              </a:lnSpc>
-            </a:pPr>
-            <a:r>
-              <a:rPr sz="1300" b="1" i="0">
+            <a:r>
+              <a:rPr sz="1200" b="1">
                 <a:solidFill>
                   <a:srgbClr val="FFC53D"/>
                 </a:solidFill>
                 <a:latin typeface="Calibri"/>
               </a:rPr>
-              <a:t>BlockchainCourse · Curriculum · Week 01 · Topic 03 of 04</a:t>
-            </a:r>
-          </a:p>
-        </p:txBody>
-      </p:sp>
-      <p:sp>
-        <p:nvSpPr>
-          <p:cNvPr id="7" name="TextBox 6"/>
-          <p:cNvSpPr txBox="1"/>
-          <p:nvPr/>
-        </p:nvSpPr>
-        <p:spPr>
-          <a:xfrm>
-            <a:off x="822960" y="1188720"/>
-            <a:ext cx="5486400" cy="1188720"/>
-          </a:xfrm>
-          <a:prstGeom prst="rect">
-            <a:avLst/>
-          </a:prstGeom>
-          <a:noFill/>
-        </p:spPr>
-        <p:txBody>
-          <a:bodyPr wrap="square" anchor="t" lIns="0" rIns="0" tIns="0" bIns="0">
-            <a:spAutoFit/>
-          </a:bodyPr>
-          <a:lstStyle/>
-          <a:p>
-            <a:pPr algn="l">
-              <a:lnSpc>
-                <a:spcPct val="115000"/>
-              </a:lnSpc>
-            </a:pPr>
-            <a:r>
-              <a:rPr sz="10000" b="1" i="0">
-                <a:solidFill>
-                  <a:srgbClr val="FFFFFF"/>
-                </a:solidFill>
-                <a:latin typeface="Century Gothic"/>
-              </a:rPr>
-              <a:t>03</a:t>
-            </a:r>
-          </a:p>
-        </p:txBody>
-      </p:sp>
-      <p:sp>
-        <p:nvSpPr>
-          <p:cNvPr id="8" name="TextBox 7"/>
-          <p:cNvSpPr txBox="1"/>
-          <p:nvPr/>
-        </p:nvSpPr>
-        <p:spPr>
-          <a:xfrm>
-            <a:off x="822960" y="2423160"/>
-            <a:ext cx="8961120" cy="1554480"/>
-          </a:xfrm>
-          <a:prstGeom prst="rect">
-            <a:avLst/>
-          </a:prstGeom>
-          <a:noFill/>
-        </p:spPr>
-        <p:txBody>
-          <a:bodyPr wrap="square" anchor="t" lIns="0" rIns="0" tIns="0" bIns="0">
-            <a:spAutoFit/>
-          </a:bodyPr>
-          <a:lstStyle/>
-          <a:p>
-            <a:pPr algn="l">
-              <a:lnSpc>
-                <a:spcPct val="105000"/>
-              </a:lnSpc>
-            </a:pPr>
-            <a:r>
-              <a:rPr sz="4600" b="1" i="0">
-                <a:solidFill>
-                  <a:srgbClr val="FFFFFF"/>
-                </a:solidFill>
-                <a:latin typeface="Century Gothic"/>
-              </a:rPr>
-              <a:t>Blocks &amp; Chains</a:t>
-            </a:r>
-          </a:p>
-        </p:txBody>
-      </p:sp>
-      <p:sp>
-        <p:nvSpPr>
-          <p:cNvPr id="9" name="TextBox 8"/>
-          <p:cNvSpPr txBox="1"/>
-          <p:nvPr/>
-        </p:nvSpPr>
-        <p:spPr>
-          <a:xfrm>
-            <a:off x="822960" y="4160520"/>
-            <a:ext cx="6858000" cy="1097280"/>
-          </a:xfrm>
-          <a:prstGeom prst="rect">
-            <a:avLst/>
-          </a:prstGeom>
-          <a:noFill/>
-        </p:spPr>
-        <p:txBody>
-          <a:bodyPr wrap="square" anchor="t" lIns="0" rIns="0" tIns="0" bIns="0">
-            <a:spAutoFit/>
-          </a:bodyPr>
-          <a:lstStyle/>
-          <a:p>
-            <a:pPr algn="l">
-              <a:lnSpc>
-                <a:spcPct val="125000"/>
-              </a:lnSpc>
-            </a:pPr>
-            <a:r>
-              <a:rPr sz="1900" b="0" i="0">
-                <a:solidFill>
-                  <a:srgbClr val="FFFFFF"/>
-                </a:solidFill>
-                <a:latin typeface="Calibri"/>
-              </a:rPr>
-              <a:t>Link history together so a single altered link breaks everything after it.</a:t>
-            </a:r>
-          </a:p>
-        </p:txBody>
-      </p:sp>
-      <p:sp>
-        <p:nvSpPr>
-          <p:cNvPr id="10" name="Rounded Rectangle 9"/>
+              <a:t>8 Weeks</a:t>
+            </a:r>
+          </a:p>
+        </p:txBody>
+      </p:sp>
+      <p:sp>
+        <p:nvSpPr>
+          <p:cNvPr id="8" name="Rounded Rectangle 7"/>
           <p:cNvSpPr/>
           <p:nvPr/>
         </p:nvSpPr>
         <p:spPr>
           <a:xfrm>
-            <a:off x="822960" y="5669280"/>
-            <a:ext cx="1100937" cy="402336"/>
+            <a:off x="2665476" y="4892040"/>
+            <a:ext cx="2144268" cy="384048"/>
           </a:xfrm>
           <a:prstGeom prst="roundRect">
             <a:avLst>
@@ -3435,13 +3413,11 @@
             </a:avLst>
           </a:prstGeom>
           <a:solidFill>
-            <a:srgbClr val="FFFFFF">
-              <a:alpha val="14000"/>
-            </a:srgbClr>
+            <a:srgbClr val="FFF9EB"/>
           </a:solidFill>
-          <a:ln w="9525">
+          <a:ln w="12700">
             <a:solidFill>
-              <a:srgbClr val="FFFFFF"/>
+              <a:srgbClr val="FFC53D"/>
             </a:solidFill>
           </a:ln>
           <a:effectLst/>
@@ -3466,27 +3442,27 @@
           <a:p>
             <a:pPr algn="ctr"/>
             <a:r>
-              <a:rPr sz="1100" b="0">
-                <a:solidFill>
-                  <a:srgbClr val="DDD9E8"/>
+              <a:rPr sz="1200" b="1">
+                <a:solidFill>
+                  <a:srgbClr val="FFC53D"/>
                 </a:solidFill>
                 <a:latin typeface="Calibri"/>
               </a:rPr>
-              <a:t>01 · Hashing</a:t>
-            </a:r>
-          </a:p>
-        </p:txBody>
-      </p:sp>
-      <p:sp>
-        <p:nvSpPr>
-          <p:cNvPr id="11" name="Rounded Rectangle 10"/>
+              <a:t>Hackathon-Ready by Week 4</a:t>
+            </a:r>
+          </a:p>
+        </p:txBody>
+      </p:sp>
+      <p:sp>
+        <p:nvSpPr>
+          <p:cNvPr id="9" name="Rounded Rectangle 8"/>
           <p:cNvSpPr/>
           <p:nvPr/>
         </p:nvSpPr>
         <p:spPr>
           <a:xfrm>
-            <a:off x="2070201" y="5669280"/>
-            <a:ext cx="2022652" cy="402336"/>
+            <a:off x="4946904" y="4892040"/>
+            <a:ext cx="1988820" cy="384048"/>
           </a:xfrm>
           <a:prstGeom prst="roundRect">
             <a:avLst>
@@ -3494,13 +3470,11 @@
             </a:avLst>
           </a:prstGeom>
           <a:solidFill>
-            <a:srgbClr val="FFFFFF">
-              <a:alpha val="14000"/>
-            </a:srgbClr>
+            <a:srgbClr val="FFF9EB"/>
           </a:solidFill>
-          <a:ln w="9525">
+          <a:ln w="12700">
             <a:solidFill>
-              <a:srgbClr val="FFFFFF"/>
+              <a:srgbClr val="FFC53D"/>
             </a:solidFill>
           </a:ln>
           <a:effectLst/>
@@ -3525,173 +3499,20 @@
           <a:p>
             <a:pPr algn="ctr"/>
             <a:r>
-              <a:rPr sz="1100" b="0">
-                <a:solidFill>
-                  <a:srgbClr val="DDD9E8"/>
+              <a:rPr sz="1200" b="1">
+                <a:solidFill>
+                  <a:srgbClr val="FFC53D"/>
                 </a:solidFill>
                 <a:latin typeface="Calibri"/>
               </a:rPr>
-              <a:t>02 · Public / Private Keys</a:t>
-            </a:r>
-          </a:p>
-        </p:txBody>
-      </p:sp>
-      <p:sp>
-        <p:nvSpPr>
-          <p:cNvPr id="12" name="Rounded Rectangle 11"/>
-          <p:cNvSpPr/>
-          <p:nvPr/>
-        </p:nvSpPr>
-        <p:spPr>
-          <a:xfrm>
-            <a:off x="4239157" y="5669280"/>
-            <a:ext cx="1627632" cy="402336"/>
-          </a:xfrm>
-          <a:prstGeom prst="roundRect">
-            <a:avLst>
-              <a:gd name="adj" fmla="val 50000"/>
-            </a:avLst>
-          </a:prstGeom>
-          <a:solidFill>
-            <a:srgbClr val="33506A"/>
-          </a:solidFill>
-          <a:ln>
-            <a:noFill/>
-          </a:ln>
-          <a:effectLst/>
-        </p:spPr>
-        <p:style>
-          <a:lnRef idx="1">
-            <a:schemeClr val="accent1"/>
-          </a:lnRef>
-          <a:fillRef idx="3">
-            <a:schemeClr val="accent1"/>
-          </a:fillRef>
-          <a:effectRef idx="2">
-            <a:schemeClr val="accent1"/>
-          </a:effectRef>
-          <a:fontRef idx="minor">
-            <a:schemeClr val="lt1"/>
-          </a:fontRef>
-        </p:style>
-        <p:txBody>
-          <a:bodyPr rtlCol="0" anchor="ctr" lIns="109728" rIns="109728" tIns="18288" bIns="18288" wrap="none"/>
-          <a:lstStyle/>
-          <a:p>
-            <a:pPr algn="ctr"/>
-            <a:r>
-              <a:rPr sz="1100" b="1">
-                <a:solidFill>
-                  <a:srgbClr val="FFFFFF"/>
-                </a:solidFill>
-                <a:latin typeface="Calibri"/>
-              </a:rPr>
-              <a:t>03 · Blocks &amp; Chains</a:t>
-            </a:r>
-          </a:p>
-        </p:txBody>
-      </p:sp>
-      <p:sp>
-        <p:nvSpPr>
-          <p:cNvPr id="13" name="Rounded Rectangle 12"/>
-          <p:cNvSpPr/>
-          <p:nvPr/>
-        </p:nvSpPr>
-        <p:spPr>
-          <a:xfrm>
-            <a:off x="6013093" y="5669280"/>
-            <a:ext cx="1232611" cy="402336"/>
-          </a:xfrm>
-          <a:prstGeom prst="roundRect">
-            <a:avLst>
-              <a:gd name="adj" fmla="val 50000"/>
-            </a:avLst>
-          </a:prstGeom>
-          <a:solidFill>
-            <a:srgbClr val="FFFFFF">
-              <a:alpha val="14000"/>
-            </a:srgbClr>
-          </a:solidFill>
-          <a:ln w="9525">
-            <a:solidFill>
-              <a:srgbClr val="FFFFFF"/>
-            </a:solidFill>
-          </a:ln>
-          <a:effectLst/>
-        </p:spPr>
-        <p:style>
-          <a:lnRef idx="1">
-            <a:schemeClr val="accent1"/>
-          </a:lnRef>
-          <a:fillRef idx="3">
-            <a:schemeClr val="accent1"/>
-          </a:fillRef>
-          <a:effectRef idx="2">
-            <a:schemeClr val="accent1"/>
-          </a:effectRef>
-          <a:fontRef idx="minor">
-            <a:schemeClr val="lt1"/>
-          </a:fontRef>
-        </p:style>
-        <p:txBody>
-          <a:bodyPr rtlCol="0" anchor="ctr" lIns="109728" rIns="109728" tIns="18288" bIns="18288" wrap="none"/>
-          <a:lstStyle/>
-          <a:p>
-            <a:pPr algn="ctr"/>
-            <a:r>
-              <a:rPr sz="1100" b="0">
-                <a:solidFill>
-                  <a:srgbClr val="DDD9E8"/>
-                </a:solidFill>
-                <a:latin typeface="Calibri"/>
-              </a:rPr>
-              <a:t>04 · Consensus</a:t>
-            </a:r>
-          </a:p>
-        </p:txBody>
-      </p:sp>
-      <p:sp>
-        <p:nvSpPr>
-          <p:cNvPr id="14" name="TextBox 13"/>
-          <p:cNvSpPr txBox="1"/>
-          <p:nvPr/>
-        </p:nvSpPr>
-        <p:spPr>
-          <a:xfrm>
-            <a:off x="822960" y="6446520"/>
-            <a:ext cx="8229600" cy="320040"/>
-          </a:xfrm>
-          <a:prstGeom prst="rect">
-            <a:avLst/>
-          </a:prstGeom>
-          <a:noFill/>
-        </p:spPr>
-        <p:txBody>
-          <a:bodyPr wrap="square" anchor="t" lIns="0" rIns="0" tIns="0" bIns="0">
-            <a:spAutoFit/>
-          </a:bodyPr>
-          <a:lstStyle/>
-          <a:p>
-            <a:pPr algn="l">
-              <a:lnSpc>
-                <a:spcPct val="115000"/>
-              </a:lnSpc>
-            </a:pPr>
-            <a:r>
-              <a:rPr sz="1000" b="0" i="0">
-                <a:solidFill>
-                  <a:srgbClr val="E9E6F2"/>
-                </a:solidFill>
-                <a:latin typeface="Calibri"/>
-              </a:rPr>
-              <a:t>Photo: Petritap / Wikimedia Commons, CC BY-SA 3.0</a:t>
-            </a:r>
-          </a:p>
-        </p:txBody>
-      </p:sp>
-      <p:sp>
-        <p:nvSpPr>
-          <p:cNvPr id="15" name="TextBox 14"/>
+              <a:t>Understand How It Works</a:t>
+            </a:r>
+          </a:p>
+        </p:txBody>
+      </p:sp>
+      <p:sp>
+        <p:nvSpPr>
+          <p:cNvPr id="10" name="TextBox 9"/>
           <p:cNvSpPr txBox="1"/>
           <p:nvPr/>
         </p:nvSpPr>
@@ -3723,7 +3544,7 @@
                 </a:solidFill>
                 <a:latin typeface="Consolas"/>
               </a:rPr>
-              <a:t>01 / 15</a:t>
+              <a:t>01 / 18</a:t>
             </a:r>
           </a:p>
         </p:txBody>
@@ -3824,7 +3645,7 @@
                 </a:solidFill>
                 <a:latin typeface="Calibri"/>
               </a:rPr>
-              <a:t>REAL-WORLD USES</a:t>
+              <a:t>TOPIC 03 — BLOCKS &amp; CHAINS</a:t>
             </a:r>
           </a:p>
         </p:txBody>
@@ -3837,7 +3658,46 @@
         </p:nvSpPr>
         <p:spPr>
           <a:xfrm>
-            <a:off x="822960" y="1051560"/>
+            <a:off x="8503920" y="640080"/>
+            <a:ext cx="2834640" cy="365760"/>
+          </a:xfrm>
+          <a:prstGeom prst="rect">
+            <a:avLst/>
+          </a:prstGeom>
+          <a:noFill/>
+        </p:spPr>
+        <p:txBody>
+          <a:bodyPr wrap="square" anchor="t" lIns="0" rIns="0" tIns="0" bIns="0">
+            <a:spAutoFit/>
+          </a:bodyPr>
+          <a:lstStyle/>
+          <a:p>
+            <a:pPr algn="r">
+              <a:lnSpc>
+                <a:spcPct val="115000"/>
+              </a:lnSpc>
+            </a:pPr>
+            <a:r>
+              <a:rPr sz="1200" b="1" i="0">
+                <a:solidFill>
+                  <a:srgbClr val="5C576E"/>
+                </a:solidFill>
+                <a:latin typeface="Calibri"/>
+              </a:rPr>
+              <a:t>KEY IDEA 4 / 4</a:t>
+            </a:r>
+          </a:p>
+        </p:txBody>
+      </p:sp>
+      <p:sp>
+        <p:nvSpPr>
+          <p:cNvPr id="5" name="TextBox 4"/>
+          <p:cNvSpPr txBox="1"/>
+          <p:nvPr/>
+        </p:nvSpPr>
+        <p:spPr>
+          <a:xfrm>
+            <a:off x="822960" y="1097280"/>
             <a:ext cx="9601200" cy="1005840"/>
           </a:xfrm>
           <a:prstGeom prst="rect">
@@ -3863,34 +3723,71 @@
                 </a:solidFill>
                 <a:latin typeface="Century Gothic"/>
               </a:rPr>
-              <a:t>Not Just Blockchain</a:t>
-            </a:r>
-          </a:p>
-        </p:txBody>
-      </p:sp>
-      <p:sp>
-        <p:nvSpPr>
-          <p:cNvPr id="5" name="Rounded Rectangle 4"/>
+              <a:t>Confirmations</a:t>
+            </a:r>
+          </a:p>
+        </p:txBody>
+      </p:sp>
+      <p:sp>
+        <p:nvSpPr>
+          <p:cNvPr id="6" name="TextBox 5"/>
+          <p:cNvSpPr txBox="1"/>
+          <p:nvPr/>
+        </p:nvSpPr>
+        <p:spPr>
+          <a:xfrm>
+            <a:off x="822960" y="2148840"/>
+            <a:ext cx="9875520" cy="2011680"/>
+          </a:xfrm>
+          <a:prstGeom prst="rect">
+            <a:avLst/>
+          </a:prstGeom>
+          <a:noFill/>
+        </p:spPr>
+        <p:txBody>
+          <a:bodyPr wrap="square" anchor="t" lIns="0" rIns="0" tIns="0" bIns="0">
+            <a:spAutoFit/>
+          </a:bodyPr>
+          <a:lstStyle/>
+          <a:p>
+            <a:pPr algn="l">
+              <a:lnSpc>
+                <a:spcPct val="150000"/>
+              </a:lnSpc>
+            </a:pPr>
+            <a:r>
+              <a:rPr sz="1650" b="0" i="0">
+                <a:solidFill>
+                  <a:srgbClr val="1C1730"/>
+                </a:solidFill>
+                <a:latin typeface="Calibri"/>
+              </a:rPr>
+              <a:t>The more blocks get built on top of a given block, the more expensive and difficult it becomes to rewrite it — this is exactly what "number of confirmations" means in practice on a block explorer.</a:t>
+            </a:r>
+          </a:p>
+        </p:txBody>
+      </p:sp>
+      <p:sp>
+        <p:nvSpPr>
+          <p:cNvPr id="7" name="Rounded Rectangle 6"/>
           <p:cNvSpPr/>
           <p:nvPr/>
         </p:nvSpPr>
         <p:spPr>
           <a:xfrm>
-            <a:off x="822960" y="2011680"/>
-            <a:ext cx="3322320" cy="3108960"/>
+            <a:off x="822960" y="4434840"/>
+            <a:ext cx="10515600" cy="1280160"/>
           </a:xfrm>
           <a:prstGeom prst="roundRect">
             <a:avLst>
-              <a:gd name="adj" fmla="val 9000"/>
+              <a:gd name="adj" fmla="val 6000"/>
             </a:avLst>
           </a:prstGeom>
           <a:solidFill>
-            <a:srgbClr val="FFFFFF"/>
+            <a:srgbClr val="EAEDF0"/>
           </a:solidFill>
-          <a:ln w="12700">
-            <a:solidFill>
-              <a:srgbClr val="DED9EA"/>
-            </a:solidFill>
+          <a:ln>
+            <a:noFill/>
           </a:ln>
           <a:effectLst/>
         </p:spPr>
@@ -3918,14 +3815,14 @@
       </p:sp>
       <p:sp>
         <p:nvSpPr>
-          <p:cNvPr id="6" name="TextBox 5"/>
-          <p:cNvSpPr txBox="1"/>
-          <p:nvPr/>
-        </p:nvSpPr>
-        <p:spPr>
-          <a:xfrm>
-            <a:off x="1078992" y="2267712"/>
-            <a:ext cx="2810256" cy="457200"/>
+          <p:cNvPr id="8" name="TextBox 7"/>
+          <p:cNvSpPr txBox="1"/>
+          <p:nvPr/>
+        </p:nvSpPr>
+        <p:spPr>
+          <a:xfrm>
+            <a:off x="1143000" y="4617720"/>
+            <a:ext cx="9875520" cy="320040"/>
           </a:xfrm>
           <a:prstGeom prst="rect">
             <a:avLst/>
@@ -3944,27 +3841,27 @@
               </a:lnSpc>
             </a:pPr>
             <a:r>
-              <a:rPr sz="1450" b="1" i="0">
+              <a:rPr sz="1100" b="1" i="0">
                 <a:solidFill>
                   <a:srgbClr val="33506A"/>
                 </a:solidFill>
-                <a:latin typeface="Century Gothic"/>
-              </a:rPr>
-              <a:t>Audit Logs</a:t>
-            </a:r>
-          </a:p>
-        </p:txBody>
-      </p:sp>
-      <p:sp>
-        <p:nvSpPr>
-          <p:cNvPr id="7" name="TextBox 6"/>
-          <p:cNvSpPr txBox="1"/>
-          <p:nvPr/>
-        </p:nvSpPr>
-        <p:spPr>
-          <a:xfrm>
-            <a:off x="1078992" y="2724912"/>
-            <a:ext cx="2810256" cy="2258568"/>
+                <a:latin typeface="Calibri"/>
+              </a:rPr>
+              <a:t>EXAMPLE</a:t>
+            </a:r>
+          </a:p>
+        </p:txBody>
+      </p:sp>
+      <p:sp>
+        <p:nvSpPr>
+          <p:cNvPr id="9" name="TextBox 8"/>
+          <p:cNvSpPr txBox="1"/>
+          <p:nvPr/>
+        </p:nvSpPr>
+        <p:spPr>
+          <a:xfrm>
+            <a:off x="1143000" y="4956048"/>
+            <a:ext cx="9875520" cy="640080"/>
           </a:xfrm>
           <a:prstGeom prst="rect">
             <a:avLst/>
@@ -3979,104 +3876,17 @@
           <a:p>
             <a:pPr algn="l">
               <a:lnSpc>
-                <a:spcPct val="128000"/>
-              </a:lnSpc>
-            </a:pPr>
-            <a:r>
-              <a:rPr sz="1150" b="0" i="0">
+                <a:spcPct val="130000"/>
+              </a:lnSpc>
+            </a:pPr>
+            <a:r>
+              <a:rPr sz="1400" b="0" i="0">
                 <a:solidFill>
                   <a:srgbClr val="1C1730"/>
                 </a:solidFill>
-                <a:latin typeface="Calibri"/>
-              </a:rPr>
-              <a:t>Financial and healthcare systems hash-chain compliance logs so auditors can prove records weren't altered after the fact.</a:t>
-            </a:r>
-          </a:p>
-        </p:txBody>
-      </p:sp>
-      <p:sp>
-        <p:nvSpPr>
-          <p:cNvPr id="8" name="Rounded Rectangle 7"/>
-          <p:cNvSpPr/>
-          <p:nvPr/>
-        </p:nvSpPr>
-        <p:spPr>
-          <a:xfrm>
-            <a:off x="4419600" y="2011680"/>
-            <a:ext cx="3322320" cy="3108960"/>
-          </a:xfrm>
-          <a:prstGeom prst="roundRect">
-            <a:avLst>
-              <a:gd name="adj" fmla="val 9000"/>
-            </a:avLst>
-          </a:prstGeom>
-          <a:solidFill>
-            <a:srgbClr val="FFFFFF"/>
-          </a:solidFill>
-          <a:ln w="12700">
-            <a:solidFill>
-              <a:srgbClr val="DED9EA"/>
-            </a:solidFill>
-          </a:ln>
-          <a:effectLst/>
-        </p:spPr>
-        <p:style>
-          <a:lnRef idx="1">
-            <a:schemeClr val="accent1"/>
-          </a:lnRef>
-          <a:fillRef idx="3">
-            <a:schemeClr val="accent1"/>
-          </a:fillRef>
-          <a:effectRef idx="2">
-            <a:schemeClr val="accent1"/>
-          </a:effectRef>
-          <a:fontRef idx="minor">
-            <a:schemeClr val="lt1"/>
-          </a:fontRef>
-        </p:style>
-        <p:txBody>
-          <a:bodyPr rtlCol="0" anchor="ctr"/>
-          <a:lstStyle/>
-          <a:p>
-            <a:pPr algn="ctr"/>
-          </a:p>
-        </p:txBody>
-      </p:sp>
-      <p:sp>
-        <p:nvSpPr>
-          <p:cNvPr id="9" name="TextBox 8"/>
-          <p:cNvSpPr txBox="1"/>
-          <p:nvPr/>
-        </p:nvSpPr>
-        <p:spPr>
-          <a:xfrm>
-            <a:off x="4675632" y="2267712"/>
-            <a:ext cx="2810256" cy="457200"/>
-          </a:xfrm>
-          <a:prstGeom prst="rect">
-            <a:avLst/>
-          </a:prstGeom>
-          <a:noFill/>
-        </p:spPr>
-        <p:txBody>
-          <a:bodyPr wrap="square" anchor="t" lIns="0" rIns="0" tIns="0" bIns="0">
-            <a:spAutoFit/>
-          </a:bodyPr>
-          <a:lstStyle/>
-          <a:p>
-            <a:pPr algn="l">
-              <a:lnSpc>
-                <a:spcPct val="115000"/>
-              </a:lnSpc>
-            </a:pPr>
-            <a:r>
-              <a:rPr sz="1450" b="1" i="0">
-                <a:solidFill>
-                  <a:srgbClr val="33506A"/>
-                </a:solidFill>
-                <a:latin typeface="Century Gothic"/>
-              </a:rPr>
-              <a:t>Certificate Transparency</a:t>
+                <a:latin typeface="Consolas"/>
+              </a:rPr>
+              <a:t>6 confirmations = 6 blocks now depend on this one being correct.</a:t>
             </a:r>
           </a:p>
         </p:txBody>
@@ -4084,171 +3894,6 @@
       <p:sp>
         <p:nvSpPr>
           <p:cNvPr id="10" name="TextBox 9"/>
-          <p:cNvSpPr txBox="1"/>
-          <p:nvPr/>
-        </p:nvSpPr>
-        <p:spPr>
-          <a:xfrm>
-            <a:off x="4675632" y="2724912"/>
-            <a:ext cx="2810256" cy="2258568"/>
-          </a:xfrm>
-          <a:prstGeom prst="rect">
-            <a:avLst/>
-          </a:prstGeom>
-          <a:noFill/>
-        </p:spPr>
-        <p:txBody>
-          <a:bodyPr wrap="square" anchor="t" lIns="0" rIns="0" tIns="0" bIns="0">
-            <a:spAutoFit/>
-          </a:bodyPr>
-          <a:lstStyle/>
-          <a:p>
-            <a:pPr algn="l">
-              <a:lnSpc>
-                <a:spcPct val="128000"/>
-              </a:lnSpc>
-            </a:pPr>
-            <a:r>
-              <a:rPr sz="1150" b="0" i="0">
-                <a:solidFill>
-                  <a:srgbClr val="1C1730"/>
-                </a:solidFill>
-                <a:latin typeface="Calibri"/>
-              </a:rPr>
-              <a:t>Every SSL certificate issued is logged into a public, hash-chained, tamper-evident record.</a:t>
-            </a:r>
-          </a:p>
-        </p:txBody>
-      </p:sp>
-      <p:sp>
-        <p:nvSpPr>
-          <p:cNvPr id="11" name="Rounded Rectangle 10"/>
-          <p:cNvSpPr/>
-          <p:nvPr/>
-        </p:nvSpPr>
-        <p:spPr>
-          <a:xfrm>
-            <a:off x="8016240" y="2011680"/>
-            <a:ext cx="3322320" cy="3108960"/>
-          </a:xfrm>
-          <a:prstGeom prst="roundRect">
-            <a:avLst>
-              <a:gd name="adj" fmla="val 9000"/>
-            </a:avLst>
-          </a:prstGeom>
-          <a:solidFill>
-            <a:srgbClr val="FFFFFF"/>
-          </a:solidFill>
-          <a:ln w="12700">
-            <a:solidFill>
-              <a:srgbClr val="DED9EA"/>
-            </a:solidFill>
-          </a:ln>
-          <a:effectLst/>
-        </p:spPr>
-        <p:style>
-          <a:lnRef idx="1">
-            <a:schemeClr val="accent1"/>
-          </a:lnRef>
-          <a:fillRef idx="3">
-            <a:schemeClr val="accent1"/>
-          </a:fillRef>
-          <a:effectRef idx="2">
-            <a:schemeClr val="accent1"/>
-          </a:effectRef>
-          <a:fontRef idx="minor">
-            <a:schemeClr val="lt1"/>
-          </a:fontRef>
-        </p:style>
-        <p:txBody>
-          <a:bodyPr rtlCol="0" anchor="ctr"/>
-          <a:lstStyle/>
-          <a:p>
-            <a:pPr algn="ctr"/>
-          </a:p>
-        </p:txBody>
-      </p:sp>
-      <p:sp>
-        <p:nvSpPr>
-          <p:cNvPr id="12" name="TextBox 11"/>
-          <p:cNvSpPr txBox="1"/>
-          <p:nvPr/>
-        </p:nvSpPr>
-        <p:spPr>
-          <a:xfrm>
-            <a:off x="8272272" y="2267712"/>
-            <a:ext cx="2810256" cy="457200"/>
-          </a:xfrm>
-          <a:prstGeom prst="rect">
-            <a:avLst/>
-          </a:prstGeom>
-          <a:noFill/>
-        </p:spPr>
-        <p:txBody>
-          <a:bodyPr wrap="square" anchor="t" lIns="0" rIns="0" tIns="0" bIns="0">
-            <a:spAutoFit/>
-          </a:bodyPr>
-          <a:lstStyle/>
-          <a:p>
-            <a:pPr algn="l">
-              <a:lnSpc>
-                <a:spcPct val="115000"/>
-              </a:lnSpc>
-            </a:pPr>
-            <a:r>
-              <a:rPr sz="1450" b="1" i="0">
-                <a:solidFill>
-                  <a:srgbClr val="33506A"/>
-                </a:solidFill>
-                <a:latin typeface="Century Gothic"/>
-              </a:rPr>
-              <a:t>Merkle Trees / SPV</a:t>
-            </a:r>
-          </a:p>
-        </p:txBody>
-      </p:sp>
-      <p:sp>
-        <p:nvSpPr>
-          <p:cNvPr id="13" name="TextBox 12"/>
-          <p:cNvSpPr txBox="1"/>
-          <p:nvPr/>
-        </p:nvSpPr>
-        <p:spPr>
-          <a:xfrm>
-            <a:off x="8272272" y="2724912"/>
-            <a:ext cx="2810256" cy="2258568"/>
-          </a:xfrm>
-          <a:prstGeom prst="rect">
-            <a:avLst/>
-          </a:prstGeom>
-          <a:noFill/>
-        </p:spPr>
-        <p:txBody>
-          <a:bodyPr wrap="square" anchor="t" lIns="0" rIns="0" tIns="0" bIns="0">
-            <a:spAutoFit/>
-          </a:bodyPr>
-          <a:lstStyle/>
-          <a:p>
-            <a:pPr algn="l">
-              <a:lnSpc>
-                <a:spcPct val="128000"/>
-              </a:lnSpc>
-            </a:pPr>
-            <a:r>
-              <a:rPr sz="1150" b="0" i="0">
-                <a:solidFill>
-                  <a:srgbClr val="1C1730"/>
-                </a:solidFill>
-                <a:latin typeface="Calibri"/>
-              </a:rPr>
-              <a:t>Lightweight wallets verify a single transaction is in a block via a short proof — without downloading the whole block.</a:t>
-            </a:r>
-          </a:p>
-        </p:txBody>
-      </p:sp>
-      <p:sp>
-        <p:nvSpPr>
-          <p:cNvPr id="14" name="TextBox 13"/>
           <p:cNvSpPr txBox="1"/>
           <p:nvPr/>
         </p:nvSpPr>
@@ -4280,7 +3925,7 @@
                 </a:solidFill>
                 <a:latin typeface="Consolas"/>
               </a:rPr>
-              <a:t>10 / 15</a:t>
+              <a:t>10 / 18</a:t>
             </a:r>
           </a:p>
         </p:txBody>
@@ -4381,7 +4026,7 @@
                 </a:solidFill>
                 <a:latin typeface="Calibri"/>
               </a:rPr>
-              <a:t>FLAGSHIP CASE STUDY</a:t>
+              <a:t>WORKED EXAMPLE — PART 1</a:t>
             </a:r>
           </a:p>
         </p:txBody>
@@ -4394,7 +4039,7 @@
         </p:nvSpPr>
         <p:spPr>
           <a:xfrm>
-            <a:off x="822960" y="1097280"/>
+            <a:off x="822960" y="1051560"/>
             <a:ext cx="10332720" cy="1005840"/>
           </a:xfrm>
           <a:prstGeom prst="rect">
@@ -4414,13 +4059,13 @@
               </a:lnSpc>
             </a:pPr>
             <a:r>
-              <a:rPr sz="3000" b="1" i="0">
+              <a:rPr sz="2700" b="1" i="0">
                 <a:solidFill>
                   <a:srgbClr val="1C1730"/>
                 </a:solidFill>
                 <a:latin typeface="Century Gothic"/>
               </a:rPr>
-              <a:t>You Already Use This — It's Called Git</a:t>
+              <a:t>A Real, Runnable 3-Block Chain — And A Real Tampering Attempt</a:t>
             </a:r>
           </a:p>
         </p:txBody>
@@ -4433,16 +4078,16 @@
         </p:nvSpPr>
         <p:spPr>
           <a:xfrm>
-            <a:off x="822960" y="2423160"/>
-            <a:ext cx="10515600" cy="3749039"/>
+            <a:off x="822960" y="1965960"/>
+            <a:ext cx="10515600" cy="3840480"/>
           </a:xfrm>
           <a:prstGeom prst="roundRect">
             <a:avLst>
-              <a:gd name="adj" fmla="val 4000"/>
+              <a:gd name="adj" fmla="val 4500"/>
             </a:avLst>
           </a:prstGeom>
           <a:solidFill>
-            <a:srgbClr val="33506A"/>
+            <a:srgbClr val="141026"/>
           </a:solidFill>
           <a:ln>
             <a:noFill/>
@@ -4473,14 +4118,146 @@
       </p:sp>
       <p:sp>
         <p:nvSpPr>
-          <p:cNvPr id="6" name="TextBox 5"/>
-          <p:cNvSpPr txBox="1"/>
-          <p:nvPr/>
-        </p:nvSpPr>
-        <p:spPr>
-          <a:xfrm>
-            <a:off x="1280160" y="2743200"/>
-            <a:ext cx="9601200" cy="3200400"/>
+          <p:cNvPr id="6" name="Oval 5"/>
+          <p:cNvSpPr/>
+          <p:nvPr/>
+        </p:nvSpPr>
+        <p:spPr>
+          <a:xfrm>
+            <a:off x="1024128" y="2130552"/>
+            <a:ext cx="109728" cy="109728"/>
+          </a:xfrm>
+          <a:prstGeom prst="ellipse">
+            <a:avLst/>
+          </a:prstGeom>
+          <a:solidFill>
+            <a:srgbClr val="FF6459"/>
+          </a:solidFill>
+          <a:ln>
+            <a:noFill/>
+          </a:ln>
+          <a:effectLst/>
+        </p:spPr>
+        <p:style>
+          <a:lnRef idx="1">
+            <a:schemeClr val="accent1"/>
+          </a:lnRef>
+          <a:fillRef idx="3">
+            <a:schemeClr val="accent1"/>
+          </a:fillRef>
+          <a:effectRef idx="2">
+            <a:schemeClr val="accent1"/>
+          </a:effectRef>
+          <a:fontRef idx="minor">
+            <a:schemeClr val="lt1"/>
+          </a:fontRef>
+        </p:style>
+        <p:txBody>
+          <a:bodyPr rtlCol="0" anchor="ctr"/>
+          <a:lstStyle/>
+          <a:p>
+            <a:pPr algn="ctr"/>
+          </a:p>
+        </p:txBody>
+      </p:sp>
+      <p:sp>
+        <p:nvSpPr>
+          <p:cNvPr id="7" name="Oval 6"/>
+          <p:cNvSpPr/>
+          <p:nvPr/>
+        </p:nvSpPr>
+        <p:spPr>
+          <a:xfrm>
+            <a:off x="1225296" y="2130552"/>
+            <a:ext cx="109728" cy="109728"/>
+          </a:xfrm>
+          <a:prstGeom prst="ellipse">
+            <a:avLst/>
+          </a:prstGeom>
+          <a:solidFill>
+            <a:srgbClr val="FFC02E"/>
+          </a:solidFill>
+          <a:ln>
+            <a:noFill/>
+          </a:ln>
+          <a:effectLst/>
+        </p:spPr>
+        <p:style>
+          <a:lnRef idx="1">
+            <a:schemeClr val="accent1"/>
+          </a:lnRef>
+          <a:fillRef idx="3">
+            <a:schemeClr val="accent1"/>
+          </a:fillRef>
+          <a:effectRef idx="2">
+            <a:schemeClr val="accent1"/>
+          </a:effectRef>
+          <a:fontRef idx="minor">
+            <a:schemeClr val="lt1"/>
+          </a:fontRef>
+        </p:style>
+        <p:txBody>
+          <a:bodyPr rtlCol="0" anchor="ctr"/>
+          <a:lstStyle/>
+          <a:p>
+            <a:pPr algn="ctr"/>
+          </a:p>
+        </p:txBody>
+      </p:sp>
+      <p:sp>
+        <p:nvSpPr>
+          <p:cNvPr id="8" name="Oval 7"/>
+          <p:cNvSpPr/>
+          <p:nvPr/>
+        </p:nvSpPr>
+        <p:spPr>
+          <a:xfrm>
+            <a:off x="1426464" y="2130552"/>
+            <a:ext cx="109728" cy="109728"/>
+          </a:xfrm>
+          <a:prstGeom prst="ellipse">
+            <a:avLst/>
+          </a:prstGeom>
+          <a:solidFill>
+            <a:srgbClr val="28C93F"/>
+          </a:solidFill>
+          <a:ln>
+            <a:noFill/>
+          </a:ln>
+          <a:effectLst/>
+        </p:spPr>
+        <p:style>
+          <a:lnRef idx="1">
+            <a:schemeClr val="accent1"/>
+          </a:lnRef>
+          <a:fillRef idx="3">
+            <a:schemeClr val="accent1"/>
+          </a:fillRef>
+          <a:effectRef idx="2">
+            <a:schemeClr val="accent1"/>
+          </a:effectRef>
+          <a:fontRef idx="minor">
+            <a:schemeClr val="lt1"/>
+          </a:fontRef>
+        </p:style>
+        <p:txBody>
+          <a:bodyPr rtlCol="0" anchor="ctr"/>
+          <a:lstStyle/>
+          <a:p>
+            <a:pPr algn="ctr"/>
+          </a:p>
+        </p:txBody>
+      </p:sp>
+      <p:sp>
+        <p:nvSpPr>
+          <p:cNvPr id="9" name="TextBox 8"/>
+          <p:cNvSpPr txBox="1"/>
+          <p:nvPr/>
+        </p:nvSpPr>
+        <p:spPr>
+          <a:xfrm>
+            <a:off x="1078992" y="2350008"/>
+            <a:ext cx="10003536" cy="3273552"/>
           </a:xfrm>
           <a:prstGeom prst="rect">
             <a:avLst/>
@@ -4495,24 +4272,200 @@
           <a:p>
             <a:pPr algn="l">
               <a:lnSpc>
-                <a:spcPct val="155000"/>
-              </a:lnSpc>
-            </a:pPr>
-            <a:r>
-              <a:rPr sz="1600" b="0" i="0">
-                <a:solidFill>
-                  <a:srgbClr val="FFFFFF"/>
+                <a:spcPct val="135000"/>
+              </a:lnSpc>
+            </a:pPr>
+            <a:r>
+              <a:rPr sz="1350" b="0">
+                <a:solidFill>
+                  <a:srgbClr val="8B84AD"/>
+                </a:solidFill>
+                <a:latin typeface="Consolas"/>
+              </a:rPr>
+              <a:t># attacker edits Block 2's data after the fact:</a:t>
+            </a:r>
+          </a:p>
+          <a:p>
+            <a:pPr algn="l">
+              <a:lnSpc>
+                <a:spcPct val="135000"/>
+              </a:lnSpc>
+            </a:pPr>
+            <a:r>
+              <a:rPr sz="1350" b="0">
+                <a:solidFill>
+                  <a:srgbClr val="EDE9F7"/>
+                </a:solidFill>
+                <a:latin typeface="Consolas"/>
+              </a:rPr>
+              <a:t>Block 2 ORIGINAL hash:</a:t>
+            </a:r>
+          </a:p>
+          <a:p>
+            <a:pPr algn="l">
+              <a:lnSpc>
+                <a:spcPct val="135000"/>
+              </a:lnSpc>
+            </a:pPr>
+            <a:r>
+              <a:rPr sz="1350" b="0">
+                <a:solidFill>
+                  <a:srgbClr val="7FE0C4"/>
+                </a:solidFill>
+                <a:latin typeface="Consolas"/>
+              </a:rPr>
+              <a:t>7dd7f6149021fd741a6b1cf5ef626f386a2d8c0cfa68de41c75f29f3b824623f</a:t>
+            </a:r>
+          </a:p>
+          <a:p>
+            <a:pPr algn="l">
+              <a:lnSpc>
+                <a:spcPct val="135000"/>
+              </a:lnSpc>
+            </a:pPr>
+            <a:r>
+              <a:rPr sz="1350" b="0">
+                <a:solidFill>
+                  <a:srgbClr val="EDE9F7"/>
+                </a:solidFill>
+                <a:latin typeface="Consolas"/>
+              </a:rPr>
+              <a:t>Block 3 still expects prev =</a:t>
+            </a:r>
+          </a:p>
+          <a:p>
+            <a:pPr algn="l">
+              <a:lnSpc>
+                <a:spcPct val="135000"/>
+              </a:lnSpc>
+            </a:pPr>
+            <a:r>
+              <a:rPr sz="1350" b="0">
+                <a:solidFill>
+                  <a:srgbClr val="7FE0C4"/>
+                </a:solidFill>
+                <a:latin typeface="Consolas"/>
+              </a:rPr>
+              <a:t>7dd7f6149021fd741a6b1cf5ef626f386a2d8c0cfa68de41c75f29f3b824623f</a:t>
+            </a:r>
+          </a:p>
+          <a:p>
+            <a:pPr algn="l">
+              <a:lnSpc>
+                <a:spcPct val="135000"/>
+              </a:lnSpc>
+            </a:pPr>
+            <a:r>
+              <a:rPr sz="1350" b="0">
+                <a:solidFill>
+                  <a:srgbClr val="EDE9F7"/>
+                </a:solidFill>
+                <a:latin typeface="Consolas"/>
+              </a:rPr>
+              <a:t/>
+            </a:r>
+          </a:p>
+          <a:p>
+            <a:pPr algn="l">
+              <a:lnSpc>
+                <a:spcPct val="135000"/>
+              </a:lnSpc>
+            </a:pPr>
+            <a:r>
+              <a:rPr sz="1350" b="0">
+                <a:solidFill>
+                  <a:srgbClr val="EDE9F7"/>
+                </a:solidFill>
+                <a:latin typeface="Consolas"/>
+              </a:rPr>
+              <a:t>Block 2 hash AFTER the edit:</a:t>
+            </a:r>
+          </a:p>
+          <a:p>
+            <a:pPr algn="l">
+              <a:lnSpc>
+                <a:spcPct val="135000"/>
+              </a:lnSpc>
+            </a:pPr>
+            <a:r>
+              <a:rPr sz="1350" b="0">
+                <a:solidFill>
+                  <a:srgbClr val="FF8E7D"/>
+                </a:solidFill>
+                <a:latin typeface="Consolas"/>
+              </a:rPr>
+              <a:t>6c7db182ce1b8061543e98d0549c337486a15d1bb8ff7a675ccc681b59e5a216</a:t>
+            </a:r>
+          </a:p>
+          <a:p>
+            <a:pPr algn="l">
+              <a:lnSpc>
+                <a:spcPct val="135000"/>
+              </a:lnSpc>
+            </a:pPr>
+            <a:r>
+              <a:rPr sz="1350" b="0">
+                <a:solidFill>
+                  <a:srgbClr val="EDE9F7"/>
+                </a:solidFill>
+                <a:latin typeface="Consolas"/>
+              </a:rPr>
+              <a:t>Match? </a:t>
+            </a:r>
+            <a:r>
+              <a:rPr sz="1350" b="1">
+                <a:solidFill>
+                  <a:srgbClr val="FF8E7D"/>
+                </a:solidFill>
+                <a:latin typeface="Consolas"/>
+              </a:rPr>
+              <a:t>False</a:t>
+            </a:r>
+          </a:p>
+        </p:txBody>
+      </p:sp>
+      <p:sp>
+        <p:nvSpPr>
+          <p:cNvPr id="10" name="TextBox 9"/>
+          <p:cNvSpPr txBox="1"/>
+          <p:nvPr/>
+        </p:nvSpPr>
+        <p:spPr>
+          <a:xfrm>
+            <a:off x="822960" y="6446520"/>
+            <a:ext cx="10058400" cy="320040"/>
+          </a:xfrm>
+          <a:prstGeom prst="rect">
+            <a:avLst/>
+          </a:prstGeom>
+          <a:noFill/>
+        </p:spPr>
+        <p:txBody>
+          <a:bodyPr wrap="square" anchor="t" lIns="0" rIns="0" tIns="0" bIns="0">
+            <a:spAutoFit/>
+          </a:bodyPr>
+          <a:lstStyle/>
+          <a:p>
+            <a:pPr algn="l">
+              <a:lnSpc>
+                <a:spcPct val="115000"/>
+              </a:lnSpc>
+            </a:pPr>
+            <a:r>
+              <a:rPr sz="1050" b="0" i="0">
+                <a:solidFill>
+                  <a:srgbClr val="5C576E"/>
                 </a:solidFill>
                 <a:latin typeface="Calibri"/>
               </a:rPr>
-              <a:t>Every commit you've ever made is identified by a hash, and stores the hash of its parent commit. If you rewrite old git history, every commit's hash after it changes too — which is exactly why force-pushing over shared history is so disruptive. You've been working with a hash-linked chain of tamper-evident snapshots your entire career as a developer, whether or not you ever thought of it that way.</a:t>
-            </a:r>
-          </a:p>
-        </p:txBody>
-      </p:sp>
-      <p:sp>
-        <p:nvSpPr>
-          <p:cNvPr id="7" name="TextBox 6"/>
+              <a:t>Built with Python's hashlib — the same primitive from Topic 01, applied exactly as described.</a:t>
+            </a:r>
+          </a:p>
+        </p:txBody>
+      </p:sp>
+      <p:sp>
+        <p:nvSpPr>
+          <p:cNvPr id="11" name="TextBox 10"/>
           <p:cNvSpPr txBox="1"/>
           <p:nvPr/>
         </p:nvSpPr>
@@ -4544,7 +4497,7 @@
                 </a:solidFill>
                 <a:latin typeface="Consolas"/>
               </a:rPr>
-              <a:t>11 / 15</a:t>
+              <a:t>11 / 18</a:t>
             </a:r>
           </a:p>
         </p:txBody>
@@ -4645,7 +4598,7 @@
                 </a:solidFill>
                 <a:latin typeface="Calibri"/>
               </a:rPr>
-              <a:t>REAL-LIFE ANALOGY</a:t>
+              <a:t>WORKED EXAMPLE — PART 2</a:t>
             </a:r>
           </a:p>
         </p:txBody>
@@ -4658,7 +4611,7 @@
         </p:nvSpPr>
         <p:spPr>
           <a:xfrm>
-            <a:off x="822960" y="1097280"/>
+            <a:off x="822960" y="1051560"/>
             <a:ext cx="10332720" cy="1005840"/>
           </a:xfrm>
           <a:prstGeom prst="rect">
@@ -4678,33 +4631,35 @@
               </a:lnSpc>
             </a:pPr>
             <a:r>
-              <a:rPr sz="3000" b="1" i="0">
+              <a:rPr sz="2700" b="1" i="0">
                 <a:solidFill>
                   <a:srgbClr val="1C1730"/>
                 </a:solidFill>
                 <a:latin typeface="Century Gothic"/>
               </a:rPr>
-              <a:t>A Stack Of Stapled Receipts</a:t>
-            </a:r>
-          </a:p>
-        </p:txBody>
-      </p:sp>
-      <p:sp>
-        <p:nvSpPr>
-          <p:cNvPr id="5" name="Rectangle 4"/>
+              <a:t>You Already Use This Structure — It's Called Git</a:t>
+            </a:r>
+          </a:p>
+        </p:txBody>
+      </p:sp>
+      <p:sp>
+        <p:nvSpPr>
+          <p:cNvPr id="5" name="Rounded Rectangle 4"/>
           <p:cNvSpPr/>
           <p:nvPr/>
         </p:nvSpPr>
         <p:spPr>
           <a:xfrm>
-            <a:off x="822960" y="2286000"/>
-            <a:ext cx="91440" cy="3657600"/>
-          </a:xfrm>
-          <a:prstGeom prst="rect">
-            <a:avLst/>
+            <a:off x="822960" y="1965960"/>
+            <a:ext cx="10515600" cy="3840480"/>
+          </a:xfrm>
+          <a:prstGeom prst="roundRect">
+            <a:avLst>
+              <a:gd name="adj" fmla="val 4500"/>
+            </a:avLst>
           </a:prstGeom>
           <a:solidFill>
-            <a:srgbClr val="33506A"/>
+            <a:srgbClr val="141026"/>
           </a:solidFill>
           <a:ln>
             <a:noFill/>
@@ -4735,14 +4690,146 @@
       </p:sp>
       <p:sp>
         <p:nvSpPr>
-          <p:cNvPr id="6" name="TextBox 5"/>
-          <p:cNvSpPr txBox="1"/>
-          <p:nvPr/>
-        </p:nvSpPr>
-        <p:spPr>
-          <a:xfrm>
-            <a:off x="1280160" y="2377440"/>
-            <a:ext cx="9784080" cy="3566160"/>
+          <p:cNvPr id="6" name="Oval 5"/>
+          <p:cNvSpPr/>
+          <p:nvPr/>
+        </p:nvSpPr>
+        <p:spPr>
+          <a:xfrm>
+            <a:off x="1024128" y="2130552"/>
+            <a:ext cx="109728" cy="109728"/>
+          </a:xfrm>
+          <a:prstGeom prst="ellipse">
+            <a:avLst/>
+          </a:prstGeom>
+          <a:solidFill>
+            <a:srgbClr val="FF6459"/>
+          </a:solidFill>
+          <a:ln>
+            <a:noFill/>
+          </a:ln>
+          <a:effectLst/>
+        </p:spPr>
+        <p:style>
+          <a:lnRef idx="1">
+            <a:schemeClr val="accent1"/>
+          </a:lnRef>
+          <a:fillRef idx="3">
+            <a:schemeClr val="accent1"/>
+          </a:fillRef>
+          <a:effectRef idx="2">
+            <a:schemeClr val="accent1"/>
+          </a:effectRef>
+          <a:fontRef idx="minor">
+            <a:schemeClr val="lt1"/>
+          </a:fontRef>
+        </p:style>
+        <p:txBody>
+          <a:bodyPr rtlCol="0" anchor="ctr"/>
+          <a:lstStyle/>
+          <a:p>
+            <a:pPr algn="ctr"/>
+          </a:p>
+        </p:txBody>
+      </p:sp>
+      <p:sp>
+        <p:nvSpPr>
+          <p:cNvPr id="7" name="Oval 6"/>
+          <p:cNvSpPr/>
+          <p:nvPr/>
+        </p:nvSpPr>
+        <p:spPr>
+          <a:xfrm>
+            <a:off x="1225296" y="2130552"/>
+            <a:ext cx="109728" cy="109728"/>
+          </a:xfrm>
+          <a:prstGeom prst="ellipse">
+            <a:avLst/>
+          </a:prstGeom>
+          <a:solidFill>
+            <a:srgbClr val="FFC02E"/>
+          </a:solidFill>
+          <a:ln>
+            <a:noFill/>
+          </a:ln>
+          <a:effectLst/>
+        </p:spPr>
+        <p:style>
+          <a:lnRef idx="1">
+            <a:schemeClr val="accent1"/>
+          </a:lnRef>
+          <a:fillRef idx="3">
+            <a:schemeClr val="accent1"/>
+          </a:fillRef>
+          <a:effectRef idx="2">
+            <a:schemeClr val="accent1"/>
+          </a:effectRef>
+          <a:fontRef idx="minor">
+            <a:schemeClr val="lt1"/>
+          </a:fontRef>
+        </p:style>
+        <p:txBody>
+          <a:bodyPr rtlCol="0" anchor="ctr"/>
+          <a:lstStyle/>
+          <a:p>
+            <a:pPr algn="ctr"/>
+          </a:p>
+        </p:txBody>
+      </p:sp>
+      <p:sp>
+        <p:nvSpPr>
+          <p:cNvPr id="8" name="Oval 7"/>
+          <p:cNvSpPr/>
+          <p:nvPr/>
+        </p:nvSpPr>
+        <p:spPr>
+          <a:xfrm>
+            <a:off x="1426464" y="2130552"/>
+            <a:ext cx="109728" cy="109728"/>
+          </a:xfrm>
+          <a:prstGeom prst="ellipse">
+            <a:avLst/>
+          </a:prstGeom>
+          <a:solidFill>
+            <a:srgbClr val="28C93F"/>
+          </a:solidFill>
+          <a:ln>
+            <a:noFill/>
+          </a:ln>
+          <a:effectLst/>
+        </p:spPr>
+        <p:style>
+          <a:lnRef idx="1">
+            <a:schemeClr val="accent1"/>
+          </a:lnRef>
+          <a:fillRef idx="3">
+            <a:schemeClr val="accent1"/>
+          </a:fillRef>
+          <a:effectRef idx="2">
+            <a:schemeClr val="accent1"/>
+          </a:effectRef>
+          <a:fontRef idx="minor">
+            <a:schemeClr val="lt1"/>
+          </a:fontRef>
+        </p:style>
+        <p:txBody>
+          <a:bodyPr rtlCol="0" anchor="ctr"/>
+          <a:lstStyle/>
+          <a:p>
+            <a:pPr algn="ctr"/>
+          </a:p>
+        </p:txBody>
+      </p:sp>
+      <p:sp>
+        <p:nvSpPr>
+          <p:cNvPr id="9" name="TextBox 8"/>
+          <p:cNvSpPr txBox="1"/>
+          <p:nvPr/>
+        </p:nvSpPr>
+        <p:spPr>
+          <a:xfrm>
+            <a:off x="1078992" y="2350008"/>
+            <a:ext cx="10003536" cy="3273552"/>
           </a:xfrm>
           <a:prstGeom prst="rect">
             <a:avLst/>
@@ -4757,24 +4844,204 @@
           <a:p>
             <a:pPr algn="l">
               <a:lnSpc>
-                <a:spcPct val="160000"/>
-              </a:lnSpc>
-            </a:pPr>
-            <a:r>
-              <a:rPr sz="1800" b="0" i="0">
-                <a:solidFill>
-                  <a:srgbClr val="1C1730"/>
+                <a:spcPct val="135000"/>
+              </a:lnSpc>
+            </a:pPr>
+            <a:r>
+              <a:rPr sz="1350" b="1">
+                <a:solidFill>
+                  <a:srgbClr val="9C93C9"/>
+                </a:solidFill>
+                <a:latin typeface="Consolas"/>
+              </a:rPr>
+              <a:t>$ </a:t>
+            </a:r>
+            <a:r>
+              <a:rPr sz="1350" b="0">
+                <a:solidFill>
+                  <a:srgbClr val="EDE9F7"/>
+                </a:solidFill>
+                <a:latin typeface="Consolas"/>
+              </a:rPr>
+              <a:t>git log --format="commit %H%nparent %P"</a:t>
+            </a:r>
+          </a:p>
+          <a:p>
+            <a:pPr algn="l">
+              <a:lnSpc>
+                <a:spcPct val="135000"/>
+              </a:lnSpc>
+            </a:pPr>
+            <a:r>
+              <a:rPr sz="1350" b="0">
+                <a:solidFill>
+                  <a:srgbClr val="EDE9F7"/>
+                </a:solidFill>
+                <a:latin typeface="Consolas"/>
+              </a:rPr>
+              <a:t/>
+            </a:r>
+          </a:p>
+          <a:p>
+            <a:pPr algn="l">
+              <a:lnSpc>
+                <a:spcPct val="135000"/>
+              </a:lnSpc>
+            </a:pPr>
+            <a:r>
+              <a:rPr sz="1350" b="0">
+                <a:solidFill>
+                  <a:srgbClr val="EDE9F7"/>
+                </a:solidFill>
+                <a:latin typeface="Consolas"/>
+              </a:rPr>
+              <a:t>commit </a:t>
+            </a:r>
+            <a:r>
+              <a:rPr sz="1350" b="0">
+                <a:solidFill>
+                  <a:srgbClr val="7FE0C4"/>
+                </a:solidFill>
+                <a:latin typeface="Consolas"/>
+              </a:rPr>
+              <a:t>14170b8693832cd89ca256741e1af856ede4361</a:t>
+            </a:r>
+          </a:p>
+          <a:p>
+            <a:pPr algn="l">
+              <a:lnSpc>
+                <a:spcPct val="135000"/>
+              </a:lnSpc>
+            </a:pPr>
+            <a:r>
+              <a:rPr sz="1350" b="0">
+                <a:solidFill>
+                  <a:srgbClr val="EDE9F7"/>
+                </a:solidFill>
+                <a:latin typeface="Consolas"/>
+              </a:rPr>
+              <a:t>parent </a:t>
+            </a:r>
+            <a:r>
+              <a:rPr sz="1350" b="0">
+                <a:solidFill>
+                  <a:srgbClr val="7FE0C4"/>
+                </a:solidFill>
+                <a:latin typeface="Consolas"/>
+              </a:rPr>
+              <a:t>5c0144c7a07feca64a44f84b71b369c6b9d1304</a:t>
+            </a:r>
+          </a:p>
+          <a:p>
+            <a:pPr algn="l">
+              <a:lnSpc>
+                <a:spcPct val="135000"/>
+              </a:lnSpc>
+            </a:pPr>
+            <a:r>
+              <a:rPr sz="1350" b="0">
+                <a:solidFill>
+                  <a:srgbClr val="EDE9F7"/>
+                </a:solidFill>
+                <a:latin typeface="Consolas"/>
+              </a:rPr>
+              <a:t/>
+            </a:r>
+          </a:p>
+          <a:p>
+            <a:pPr algn="l">
+              <a:lnSpc>
+                <a:spcPct val="135000"/>
+              </a:lnSpc>
+            </a:pPr>
+            <a:r>
+              <a:rPr sz="1350" b="0">
+                <a:solidFill>
+                  <a:srgbClr val="EDE9F7"/>
+                </a:solidFill>
+                <a:latin typeface="Consolas"/>
+              </a:rPr>
+              <a:t>commit </a:t>
+            </a:r>
+            <a:r>
+              <a:rPr sz="1350" b="0">
+                <a:solidFill>
+                  <a:srgbClr val="7FE0C4"/>
+                </a:solidFill>
+                <a:latin typeface="Consolas"/>
+              </a:rPr>
+              <a:t>5c0144c7a07feca64a44f84b71b369c6b9d1304</a:t>
+            </a:r>
+          </a:p>
+          <a:p>
+            <a:pPr algn="l">
+              <a:lnSpc>
+                <a:spcPct val="135000"/>
+              </a:lnSpc>
+            </a:pPr>
+            <a:r>
+              <a:rPr sz="1350" b="0">
+                <a:solidFill>
+                  <a:srgbClr val="EDE9F7"/>
+                </a:solidFill>
+                <a:latin typeface="Consolas"/>
+              </a:rPr>
+              <a:t>parent </a:t>
+            </a:r>
+            <a:r>
+              <a:rPr sz="1350" b="0">
+                <a:solidFill>
+                  <a:srgbClr val="8B84AD"/>
+                </a:solidFill>
+                <a:latin typeface="Consolas"/>
+              </a:rPr>
+              <a:t>(none — first commit)</a:t>
+            </a:r>
+          </a:p>
+        </p:txBody>
+      </p:sp>
+      <p:sp>
+        <p:nvSpPr>
+          <p:cNvPr id="10" name="TextBox 9"/>
+          <p:cNvSpPr txBox="1"/>
+          <p:nvPr/>
+        </p:nvSpPr>
+        <p:spPr>
+          <a:xfrm>
+            <a:off x="822960" y="6446520"/>
+            <a:ext cx="10058400" cy="320040"/>
+          </a:xfrm>
+          <a:prstGeom prst="rect">
+            <a:avLst/>
+          </a:prstGeom>
+          <a:noFill/>
+        </p:spPr>
+        <p:txBody>
+          <a:bodyPr wrap="square" anchor="t" lIns="0" rIns="0" tIns="0" bIns="0">
+            <a:spAutoFit/>
+          </a:bodyPr>
+          <a:lstStyle/>
+          <a:p>
+            <a:pPr algn="l">
+              <a:lnSpc>
+                <a:spcPct val="115000"/>
+              </a:lnSpc>
+            </a:pPr>
+            <a:r>
+              <a:rPr sz="1050" b="0" i="0">
+                <a:solidFill>
+                  <a:srgbClr val="5C576E"/>
                 </a:solidFill>
                 <a:latin typeface="Calibri"/>
               </a:rPr>
-              <a:t>Each new receipt has to write down a summary of the total on the receipt before it. If you sneak into the middle of the stack and change an old total, every receipt stapled after it now has the wrong "previous total" written on it — the mismatch is obvious to anyone flipping through the stack, even without knowing exactly what you changed.</a:t>
-            </a:r>
-          </a:p>
-        </p:txBody>
-      </p:sp>
-      <p:sp>
-        <p:nvSpPr>
-          <p:cNvPr id="7" name="TextBox 6"/>
+              <a:t>Real output from a real git repo. Every commit you've made stores its parent's hash — same structure.</a:t>
+            </a:r>
+          </a:p>
+        </p:txBody>
+      </p:sp>
+      <p:sp>
+        <p:nvSpPr>
+          <p:cNvPr id="11" name="TextBox 10"/>
           <p:cNvSpPr txBox="1"/>
           <p:nvPr/>
         </p:nvSpPr>
@@ -4806,7 +5073,7 @@
                 </a:solidFill>
                 <a:latin typeface="Consolas"/>
               </a:rPr>
-              <a:t>12 / 15</a:t>
+              <a:t>12 / 18</a:t>
             </a:r>
           </a:p>
         </p:txBody>
@@ -4907,7 +5174,7 @@
                 </a:solidFill>
                 <a:latin typeface="Calibri"/>
               </a:rPr>
-              <a:t>COMMON MISCONCEPTIONS</a:t>
+              <a:t>REAL-WORLD USES</a:t>
             </a:r>
           </a:p>
         </p:txBody>
@@ -4940,13 +5207,13 @@
               </a:lnSpc>
             </a:pPr>
             <a:r>
-              <a:rPr sz="3000" b="1" i="0">
+              <a:rPr sz="3200" b="1" i="0">
                 <a:solidFill>
                   <a:srgbClr val="1C1730"/>
                 </a:solidFill>
                 <a:latin typeface="Century Gothic"/>
               </a:rPr>
-              <a:t>Where People Get Tripped Up</a:t>
+              <a:t>Not Just Blockchain</a:t>
             </a:r>
           </a:p>
         </p:txBody>
@@ -4959,19 +5226,21 @@
         </p:nvSpPr>
         <p:spPr>
           <a:xfrm>
-            <a:off x="822960" y="2057400"/>
-            <a:ext cx="10515600" cy="1874519"/>
+            <a:off x="822960" y="2011680"/>
+            <a:ext cx="3322320" cy="3108960"/>
           </a:xfrm>
           <a:prstGeom prst="roundRect">
             <a:avLst>
-              <a:gd name="adj" fmla="val 5000"/>
+              <a:gd name="adj" fmla="val 9000"/>
             </a:avLst>
           </a:prstGeom>
           <a:solidFill>
             <a:srgbClr val="FFFFFF"/>
           </a:solidFill>
-          <a:ln>
-            <a:noFill/>
+          <a:ln w="12700">
+            <a:solidFill>
+              <a:srgbClr val="DED9EA"/>
+            </a:solidFill>
           </a:ln>
           <a:effectLst/>
         </p:spPr>
@@ -4999,23 +5268,105 @@
       </p:sp>
       <p:sp>
         <p:nvSpPr>
-          <p:cNvPr id="6" name="Rectangle 5"/>
+          <p:cNvPr id="6" name="TextBox 5"/>
+          <p:cNvSpPr txBox="1"/>
+          <p:nvPr/>
+        </p:nvSpPr>
+        <p:spPr>
+          <a:xfrm>
+            <a:off x="1078992" y="2267712"/>
+            <a:ext cx="2810256" cy="457200"/>
+          </a:xfrm>
+          <a:prstGeom prst="rect">
+            <a:avLst/>
+          </a:prstGeom>
+          <a:noFill/>
+        </p:spPr>
+        <p:txBody>
+          <a:bodyPr wrap="square" anchor="t" lIns="0" rIns="0" tIns="0" bIns="0">
+            <a:spAutoFit/>
+          </a:bodyPr>
+          <a:lstStyle/>
+          <a:p>
+            <a:pPr algn="l">
+              <a:lnSpc>
+                <a:spcPct val="115000"/>
+              </a:lnSpc>
+            </a:pPr>
+            <a:r>
+              <a:rPr sz="1450" b="1" i="0">
+                <a:solidFill>
+                  <a:srgbClr val="33506A"/>
+                </a:solidFill>
+                <a:latin typeface="Century Gothic"/>
+              </a:rPr>
+              <a:t>Audit Logs</a:t>
+            </a:r>
+          </a:p>
+        </p:txBody>
+      </p:sp>
+      <p:sp>
+        <p:nvSpPr>
+          <p:cNvPr id="7" name="TextBox 6"/>
+          <p:cNvSpPr txBox="1"/>
+          <p:nvPr/>
+        </p:nvSpPr>
+        <p:spPr>
+          <a:xfrm>
+            <a:off x="1078992" y="2724912"/>
+            <a:ext cx="2810256" cy="2258568"/>
+          </a:xfrm>
+          <a:prstGeom prst="rect">
+            <a:avLst/>
+          </a:prstGeom>
+          <a:noFill/>
+        </p:spPr>
+        <p:txBody>
+          <a:bodyPr wrap="square" anchor="t" lIns="0" rIns="0" tIns="0" bIns="0">
+            <a:spAutoFit/>
+          </a:bodyPr>
+          <a:lstStyle/>
+          <a:p>
+            <a:pPr algn="l">
+              <a:lnSpc>
+                <a:spcPct val="128000"/>
+              </a:lnSpc>
+            </a:pPr>
+            <a:r>
+              <a:rPr sz="1150" b="0" i="0">
+                <a:solidFill>
+                  <a:srgbClr val="1C1730"/>
+                </a:solidFill>
+                <a:latin typeface="Calibri"/>
+              </a:rPr>
+              <a:t>Financial and healthcare systems hash-chain compliance logs so auditors can prove records weren't altered after the fact.</a:t>
+            </a:r>
+          </a:p>
+        </p:txBody>
+      </p:sp>
+      <p:sp>
+        <p:nvSpPr>
+          <p:cNvPr id="8" name="Rounded Rectangle 7"/>
           <p:cNvSpPr/>
           <p:nvPr/>
         </p:nvSpPr>
         <p:spPr>
           <a:xfrm>
-            <a:off x="822960" y="2057400"/>
-            <a:ext cx="82296" cy="1874519"/>
-          </a:xfrm>
-          <a:prstGeom prst="rect">
-            <a:avLst/>
+            <a:off x="4419600" y="2011680"/>
+            <a:ext cx="3322320" cy="3108960"/>
+          </a:xfrm>
+          <a:prstGeom prst="roundRect">
+            <a:avLst>
+              <a:gd name="adj" fmla="val 9000"/>
+            </a:avLst>
           </a:prstGeom>
           <a:solidFill>
-            <a:srgbClr val="33506A"/>
+            <a:srgbClr val="FFFFFF"/>
           </a:solidFill>
-          <a:ln>
-            <a:noFill/>
+          <a:ln w="12700">
+            <a:solidFill>
+              <a:srgbClr val="DED9EA"/>
+            </a:solidFill>
           </a:ln>
           <a:effectLst/>
         </p:spPr>
@@ -5043,14 +5394,14 @@
       </p:sp>
       <p:sp>
         <p:nvSpPr>
-          <p:cNvPr id="7" name="TextBox 6"/>
-          <p:cNvSpPr txBox="1"/>
-          <p:nvPr/>
-        </p:nvSpPr>
-        <p:spPr>
-          <a:xfrm>
-            <a:off x="1188720" y="2258568"/>
-            <a:ext cx="9784080" cy="457200"/>
+          <p:cNvPr id="9" name="TextBox 8"/>
+          <p:cNvSpPr txBox="1"/>
+          <p:nvPr/>
+        </p:nvSpPr>
+        <p:spPr>
+          <a:xfrm>
+            <a:off x="4675632" y="2267712"/>
+            <a:ext cx="2810256" cy="457200"/>
           </a:xfrm>
           <a:prstGeom prst="rect">
             <a:avLst/>
@@ -5069,27 +5420,27 @@
               </a:lnSpc>
             </a:pPr>
             <a:r>
-              <a:rPr sz="1700" b="1" i="0">
+              <a:rPr sz="1450" b="1" i="0">
                 <a:solidFill>
                   <a:srgbClr val="33506A"/>
                 </a:solidFill>
                 <a:latin typeface="Century Gothic"/>
               </a:rPr>
-              <a:t>“Immutable means literally impossible to change.”</a:t>
-            </a:r>
-          </a:p>
-        </p:txBody>
-      </p:sp>
-      <p:sp>
-        <p:nvSpPr>
-          <p:cNvPr id="8" name="TextBox 7"/>
-          <p:cNvSpPr txBox="1"/>
-          <p:nvPr/>
-        </p:nvSpPr>
-        <p:spPr>
-          <a:xfrm>
-            <a:off x="1188720" y="2743200"/>
-            <a:ext cx="9784080" cy="1097280"/>
+              <a:t>Certificate Transparency</a:t>
+            </a:r>
+          </a:p>
+        </p:txBody>
+      </p:sp>
+      <p:sp>
+        <p:nvSpPr>
+          <p:cNvPr id="10" name="TextBox 9"/>
+          <p:cNvSpPr txBox="1"/>
+          <p:nvPr/>
+        </p:nvSpPr>
+        <p:spPr>
+          <a:xfrm>
+            <a:off x="4675632" y="2724912"/>
+            <a:ext cx="2810256" cy="2258568"/>
           </a:xfrm>
           <a:prstGeom prst="rect">
             <a:avLst/>
@@ -5104,42 +5455,44 @@
           <a:p>
             <a:pPr algn="l">
               <a:lnSpc>
-                <a:spcPct val="135000"/>
-              </a:lnSpc>
-            </a:pPr>
-            <a:r>
-              <a:rPr sz="1300" b="0" i="0">
-                <a:solidFill>
-                  <a:srgbClr val="5C576E"/>
+                <a:spcPct val="128000"/>
+              </a:lnSpc>
+            </a:pPr>
+            <a:r>
+              <a:rPr sz="1150" b="0" i="0">
+                <a:solidFill>
+                  <a:srgbClr val="1C1730"/>
                 </a:solidFill>
                 <a:latin typeface="Calibri"/>
               </a:rPr>
-              <a:t>More precisely: changing it is detectable, and for a large network, economically infeasible — not physically impossible. A well-resourced attacker genuinely can rewrite recent blocks (see Topic 04's real, documented case).</a:t>
-            </a:r>
-          </a:p>
-        </p:txBody>
-      </p:sp>
-      <p:sp>
-        <p:nvSpPr>
-          <p:cNvPr id="9" name="Rounded Rectangle 8"/>
+              <a:t>Every SSL certificate issued is logged into a public, hash-chained, tamper-evident record.</a:t>
+            </a:r>
+          </a:p>
+        </p:txBody>
+      </p:sp>
+      <p:sp>
+        <p:nvSpPr>
+          <p:cNvPr id="11" name="Rounded Rectangle 10"/>
           <p:cNvSpPr/>
           <p:nvPr/>
         </p:nvSpPr>
         <p:spPr>
           <a:xfrm>
-            <a:off x="822960" y="4160520"/>
-            <a:ext cx="10515600" cy="1874519"/>
+            <a:off x="8016240" y="2011680"/>
+            <a:ext cx="3322320" cy="3108960"/>
           </a:xfrm>
           <a:prstGeom prst="roundRect">
             <a:avLst>
-              <a:gd name="adj" fmla="val 5000"/>
+              <a:gd name="adj" fmla="val 9000"/>
             </a:avLst>
           </a:prstGeom>
           <a:solidFill>
             <a:srgbClr val="FFFFFF"/>
           </a:solidFill>
-          <a:ln>
-            <a:noFill/>
+          <a:ln w="12700">
+            <a:solidFill>
+              <a:srgbClr val="DED9EA"/>
+            </a:solidFill>
           </a:ln>
           <a:effectLst/>
         </p:spPr>
@@ -5167,58 +5520,14 @@
       </p:sp>
       <p:sp>
         <p:nvSpPr>
-          <p:cNvPr id="10" name="Rectangle 9"/>
-          <p:cNvSpPr/>
-          <p:nvPr/>
-        </p:nvSpPr>
-        <p:spPr>
-          <a:xfrm>
-            <a:off x="822960" y="4160520"/>
-            <a:ext cx="82296" cy="1874519"/>
-          </a:xfrm>
-          <a:prstGeom prst="rect">
-            <a:avLst/>
-          </a:prstGeom>
-          <a:solidFill>
-            <a:srgbClr val="33506A"/>
-          </a:solidFill>
-          <a:ln>
-            <a:noFill/>
-          </a:ln>
-          <a:effectLst/>
-        </p:spPr>
-        <p:style>
-          <a:lnRef idx="1">
-            <a:schemeClr val="accent1"/>
-          </a:lnRef>
-          <a:fillRef idx="3">
-            <a:schemeClr val="accent1"/>
-          </a:fillRef>
-          <a:effectRef idx="2">
-            <a:schemeClr val="accent1"/>
-          </a:effectRef>
-          <a:fontRef idx="minor">
-            <a:schemeClr val="lt1"/>
-          </a:fontRef>
-        </p:style>
-        <p:txBody>
-          <a:bodyPr rtlCol="0" anchor="ctr"/>
-          <a:lstStyle/>
-          <a:p>
-            <a:pPr algn="ctr"/>
-          </a:p>
-        </p:txBody>
-      </p:sp>
-      <p:sp>
-        <p:nvSpPr>
-          <p:cNvPr id="11" name="TextBox 10"/>
-          <p:cNvSpPr txBox="1"/>
-          <p:nvPr/>
-        </p:nvSpPr>
-        <p:spPr>
-          <a:xfrm>
-            <a:off x="1188720" y="4361688"/>
-            <a:ext cx="9784080" cy="457200"/>
+          <p:cNvPr id="12" name="TextBox 11"/>
+          <p:cNvSpPr txBox="1"/>
+          <p:nvPr/>
+        </p:nvSpPr>
+        <p:spPr>
+          <a:xfrm>
+            <a:off x="8272272" y="2267712"/>
+            <a:ext cx="2810256" cy="457200"/>
           </a:xfrm>
           <a:prstGeom prst="rect">
             <a:avLst/>
@@ -5237,27 +5546,27 @@
               </a:lnSpc>
             </a:pPr>
             <a:r>
-              <a:rPr sz="1700" b="1" i="0">
+              <a:rPr sz="1450" b="1" i="0">
                 <a:solidFill>
                   <a:srgbClr val="33506A"/>
                 </a:solidFill>
                 <a:latin typeface="Century Gothic"/>
               </a:rPr>
-              <a:t>“A block explorer showing 'success' means it was a good idea.”</a:t>
-            </a:r>
-          </a:p>
-        </p:txBody>
-      </p:sp>
-      <p:sp>
-        <p:nvSpPr>
-          <p:cNvPr id="12" name="TextBox 11"/>
-          <p:cNvSpPr txBox="1"/>
-          <p:nvPr/>
-        </p:nvSpPr>
-        <p:spPr>
-          <a:xfrm>
-            <a:off x="1188720" y="4846320"/>
-            <a:ext cx="9784080" cy="1097280"/>
+              <a:t>Merkle Trees / SPV</a:t>
+            </a:r>
+          </a:p>
+        </p:txBody>
+      </p:sp>
+      <p:sp>
+        <p:nvSpPr>
+          <p:cNvPr id="13" name="TextBox 12"/>
+          <p:cNvSpPr txBox="1"/>
+          <p:nvPr/>
+        </p:nvSpPr>
+        <p:spPr>
+          <a:xfrm>
+            <a:off x="8272272" y="2724912"/>
+            <a:ext cx="2810256" cy="2258568"/>
           </a:xfrm>
           <a:prstGeom prst="rect">
             <a:avLst/>
@@ -5272,24 +5581,24 @@
           <a:p>
             <a:pPr algn="l">
               <a:lnSpc>
-                <a:spcPct val="135000"/>
-              </a:lnSpc>
-            </a:pPr>
-            <a:r>
-              <a:rPr sz="1300" b="0" i="0">
-                <a:solidFill>
-                  <a:srgbClr val="5C576E"/>
+                <a:spcPct val="128000"/>
+              </a:lnSpc>
+            </a:pPr>
+            <a:r>
+              <a:rPr sz="1150" b="0" i="0">
+                <a:solidFill>
+                  <a:srgbClr val="1C1730"/>
                 </a:solidFill>
                 <a:latin typeface="Calibri"/>
               </a:rPr>
-              <a:t>"Success" means the transaction was valid and processed by the protocol's rules — not that you weren't scammed, or didn't send funds to the wrong address.</a:t>
-            </a:r>
-          </a:p>
-        </p:txBody>
-      </p:sp>
-      <p:sp>
-        <p:nvSpPr>
-          <p:cNvPr id="13" name="TextBox 12"/>
+              <a:t>Lightweight wallets verify a single transaction is in a block via a short proof — without downloading the whole block.</a:t>
+            </a:r>
+          </a:p>
+        </p:txBody>
+      </p:sp>
+      <p:sp>
+        <p:nvSpPr>
+          <p:cNvPr id="14" name="TextBox 13"/>
           <p:cNvSpPr txBox="1"/>
           <p:nvPr/>
         </p:nvSpPr>
@@ -5321,7 +5630,7 @@
                 </a:solidFill>
                 <a:latin typeface="Consolas"/>
               </a:rPr>
-              <a:t>13 / 15</a:t>
+              <a:t>13 / 18</a:t>
             </a:r>
           </a:p>
         </p:txBody>
@@ -5422,7 +5731,7 @@
                 </a:solidFill>
                 <a:latin typeface="Calibri"/>
               </a:rPr>
-              <a:t>HANDS-ON PRACTICE</a:t>
+              <a:t>FLAGSHIP CASE STUDY</a:t>
             </a:r>
           </a:p>
         </p:txBody>
@@ -5435,8 +5744,8 @@
         </p:nvSpPr>
         <p:spPr>
           <a:xfrm>
-            <a:off x="822960" y="1051560"/>
-            <a:ext cx="9601200" cy="1005840"/>
+            <a:off x="822960" y="1097280"/>
+            <a:ext cx="10332720" cy="1005840"/>
           </a:xfrm>
           <a:prstGeom prst="rect">
             <a:avLst/>
@@ -5455,30 +5764,32 @@
               </a:lnSpc>
             </a:pPr>
             <a:r>
-              <a:rPr sz="3200" b="1" i="0">
+              <a:rPr sz="3000" b="1" i="0">
                 <a:solidFill>
                   <a:srgbClr val="1C1730"/>
                 </a:solidFill>
                 <a:latin typeface="Century Gothic"/>
               </a:rPr>
-              <a:t>Do This Now</a:t>
-            </a:r>
-          </a:p>
-        </p:txBody>
-      </p:sp>
-      <p:sp>
-        <p:nvSpPr>
-          <p:cNvPr id="5" name="Oval 4"/>
+              <a:t>You Already Use This — It's Called Git</a:t>
+            </a:r>
+          </a:p>
+        </p:txBody>
+      </p:sp>
+      <p:sp>
+        <p:nvSpPr>
+          <p:cNvPr id="5" name="Rounded Rectangle 4"/>
           <p:cNvSpPr/>
           <p:nvPr/>
         </p:nvSpPr>
         <p:spPr>
           <a:xfrm>
-            <a:off x="822960" y="2148840"/>
-            <a:ext cx="502920" cy="502920"/>
-          </a:xfrm>
-          <a:prstGeom prst="ellipse">
-            <a:avLst/>
+            <a:off x="822960" y="2423160"/>
+            <a:ext cx="10515600" cy="3749039"/>
+          </a:xfrm>
+          <a:prstGeom prst="roundRect">
+            <a:avLst>
+              <a:gd name="adj" fmla="val 4000"/>
+            </a:avLst>
           </a:prstGeom>
           <a:solidFill>
             <a:srgbClr val="33506A"/>
@@ -5503,340 +5814,55 @@
           </a:fontRef>
         </p:style>
         <p:txBody>
-          <a:bodyPr rtlCol="0" anchor="ctr" wrap="none"/>
+          <a:bodyPr rtlCol="0" anchor="ctr"/>
           <a:lstStyle/>
           <a:p>
             <a:pPr algn="ctr"/>
-            <a:r>
-              <a:rPr sz="1500" b="1">
+          </a:p>
+        </p:txBody>
+      </p:sp>
+      <p:sp>
+        <p:nvSpPr>
+          <p:cNvPr id="6" name="TextBox 5"/>
+          <p:cNvSpPr txBox="1"/>
+          <p:nvPr/>
+        </p:nvSpPr>
+        <p:spPr>
+          <a:xfrm>
+            <a:off x="1280160" y="2743200"/>
+            <a:ext cx="9601200" cy="3200400"/>
+          </a:xfrm>
+          <a:prstGeom prst="rect">
+            <a:avLst/>
+          </a:prstGeom>
+          <a:noFill/>
+        </p:spPr>
+        <p:txBody>
+          <a:bodyPr wrap="square" anchor="t" lIns="0" rIns="0" tIns="0" bIns="0">
+            <a:spAutoFit/>
+          </a:bodyPr>
+          <a:lstStyle/>
+          <a:p>
+            <a:pPr algn="l">
+              <a:lnSpc>
+                <a:spcPct val="155000"/>
+              </a:lnSpc>
+            </a:pPr>
+            <a:r>
+              <a:rPr sz="1600" b="0" i="0">
                 <a:solidFill>
                   <a:srgbClr val="FFFFFF"/>
                 </a:solidFill>
-                <a:latin typeface="Century Gothic"/>
-              </a:rPr>
-              <a:t>1</a:t>
-            </a:r>
-          </a:p>
-        </p:txBody>
-      </p:sp>
-      <p:sp>
-        <p:nvSpPr>
-          <p:cNvPr id="6" name="TextBox 5"/>
-          <p:cNvSpPr txBox="1"/>
-          <p:nvPr/>
-        </p:nvSpPr>
-        <p:spPr>
-          <a:xfrm>
-            <a:off x="1600200" y="2203704"/>
-            <a:ext cx="9509760" cy="822960"/>
-          </a:xfrm>
-          <a:prstGeom prst="rect">
-            <a:avLst/>
-          </a:prstGeom>
-          <a:noFill/>
-        </p:spPr>
-        <p:txBody>
-          <a:bodyPr wrap="square" anchor="t" lIns="0" rIns="0" tIns="0" bIns="0">
-            <a:spAutoFit/>
-          </a:bodyPr>
-          <a:lstStyle/>
-          <a:p>
-            <a:pPr algn="l">
-              <a:lnSpc>
-                <a:spcPct val="130000"/>
-              </a:lnSpc>
-            </a:pPr>
-            <a:r>
-              <a:rPr sz="1500" b="0" i="0">
-                <a:solidFill>
-                  <a:srgbClr val="1C1730"/>
-                </a:solidFill>
                 <a:latin typeface="Calibri"/>
               </a:rPr>
-              <a:t>Run the 3-block Python script yourself and confirm the tamper-mismatch shown above.</a:t>
-            </a:r>
-          </a:p>
-        </p:txBody>
-      </p:sp>
-      <p:sp>
-        <p:nvSpPr>
-          <p:cNvPr id="7" name="Oval 6"/>
-          <p:cNvSpPr/>
-          <p:nvPr/>
-        </p:nvSpPr>
-        <p:spPr>
-          <a:xfrm>
-            <a:off x="822960" y="3108960"/>
-            <a:ext cx="502920" cy="502920"/>
-          </a:xfrm>
-          <a:prstGeom prst="ellipse">
-            <a:avLst/>
-          </a:prstGeom>
-          <a:solidFill>
-            <a:srgbClr val="33506A"/>
-          </a:solidFill>
-          <a:ln>
-            <a:noFill/>
-          </a:ln>
-          <a:effectLst/>
-        </p:spPr>
-        <p:style>
-          <a:lnRef idx="1">
-            <a:schemeClr val="accent1"/>
-          </a:lnRef>
-          <a:fillRef idx="3">
-            <a:schemeClr val="accent1"/>
-          </a:fillRef>
-          <a:effectRef idx="2">
-            <a:schemeClr val="accent1"/>
-          </a:effectRef>
-          <a:fontRef idx="minor">
-            <a:schemeClr val="lt1"/>
-          </a:fontRef>
-        </p:style>
-        <p:txBody>
-          <a:bodyPr rtlCol="0" anchor="ctr" wrap="none"/>
-          <a:lstStyle/>
-          <a:p>
-            <a:pPr algn="ctr"/>
-            <a:r>
-              <a:rPr sz="1500" b="1">
-                <a:solidFill>
-                  <a:srgbClr val="FFFFFF"/>
-                </a:solidFill>
-                <a:latin typeface="Century Gothic"/>
-              </a:rPr>
-              <a:t>2</a:t>
-            </a:r>
-          </a:p>
-        </p:txBody>
-      </p:sp>
-      <p:sp>
-        <p:nvSpPr>
-          <p:cNvPr id="8" name="TextBox 7"/>
-          <p:cNvSpPr txBox="1"/>
-          <p:nvPr/>
-        </p:nvSpPr>
-        <p:spPr>
-          <a:xfrm>
-            <a:off x="1600200" y="3163824"/>
-            <a:ext cx="9509760" cy="822960"/>
-          </a:xfrm>
-          <a:prstGeom prst="rect">
-            <a:avLst/>
-          </a:prstGeom>
-          <a:noFill/>
-        </p:spPr>
-        <p:txBody>
-          <a:bodyPr wrap="square" anchor="t" lIns="0" rIns="0" tIns="0" bIns="0">
-            <a:spAutoFit/>
-          </a:bodyPr>
-          <a:lstStyle/>
-          <a:p>
-            <a:pPr algn="l">
-              <a:lnSpc>
-                <a:spcPct val="130000"/>
-              </a:lnSpc>
-            </a:pPr>
-            <a:r>
-              <a:rPr sz="1500" b="0" i="0">
-                <a:solidFill>
-                  <a:srgbClr val="1C1730"/>
-                </a:solidFill>
-                <a:latin typeface="Calibri"/>
-              </a:rPr>
-              <a:t>Run "git log --format=..." on your own repo and find the parent-hash link between two commits.</a:t>
-            </a:r>
-          </a:p>
-        </p:txBody>
-      </p:sp>
-      <p:sp>
-        <p:nvSpPr>
-          <p:cNvPr id="9" name="Oval 8"/>
-          <p:cNvSpPr/>
-          <p:nvPr/>
-        </p:nvSpPr>
-        <p:spPr>
-          <a:xfrm>
-            <a:off x="822960" y="4069080"/>
-            <a:ext cx="502920" cy="502920"/>
-          </a:xfrm>
-          <a:prstGeom prst="ellipse">
-            <a:avLst/>
-          </a:prstGeom>
-          <a:solidFill>
-            <a:srgbClr val="33506A"/>
-          </a:solidFill>
-          <a:ln>
-            <a:noFill/>
-          </a:ln>
-          <a:effectLst/>
-        </p:spPr>
-        <p:style>
-          <a:lnRef idx="1">
-            <a:schemeClr val="accent1"/>
-          </a:lnRef>
-          <a:fillRef idx="3">
-            <a:schemeClr val="accent1"/>
-          </a:fillRef>
-          <a:effectRef idx="2">
-            <a:schemeClr val="accent1"/>
-          </a:effectRef>
-          <a:fontRef idx="minor">
-            <a:schemeClr val="lt1"/>
-          </a:fontRef>
-        </p:style>
-        <p:txBody>
-          <a:bodyPr rtlCol="0" anchor="ctr" wrap="none"/>
-          <a:lstStyle/>
-          <a:p>
-            <a:pPr algn="ctr"/>
-            <a:r>
-              <a:rPr sz="1500" b="1">
-                <a:solidFill>
-                  <a:srgbClr val="FFFFFF"/>
-                </a:solidFill>
-                <a:latin typeface="Century Gothic"/>
-              </a:rPr>
-              <a:t>3</a:t>
-            </a:r>
-          </a:p>
-        </p:txBody>
-      </p:sp>
-      <p:sp>
-        <p:nvSpPr>
-          <p:cNvPr id="10" name="TextBox 9"/>
-          <p:cNvSpPr txBox="1"/>
-          <p:nvPr/>
-        </p:nvSpPr>
-        <p:spPr>
-          <a:xfrm>
-            <a:off x="1600200" y="4123944"/>
-            <a:ext cx="9509760" cy="822960"/>
-          </a:xfrm>
-          <a:prstGeom prst="rect">
-            <a:avLst/>
-          </a:prstGeom>
-          <a:noFill/>
-        </p:spPr>
-        <p:txBody>
-          <a:bodyPr wrap="square" anchor="t" lIns="0" rIns="0" tIns="0" bIns="0">
-            <a:spAutoFit/>
-          </a:bodyPr>
-          <a:lstStyle/>
-          <a:p>
-            <a:pPr algn="l">
-              <a:lnSpc>
-                <a:spcPct val="130000"/>
-              </a:lnSpc>
-            </a:pPr>
-            <a:r>
-              <a:rPr sz="1500" b="0" i="0">
-                <a:solidFill>
-                  <a:srgbClr val="1C1730"/>
-                </a:solidFill>
-                <a:latin typeface="Calibri"/>
-              </a:rPr>
-              <a:t>On the Anders Brownworth Blockchain demo, edit an early block and watch every later block turn invalid.</a:t>
-            </a:r>
-          </a:p>
-        </p:txBody>
-      </p:sp>
-      <p:sp>
-        <p:nvSpPr>
-          <p:cNvPr id="11" name="Oval 10"/>
-          <p:cNvSpPr/>
-          <p:nvPr/>
-        </p:nvSpPr>
-        <p:spPr>
-          <a:xfrm>
-            <a:off x="822960" y="5029200"/>
-            <a:ext cx="502920" cy="502920"/>
-          </a:xfrm>
-          <a:prstGeom prst="ellipse">
-            <a:avLst/>
-          </a:prstGeom>
-          <a:solidFill>
-            <a:srgbClr val="33506A"/>
-          </a:solidFill>
-          <a:ln>
-            <a:noFill/>
-          </a:ln>
-          <a:effectLst/>
-        </p:spPr>
-        <p:style>
-          <a:lnRef idx="1">
-            <a:schemeClr val="accent1"/>
-          </a:lnRef>
-          <a:fillRef idx="3">
-            <a:schemeClr val="accent1"/>
-          </a:fillRef>
-          <a:effectRef idx="2">
-            <a:schemeClr val="accent1"/>
-          </a:effectRef>
-          <a:fontRef idx="minor">
-            <a:schemeClr val="lt1"/>
-          </a:fontRef>
-        </p:style>
-        <p:txBody>
-          <a:bodyPr rtlCol="0" anchor="ctr" wrap="none"/>
-          <a:lstStyle/>
-          <a:p>
-            <a:pPr algn="ctr"/>
-            <a:r>
-              <a:rPr sz="1500" b="1">
-                <a:solidFill>
-                  <a:srgbClr val="FFFFFF"/>
-                </a:solidFill>
-                <a:latin typeface="Century Gothic"/>
-              </a:rPr>
-              <a:t>4</a:t>
-            </a:r>
-          </a:p>
-        </p:txBody>
-      </p:sp>
-      <p:sp>
-        <p:nvSpPr>
-          <p:cNvPr id="12" name="TextBox 11"/>
-          <p:cNvSpPr txBox="1"/>
-          <p:nvPr/>
-        </p:nvSpPr>
-        <p:spPr>
-          <a:xfrm>
-            <a:off x="1600200" y="5084064"/>
-            <a:ext cx="9509760" cy="822960"/>
-          </a:xfrm>
-          <a:prstGeom prst="rect">
-            <a:avLst/>
-          </a:prstGeom>
-          <a:noFill/>
-        </p:spPr>
-        <p:txBody>
-          <a:bodyPr wrap="square" anchor="t" lIns="0" rIns="0" tIns="0" bIns="0">
-            <a:spAutoFit/>
-          </a:bodyPr>
-          <a:lstStyle/>
-          <a:p>
-            <a:pPr algn="l">
-              <a:lnSpc>
-                <a:spcPct val="130000"/>
-              </a:lnSpc>
-            </a:pPr>
-            <a:r>
-              <a:rPr sz="1500" b="0" i="0">
-                <a:solidFill>
-                  <a:srgbClr val="1C1730"/>
-                </a:solidFill>
-                <a:latin typeface="Calibri"/>
-              </a:rPr>
-              <a:t>Look up your own Week 1 testnet transaction on sepolia.etherscan.io.</a:t>
-            </a:r>
-          </a:p>
-        </p:txBody>
-      </p:sp>
-      <p:sp>
-        <p:nvSpPr>
-          <p:cNvPr id="13" name="TextBox 12"/>
+              <a:t>Every commit you've ever made is identified by a hash, and stores the hash of its parent commit. If you rewrite old git history, every commit's hash after it changes too — which is exactly why force-pushing over shared history is so disruptive. You've been working with a hash-linked chain of tamper-evident snapshots your entire career as a developer, whether or not you ever thought of it that way.</a:t>
+            </a:r>
+          </a:p>
+        </p:txBody>
+      </p:sp>
+      <p:sp>
+        <p:nvSpPr>
+          <p:cNvPr id="7" name="TextBox 6"/>
           <p:cNvSpPr txBox="1"/>
           <p:nvPr/>
         </p:nvSpPr>
@@ -5868,7 +5894,7 @@
                 </a:solidFill>
                 <a:latin typeface="Consolas"/>
               </a:rPr>
-              <a:t>14 / 15</a:t>
+              <a:t>14 / 18</a:t>
             </a:r>
           </a:p>
         </p:txBody>
@@ -5906,6 +5932,1330 @@
             <a:avLst/>
           </a:prstGeom>
           <a:solidFill>
+            <a:srgbClr val="F8F6F2"/>
+          </a:solidFill>
+          <a:ln>
+            <a:noFill/>
+          </a:ln>
+          <a:effectLst/>
+        </p:spPr>
+        <p:style>
+          <a:lnRef idx="1">
+            <a:schemeClr val="accent1"/>
+          </a:lnRef>
+          <a:fillRef idx="3">
+            <a:schemeClr val="accent1"/>
+          </a:fillRef>
+          <a:effectRef idx="2">
+            <a:schemeClr val="accent1"/>
+          </a:effectRef>
+          <a:fontRef idx="minor">
+            <a:schemeClr val="lt1"/>
+          </a:fontRef>
+        </p:style>
+        <p:txBody>
+          <a:bodyPr rtlCol="0" anchor="ctr"/>
+          <a:lstStyle/>
+          <a:p>
+            <a:pPr algn="ctr"/>
+          </a:p>
+        </p:txBody>
+      </p:sp>
+      <p:sp>
+        <p:nvSpPr>
+          <p:cNvPr id="3" name="TextBox 2"/>
+          <p:cNvSpPr txBox="1"/>
+          <p:nvPr/>
+        </p:nvSpPr>
+        <p:spPr>
+          <a:xfrm>
+            <a:off x="822960" y="640080"/>
+            <a:ext cx="10058400" cy="365760"/>
+          </a:xfrm>
+          <a:prstGeom prst="rect">
+            <a:avLst/>
+          </a:prstGeom>
+          <a:noFill/>
+        </p:spPr>
+        <p:txBody>
+          <a:bodyPr wrap="square" anchor="t" lIns="0" rIns="0" tIns="0" bIns="0">
+            <a:spAutoFit/>
+          </a:bodyPr>
+          <a:lstStyle/>
+          <a:p>
+            <a:pPr algn="l">
+              <a:lnSpc>
+                <a:spcPct val="115000"/>
+              </a:lnSpc>
+            </a:pPr>
+            <a:r>
+              <a:rPr sz="1300" b="1" i="0">
+                <a:solidFill>
+                  <a:srgbClr val="33506A"/>
+                </a:solidFill>
+                <a:latin typeface="Calibri"/>
+              </a:rPr>
+              <a:t>REAL-LIFE ANALOGY</a:t>
+            </a:r>
+          </a:p>
+        </p:txBody>
+      </p:sp>
+      <p:sp>
+        <p:nvSpPr>
+          <p:cNvPr id="4" name="TextBox 3"/>
+          <p:cNvSpPr txBox="1"/>
+          <p:nvPr/>
+        </p:nvSpPr>
+        <p:spPr>
+          <a:xfrm>
+            <a:off x="822960" y="1097280"/>
+            <a:ext cx="10332720" cy="1005840"/>
+          </a:xfrm>
+          <a:prstGeom prst="rect">
+            <a:avLst/>
+          </a:prstGeom>
+          <a:noFill/>
+        </p:spPr>
+        <p:txBody>
+          <a:bodyPr wrap="square" anchor="t" lIns="0" rIns="0" tIns="0" bIns="0">
+            <a:spAutoFit/>
+          </a:bodyPr>
+          <a:lstStyle/>
+          <a:p>
+            <a:pPr algn="l">
+              <a:lnSpc>
+                <a:spcPct val="105000"/>
+              </a:lnSpc>
+            </a:pPr>
+            <a:r>
+              <a:rPr sz="3000" b="1" i="0">
+                <a:solidFill>
+                  <a:srgbClr val="1C1730"/>
+                </a:solidFill>
+                <a:latin typeface="Century Gothic"/>
+              </a:rPr>
+              <a:t>A Stack Of Stapled Receipts</a:t>
+            </a:r>
+          </a:p>
+        </p:txBody>
+      </p:sp>
+      <p:sp>
+        <p:nvSpPr>
+          <p:cNvPr id="5" name="Rectangle 4"/>
+          <p:cNvSpPr/>
+          <p:nvPr/>
+        </p:nvSpPr>
+        <p:spPr>
+          <a:xfrm>
+            <a:off x="822960" y="2286000"/>
+            <a:ext cx="91440" cy="3657600"/>
+          </a:xfrm>
+          <a:prstGeom prst="rect">
+            <a:avLst/>
+          </a:prstGeom>
+          <a:solidFill>
+            <a:srgbClr val="33506A"/>
+          </a:solidFill>
+          <a:ln>
+            <a:noFill/>
+          </a:ln>
+          <a:effectLst/>
+        </p:spPr>
+        <p:style>
+          <a:lnRef idx="1">
+            <a:schemeClr val="accent1"/>
+          </a:lnRef>
+          <a:fillRef idx="3">
+            <a:schemeClr val="accent1"/>
+          </a:fillRef>
+          <a:effectRef idx="2">
+            <a:schemeClr val="accent1"/>
+          </a:effectRef>
+          <a:fontRef idx="minor">
+            <a:schemeClr val="lt1"/>
+          </a:fontRef>
+        </p:style>
+        <p:txBody>
+          <a:bodyPr rtlCol="0" anchor="ctr"/>
+          <a:lstStyle/>
+          <a:p>
+            <a:pPr algn="ctr"/>
+          </a:p>
+        </p:txBody>
+      </p:sp>
+      <p:sp>
+        <p:nvSpPr>
+          <p:cNvPr id="6" name="TextBox 5"/>
+          <p:cNvSpPr txBox="1"/>
+          <p:nvPr/>
+        </p:nvSpPr>
+        <p:spPr>
+          <a:xfrm>
+            <a:off x="1280160" y="2377440"/>
+            <a:ext cx="9784080" cy="3566160"/>
+          </a:xfrm>
+          <a:prstGeom prst="rect">
+            <a:avLst/>
+          </a:prstGeom>
+          <a:noFill/>
+        </p:spPr>
+        <p:txBody>
+          <a:bodyPr wrap="square" anchor="t" lIns="0" rIns="0" tIns="0" bIns="0">
+            <a:spAutoFit/>
+          </a:bodyPr>
+          <a:lstStyle/>
+          <a:p>
+            <a:pPr algn="l">
+              <a:lnSpc>
+                <a:spcPct val="160000"/>
+              </a:lnSpc>
+            </a:pPr>
+            <a:r>
+              <a:rPr sz="1800" b="0" i="0">
+                <a:solidFill>
+                  <a:srgbClr val="1C1730"/>
+                </a:solidFill>
+                <a:latin typeface="Calibri"/>
+              </a:rPr>
+              <a:t>Each new receipt has to write down a summary of the total on the receipt before it. If you sneak into the middle of the stack and change an old total, every receipt stapled after it now has the wrong "previous total" written on it — the mismatch is obvious to anyone flipping through the stack, even without knowing exactly what you changed.</a:t>
+            </a:r>
+          </a:p>
+        </p:txBody>
+      </p:sp>
+      <p:sp>
+        <p:nvSpPr>
+          <p:cNvPr id="7" name="TextBox 6"/>
+          <p:cNvSpPr txBox="1"/>
+          <p:nvPr/>
+        </p:nvSpPr>
+        <p:spPr>
+          <a:xfrm>
+            <a:off x="9966960" y="502920"/>
+            <a:ext cx="1371600" cy="320040"/>
+          </a:xfrm>
+          <a:prstGeom prst="rect">
+            <a:avLst/>
+          </a:prstGeom>
+          <a:noFill/>
+        </p:spPr>
+        <p:txBody>
+          <a:bodyPr wrap="square" anchor="t" lIns="0" rIns="0" tIns="0" bIns="0">
+            <a:spAutoFit/>
+          </a:bodyPr>
+          <a:lstStyle/>
+          <a:p>
+            <a:pPr algn="r">
+              <a:lnSpc>
+                <a:spcPct val="115000"/>
+              </a:lnSpc>
+            </a:pPr>
+            <a:r>
+              <a:rPr sz="1100" b="1" i="0">
+                <a:solidFill>
+                  <a:srgbClr val="5C576E"/>
+                </a:solidFill>
+                <a:latin typeface="Consolas"/>
+              </a:rPr>
+              <a:t>15 / 18</a:t>
+            </a:r>
+          </a:p>
+        </p:txBody>
+      </p:sp>
+    </p:spTree>
+  </p:cSld>
+  <p:clrMapOvr>
+    <a:masterClrMapping/>
+  </p:clrMapOvr>
+</p:sld>
+</file>
+
+<file path=ppt/slides/slide16.xml><?xml version="1.0" encoding="utf-8"?>
+<p:sld xmlns:a="http://schemas.openxmlformats.org/drawingml/2006/main" xmlns:p="http://schemas.openxmlformats.org/presentationml/2006/main" xmlns:r="http://schemas.openxmlformats.org/officeDocument/2006/relationships">
+  <p:cSld>
+    <p:spTree>
+      <p:nvGrpSpPr>
+        <p:cNvPr id="1" name=""/>
+        <p:cNvGrpSpPr/>
+        <p:nvPr/>
+      </p:nvGrpSpPr>
+      <p:grpSpPr/>
+      <p:sp>
+        <p:nvSpPr>
+          <p:cNvPr id="2" name="Rectangle 1"/>
+          <p:cNvSpPr/>
+          <p:nvPr/>
+        </p:nvSpPr>
+        <p:spPr>
+          <a:xfrm>
+            <a:off x="0" y="0"/>
+            <a:ext cx="12191695" cy="6858000"/>
+          </a:xfrm>
+          <a:prstGeom prst="rect">
+            <a:avLst/>
+          </a:prstGeom>
+          <a:solidFill>
+            <a:srgbClr val="F8F6F2"/>
+          </a:solidFill>
+          <a:ln>
+            <a:noFill/>
+          </a:ln>
+          <a:effectLst/>
+        </p:spPr>
+        <p:style>
+          <a:lnRef idx="1">
+            <a:schemeClr val="accent1"/>
+          </a:lnRef>
+          <a:fillRef idx="3">
+            <a:schemeClr val="accent1"/>
+          </a:fillRef>
+          <a:effectRef idx="2">
+            <a:schemeClr val="accent1"/>
+          </a:effectRef>
+          <a:fontRef idx="minor">
+            <a:schemeClr val="lt1"/>
+          </a:fontRef>
+        </p:style>
+        <p:txBody>
+          <a:bodyPr rtlCol="0" anchor="ctr"/>
+          <a:lstStyle/>
+          <a:p>
+            <a:pPr algn="ctr"/>
+          </a:p>
+        </p:txBody>
+      </p:sp>
+      <p:sp>
+        <p:nvSpPr>
+          <p:cNvPr id="3" name="TextBox 2"/>
+          <p:cNvSpPr txBox="1"/>
+          <p:nvPr/>
+        </p:nvSpPr>
+        <p:spPr>
+          <a:xfrm>
+            <a:off x="822960" y="640080"/>
+            <a:ext cx="10058400" cy="365760"/>
+          </a:xfrm>
+          <a:prstGeom prst="rect">
+            <a:avLst/>
+          </a:prstGeom>
+          <a:noFill/>
+        </p:spPr>
+        <p:txBody>
+          <a:bodyPr wrap="square" anchor="t" lIns="0" rIns="0" tIns="0" bIns="0">
+            <a:spAutoFit/>
+          </a:bodyPr>
+          <a:lstStyle/>
+          <a:p>
+            <a:pPr algn="l">
+              <a:lnSpc>
+                <a:spcPct val="115000"/>
+              </a:lnSpc>
+            </a:pPr>
+            <a:r>
+              <a:rPr sz="1300" b="1" i="0">
+                <a:solidFill>
+                  <a:srgbClr val="33506A"/>
+                </a:solidFill>
+                <a:latin typeface="Calibri"/>
+              </a:rPr>
+              <a:t>COMMON MISCONCEPTIONS</a:t>
+            </a:r>
+          </a:p>
+        </p:txBody>
+      </p:sp>
+      <p:sp>
+        <p:nvSpPr>
+          <p:cNvPr id="4" name="TextBox 3"/>
+          <p:cNvSpPr txBox="1"/>
+          <p:nvPr/>
+        </p:nvSpPr>
+        <p:spPr>
+          <a:xfrm>
+            <a:off x="822960" y="1051560"/>
+            <a:ext cx="9601200" cy="1005840"/>
+          </a:xfrm>
+          <a:prstGeom prst="rect">
+            <a:avLst/>
+          </a:prstGeom>
+          <a:noFill/>
+        </p:spPr>
+        <p:txBody>
+          <a:bodyPr wrap="square" anchor="t" lIns="0" rIns="0" tIns="0" bIns="0">
+            <a:spAutoFit/>
+          </a:bodyPr>
+          <a:lstStyle/>
+          <a:p>
+            <a:pPr algn="l">
+              <a:lnSpc>
+                <a:spcPct val="105000"/>
+              </a:lnSpc>
+            </a:pPr>
+            <a:r>
+              <a:rPr sz="3000" b="1" i="0">
+                <a:solidFill>
+                  <a:srgbClr val="1C1730"/>
+                </a:solidFill>
+                <a:latin typeface="Century Gothic"/>
+              </a:rPr>
+              <a:t>Where People Get Tripped Up</a:t>
+            </a:r>
+          </a:p>
+        </p:txBody>
+      </p:sp>
+      <p:sp>
+        <p:nvSpPr>
+          <p:cNvPr id="5" name="Rounded Rectangle 4"/>
+          <p:cNvSpPr/>
+          <p:nvPr/>
+        </p:nvSpPr>
+        <p:spPr>
+          <a:xfrm>
+            <a:off x="822960" y="2057400"/>
+            <a:ext cx="10515600" cy="1874519"/>
+          </a:xfrm>
+          <a:prstGeom prst="roundRect">
+            <a:avLst>
+              <a:gd name="adj" fmla="val 5000"/>
+            </a:avLst>
+          </a:prstGeom>
+          <a:solidFill>
+            <a:srgbClr val="FFFFFF"/>
+          </a:solidFill>
+          <a:ln>
+            <a:noFill/>
+          </a:ln>
+          <a:effectLst/>
+        </p:spPr>
+        <p:style>
+          <a:lnRef idx="1">
+            <a:schemeClr val="accent1"/>
+          </a:lnRef>
+          <a:fillRef idx="3">
+            <a:schemeClr val="accent1"/>
+          </a:fillRef>
+          <a:effectRef idx="2">
+            <a:schemeClr val="accent1"/>
+          </a:effectRef>
+          <a:fontRef idx="minor">
+            <a:schemeClr val="lt1"/>
+          </a:fontRef>
+        </p:style>
+        <p:txBody>
+          <a:bodyPr rtlCol="0" anchor="ctr"/>
+          <a:lstStyle/>
+          <a:p>
+            <a:pPr algn="ctr"/>
+          </a:p>
+        </p:txBody>
+      </p:sp>
+      <p:sp>
+        <p:nvSpPr>
+          <p:cNvPr id="6" name="Rectangle 5"/>
+          <p:cNvSpPr/>
+          <p:nvPr/>
+        </p:nvSpPr>
+        <p:spPr>
+          <a:xfrm>
+            <a:off x="822960" y="2057400"/>
+            <a:ext cx="82296" cy="1874519"/>
+          </a:xfrm>
+          <a:prstGeom prst="rect">
+            <a:avLst/>
+          </a:prstGeom>
+          <a:solidFill>
+            <a:srgbClr val="33506A"/>
+          </a:solidFill>
+          <a:ln>
+            <a:noFill/>
+          </a:ln>
+          <a:effectLst/>
+        </p:spPr>
+        <p:style>
+          <a:lnRef idx="1">
+            <a:schemeClr val="accent1"/>
+          </a:lnRef>
+          <a:fillRef idx="3">
+            <a:schemeClr val="accent1"/>
+          </a:fillRef>
+          <a:effectRef idx="2">
+            <a:schemeClr val="accent1"/>
+          </a:effectRef>
+          <a:fontRef idx="minor">
+            <a:schemeClr val="lt1"/>
+          </a:fontRef>
+        </p:style>
+        <p:txBody>
+          <a:bodyPr rtlCol="0" anchor="ctr"/>
+          <a:lstStyle/>
+          <a:p>
+            <a:pPr algn="ctr"/>
+          </a:p>
+        </p:txBody>
+      </p:sp>
+      <p:sp>
+        <p:nvSpPr>
+          <p:cNvPr id="7" name="TextBox 6"/>
+          <p:cNvSpPr txBox="1"/>
+          <p:nvPr/>
+        </p:nvSpPr>
+        <p:spPr>
+          <a:xfrm>
+            <a:off x="1188720" y="2258568"/>
+            <a:ext cx="9784080" cy="457200"/>
+          </a:xfrm>
+          <a:prstGeom prst="rect">
+            <a:avLst/>
+          </a:prstGeom>
+          <a:noFill/>
+        </p:spPr>
+        <p:txBody>
+          <a:bodyPr wrap="square" anchor="t" lIns="0" rIns="0" tIns="0" bIns="0">
+            <a:spAutoFit/>
+          </a:bodyPr>
+          <a:lstStyle/>
+          <a:p>
+            <a:pPr algn="l">
+              <a:lnSpc>
+                <a:spcPct val="115000"/>
+              </a:lnSpc>
+            </a:pPr>
+            <a:r>
+              <a:rPr sz="1700" b="1" i="0">
+                <a:solidFill>
+                  <a:srgbClr val="33506A"/>
+                </a:solidFill>
+                <a:latin typeface="Century Gothic"/>
+              </a:rPr>
+              <a:t>“Immutable means literally impossible to change.”</a:t>
+            </a:r>
+          </a:p>
+        </p:txBody>
+      </p:sp>
+      <p:sp>
+        <p:nvSpPr>
+          <p:cNvPr id="8" name="TextBox 7"/>
+          <p:cNvSpPr txBox="1"/>
+          <p:nvPr/>
+        </p:nvSpPr>
+        <p:spPr>
+          <a:xfrm>
+            <a:off x="1188720" y="2743200"/>
+            <a:ext cx="9784080" cy="1097280"/>
+          </a:xfrm>
+          <a:prstGeom prst="rect">
+            <a:avLst/>
+          </a:prstGeom>
+          <a:noFill/>
+        </p:spPr>
+        <p:txBody>
+          <a:bodyPr wrap="square" anchor="t" lIns="0" rIns="0" tIns="0" bIns="0">
+            <a:spAutoFit/>
+          </a:bodyPr>
+          <a:lstStyle/>
+          <a:p>
+            <a:pPr algn="l">
+              <a:lnSpc>
+                <a:spcPct val="135000"/>
+              </a:lnSpc>
+            </a:pPr>
+            <a:r>
+              <a:rPr sz="1300" b="0" i="0">
+                <a:solidFill>
+                  <a:srgbClr val="5C576E"/>
+                </a:solidFill>
+                <a:latin typeface="Calibri"/>
+              </a:rPr>
+              <a:t>More precisely: changing it is detectable, and for a large network, economically infeasible — not physically impossible. A well-resourced attacker genuinely can rewrite recent blocks (see Topic 04's real, documented case).</a:t>
+            </a:r>
+          </a:p>
+        </p:txBody>
+      </p:sp>
+      <p:sp>
+        <p:nvSpPr>
+          <p:cNvPr id="9" name="Rounded Rectangle 8"/>
+          <p:cNvSpPr/>
+          <p:nvPr/>
+        </p:nvSpPr>
+        <p:spPr>
+          <a:xfrm>
+            <a:off x="822960" y="4160520"/>
+            <a:ext cx="10515600" cy="1874519"/>
+          </a:xfrm>
+          <a:prstGeom prst="roundRect">
+            <a:avLst>
+              <a:gd name="adj" fmla="val 5000"/>
+            </a:avLst>
+          </a:prstGeom>
+          <a:solidFill>
+            <a:srgbClr val="FFFFFF"/>
+          </a:solidFill>
+          <a:ln>
+            <a:noFill/>
+          </a:ln>
+          <a:effectLst/>
+        </p:spPr>
+        <p:style>
+          <a:lnRef idx="1">
+            <a:schemeClr val="accent1"/>
+          </a:lnRef>
+          <a:fillRef idx="3">
+            <a:schemeClr val="accent1"/>
+          </a:fillRef>
+          <a:effectRef idx="2">
+            <a:schemeClr val="accent1"/>
+          </a:effectRef>
+          <a:fontRef idx="minor">
+            <a:schemeClr val="lt1"/>
+          </a:fontRef>
+        </p:style>
+        <p:txBody>
+          <a:bodyPr rtlCol="0" anchor="ctr"/>
+          <a:lstStyle/>
+          <a:p>
+            <a:pPr algn="ctr"/>
+          </a:p>
+        </p:txBody>
+      </p:sp>
+      <p:sp>
+        <p:nvSpPr>
+          <p:cNvPr id="10" name="Rectangle 9"/>
+          <p:cNvSpPr/>
+          <p:nvPr/>
+        </p:nvSpPr>
+        <p:spPr>
+          <a:xfrm>
+            <a:off x="822960" y="4160520"/>
+            <a:ext cx="82296" cy="1874519"/>
+          </a:xfrm>
+          <a:prstGeom prst="rect">
+            <a:avLst/>
+          </a:prstGeom>
+          <a:solidFill>
+            <a:srgbClr val="33506A"/>
+          </a:solidFill>
+          <a:ln>
+            <a:noFill/>
+          </a:ln>
+          <a:effectLst/>
+        </p:spPr>
+        <p:style>
+          <a:lnRef idx="1">
+            <a:schemeClr val="accent1"/>
+          </a:lnRef>
+          <a:fillRef idx="3">
+            <a:schemeClr val="accent1"/>
+          </a:fillRef>
+          <a:effectRef idx="2">
+            <a:schemeClr val="accent1"/>
+          </a:effectRef>
+          <a:fontRef idx="minor">
+            <a:schemeClr val="lt1"/>
+          </a:fontRef>
+        </p:style>
+        <p:txBody>
+          <a:bodyPr rtlCol="0" anchor="ctr"/>
+          <a:lstStyle/>
+          <a:p>
+            <a:pPr algn="ctr"/>
+          </a:p>
+        </p:txBody>
+      </p:sp>
+      <p:sp>
+        <p:nvSpPr>
+          <p:cNvPr id="11" name="TextBox 10"/>
+          <p:cNvSpPr txBox="1"/>
+          <p:nvPr/>
+        </p:nvSpPr>
+        <p:spPr>
+          <a:xfrm>
+            <a:off x="1188720" y="4361688"/>
+            <a:ext cx="9784080" cy="457200"/>
+          </a:xfrm>
+          <a:prstGeom prst="rect">
+            <a:avLst/>
+          </a:prstGeom>
+          <a:noFill/>
+        </p:spPr>
+        <p:txBody>
+          <a:bodyPr wrap="square" anchor="t" lIns="0" rIns="0" tIns="0" bIns="0">
+            <a:spAutoFit/>
+          </a:bodyPr>
+          <a:lstStyle/>
+          <a:p>
+            <a:pPr algn="l">
+              <a:lnSpc>
+                <a:spcPct val="115000"/>
+              </a:lnSpc>
+            </a:pPr>
+            <a:r>
+              <a:rPr sz="1700" b="1" i="0">
+                <a:solidFill>
+                  <a:srgbClr val="33506A"/>
+                </a:solidFill>
+                <a:latin typeface="Century Gothic"/>
+              </a:rPr>
+              <a:t>“A block explorer showing 'success' means it was a good idea.”</a:t>
+            </a:r>
+          </a:p>
+        </p:txBody>
+      </p:sp>
+      <p:sp>
+        <p:nvSpPr>
+          <p:cNvPr id="12" name="TextBox 11"/>
+          <p:cNvSpPr txBox="1"/>
+          <p:nvPr/>
+        </p:nvSpPr>
+        <p:spPr>
+          <a:xfrm>
+            <a:off x="1188720" y="4846320"/>
+            <a:ext cx="9784080" cy="1097280"/>
+          </a:xfrm>
+          <a:prstGeom prst="rect">
+            <a:avLst/>
+          </a:prstGeom>
+          <a:noFill/>
+        </p:spPr>
+        <p:txBody>
+          <a:bodyPr wrap="square" anchor="t" lIns="0" rIns="0" tIns="0" bIns="0">
+            <a:spAutoFit/>
+          </a:bodyPr>
+          <a:lstStyle/>
+          <a:p>
+            <a:pPr algn="l">
+              <a:lnSpc>
+                <a:spcPct val="135000"/>
+              </a:lnSpc>
+            </a:pPr>
+            <a:r>
+              <a:rPr sz="1300" b="0" i="0">
+                <a:solidFill>
+                  <a:srgbClr val="5C576E"/>
+                </a:solidFill>
+                <a:latin typeface="Calibri"/>
+              </a:rPr>
+              <a:t>"Success" means the transaction was valid and processed by the protocol's rules — not that you weren't scammed, or didn't send funds to the wrong address.</a:t>
+            </a:r>
+          </a:p>
+        </p:txBody>
+      </p:sp>
+      <p:sp>
+        <p:nvSpPr>
+          <p:cNvPr id="13" name="TextBox 12"/>
+          <p:cNvSpPr txBox="1"/>
+          <p:nvPr/>
+        </p:nvSpPr>
+        <p:spPr>
+          <a:xfrm>
+            <a:off x="9966960" y="502920"/>
+            <a:ext cx="1371600" cy="320040"/>
+          </a:xfrm>
+          <a:prstGeom prst="rect">
+            <a:avLst/>
+          </a:prstGeom>
+          <a:noFill/>
+        </p:spPr>
+        <p:txBody>
+          <a:bodyPr wrap="square" anchor="t" lIns="0" rIns="0" tIns="0" bIns="0">
+            <a:spAutoFit/>
+          </a:bodyPr>
+          <a:lstStyle/>
+          <a:p>
+            <a:pPr algn="r">
+              <a:lnSpc>
+                <a:spcPct val="115000"/>
+              </a:lnSpc>
+            </a:pPr>
+            <a:r>
+              <a:rPr sz="1100" b="1" i="0">
+                <a:solidFill>
+                  <a:srgbClr val="5C576E"/>
+                </a:solidFill>
+                <a:latin typeface="Consolas"/>
+              </a:rPr>
+              <a:t>16 / 18</a:t>
+            </a:r>
+          </a:p>
+        </p:txBody>
+      </p:sp>
+    </p:spTree>
+  </p:cSld>
+  <p:clrMapOvr>
+    <a:masterClrMapping/>
+  </p:clrMapOvr>
+</p:sld>
+</file>
+
+<file path=ppt/slides/slide17.xml><?xml version="1.0" encoding="utf-8"?>
+<p:sld xmlns:a="http://schemas.openxmlformats.org/drawingml/2006/main" xmlns:p="http://schemas.openxmlformats.org/presentationml/2006/main" xmlns:r="http://schemas.openxmlformats.org/officeDocument/2006/relationships">
+  <p:cSld>
+    <p:spTree>
+      <p:nvGrpSpPr>
+        <p:cNvPr id="1" name=""/>
+        <p:cNvGrpSpPr/>
+        <p:nvPr/>
+      </p:nvGrpSpPr>
+      <p:grpSpPr/>
+      <p:sp>
+        <p:nvSpPr>
+          <p:cNvPr id="2" name="Rectangle 1"/>
+          <p:cNvSpPr/>
+          <p:nvPr/>
+        </p:nvSpPr>
+        <p:spPr>
+          <a:xfrm>
+            <a:off x="0" y="0"/>
+            <a:ext cx="12191695" cy="6858000"/>
+          </a:xfrm>
+          <a:prstGeom prst="rect">
+            <a:avLst/>
+          </a:prstGeom>
+          <a:solidFill>
+            <a:srgbClr val="F8F6F2"/>
+          </a:solidFill>
+          <a:ln>
+            <a:noFill/>
+          </a:ln>
+          <a:effectLst/>
+        </p:spPr>
+        <p:style>
+          <a:lnRef idx="1">
+            <a:schemeClr val="accent1"/>
+          </a:lnRef>
+          <a:fillRef idx="3">
+            <a:schemeClr val="accent1"/>
+          </a:fillRef>
+          <a:effectRef idx="2">
+            <a:schemeClr val="accent1"/>
+          </a:effectRef>
+          <a:fontRef idx="minor">
+            <a:schemeClr val="lt1"/>
+          </a:fontRef>
+        </p:style>
+        <p:txBody>
+          <a:bodyPr rtlCol="0" anchor="ctr"/>
+          <a:lstStyle/>
+          <a:p>
+            <a:pPr algn="ctr"/>
+          </a:p>
+        </p:txBody>
+      </p:sp>
+      <p:sp>
+        <p:nvSpPr>
+          <p:cNvPr id="3" name="TextBox 2"/>
+          <p:cNvSpPr txBox="1"/>
+          <p:nvPr/>
+        </p:nvSpPr>
+        <p:spPr>
+          <a:xfrm>
+            <a:off x="822960" y="640080"/>
+            <a:ext cx="10058400" cy="365760"/>
+          </a:xfrm>
+          <a:prstGeom prst="rect">
+            <a:avLst/>
+          </a:prstGeom>
+          <a:noFill/>
+        </p:spPr>
+        <p:txBody>
+          <a:bodyPr wrap="square" anchor="t" lIns="0" rIns="0" tIns="0" bIns="0">
+            <a:spAutoFit/>
+          </a:bodyPr>
+          <a:lstStyle/>
+          <a:p>
+            <a:pPr algn="l">
+              <a:lnSpc>
+                <a:spcPct val="115000"/>
+              </a:lnSpc>
+            </a:pPr>
+            <a:r>
+              <a:rPr sz="1300" b="1" i="0">
+                <a:solidFill>
+                  <a:srgbClr val="33506A"/>
+                </a:solidFill>
+                <a:latin typeface="Calibri"/>
+              </a:rPr>
+              <a:t>HANDS-ON PRACTICE</a:t>
+            </a:r>
+          </a:p>
+        </p:txBody>
+      </p:sp>
+      <p:sp>
+        <p:nvSpPr>
+          <p:cNvPr id="4" name="TextBox 3"/>
+          <p:cNvSpPr txBox="1"/>
+          <p:nvPr/>
+        </p:nvSpPr>
+        <p:spPr>
+          <a:xfrm>
+            <a:off x="822960" y="1051560"/>
+            <a:ext cx="9601200" cy="1005840"/>
+          </a:xfrm>
+          <a:prstGeom prst="rect">
+            <a:avLst/>
+          </a:prstGeom>
+          <a:noFill/>
+        </p:spPr>
+        <p:txBody>
+          <a:bodyPr wrap="square" anchor="t" lIns="0" rIns="0" tIns="0" bIns="0">
+            <a:spAutoFit/>
+          </a:bodyPr>
+          <a:lstStyle/>
+          <a:p>
+            <a:pPr algn="l">
+              <a:lnSpc>
+                <a:spcPct val="105000"/>
+              </a:lnSpc>
+            </a:pPr>
+            <a:r>
+              <a:rPr sz="3200" b="1" i="0">
+                <a:solidFill>
+                  <a:srgbClr val="1C1730"/>
+                </a:solidFill>
+                <a:latin typeface="Century Gothic"/>
+              </a:rPr>
+              <a:t>Do This Now</a:t>
+            </a:r>
+          </a:p>
+        </p:txBody>
+      </p:sp>
+      <p:sp>
+        <p:nvSpPr>
+          <p:cNvPr id="5" name="Oval 4"/>
+          <p:cNvSpPr/>
+          <p:nvPr/>
+        </p:nvSpPr>
+        <p:spPr>
+          <a:xfrm>
+            <a:off x="822960" y="2148840"/>
+            <a:ext cx="502920" cy="502920"/>
+          </a:xfrm>
+          <a:prstGeom prst="ellipse">
+            <a:avLst/>
+          </a:prstGeom>
+          <a:solidFill>
+            <a:srgbClr val="33506A"/>
+          </a:solidFill>
+          <a:ln>
+            <a:noFill/>
+          </a:ln>
+          <a:effectLst/>
+        </p:spPr>
+        <p:style>
+          <a:lnRef idx="1">
+            <a:schemeClr val="accent1"/>
+          </a:lnRef>
+          <a:fillRef idx="3">
+            <a:schemeClr val="accent1"/>
+          </a:fillRef>
+          <a:effectRef idx="2">
+            <a:schemeClr val="accent1"/>
+          </a:effectRef>
+          <a:fontRef idx="minor">
+            <a:schemeClr val="lt1"/>
+          </a:fontRef>
+        </p:style>
+        <p:txBody>
+          <a:bodyPr rtlCol="0" anchor="ctr" wrap="none"/>
+          <a:lstStyle/>
+          <a:p>
+            <a:pPr algn="ctr"/>
+            <a:r>
+              <a:rPr sz="1500" b="1">
+                <a:solidFill>
+                  <a:srgbClr val="FFFFFF"/>
+                </a:solidFill>
+                <a:latin typeface="Century Gothic"/>
+              </a:rPr>
+              <a:t>1</a:t>
+            </a:r>
+          </a:p>
+        </p:txBody>
+      </p:sp>
+      <p:sp>
+        <p:nvSpPr>
+          <p:cNvPr id="6" name="TextBox 5"/>
+          <p:cNvSpPr txBox="1"/>
+          <p:nvPr/>
+        </p:nvSpPr>
+        <p:spPr>
+          <a:xfrm>
+            <a:off x="1600200" y="2203704"/>
+            <a:ext cx="9509760" cy="822960"/>
+          </a:xfrm>
+          <a:prstGeom prst="rect">
+            <a:avLst/>
+          </a:prstGeom>
+          <a:noFill/>
+        </p:spPr>
+        <p:txBody>
+          <a:bodyPr wrap="square" anchor="t" lIns="0" rIns="0" tIns="0" bIns="0">
+            <a:spAutoFit/>
+          </a:bodyPr>
+          <a:lstStyle/>
+          <a:p>
+            <a:pPr algn="l">
+              <a:lnSpc>
+                <a:spcPct val="130000"/>
+              </a:lnSpc>
+            </a:pPr>
+            <a:r>
+              <a:rPr sz="1500" b="0" i="0">
+                <a:solidFill>
+                  <a:srgbClr val="1C1730"/>
+                </a:solidFill>
+                <a:latin typeface="Calibri"/>
+              </a:rPr>
+              <a:t>Run the 3-block Python script yourself and confirm the tamper-mismatch shown above.</a:t>
+            </a:r>
+          </a:p>
+        </p:txBody>
+      </p:sp>
+      <p:sp>
+        <p:nvSpPr>
+          <p:cNvPr id="7" name="Oval 6"/>
+          <p:cNvSpPr/>
+          <p:nvPr/>
+        </p:nvSpPr>
+        <p:spPr>
+          <a:xfrm>
+            <a:off x="822960" y="3108960"/>
+            <a:ext cx="502920" cy="502920"/>
+          </a:xfrm>
+          <a:prstGeom prst="ellipse">
+            <a:avLst/>
+          </a:prstGeom>
+          <a:solidFill>
+            <a:srgbClr val="33506A"/>
+          </a:solidFill>
+          <a:ln>
+            <a:noFill/>
+          </a:ln>
+          <a:effectLst/>
+        </p:spPr>
+        <p:style>
+          <a:lnRef idx="1">
+            <a:schemeClr val="accent1"/>
+          </a:lnRef>
+          <a:fillRef idx="3">
+            <a:schemeClr val="accent1"/>
+          </a:fillRef>
+          <a:effectRef idx="2">
+            <a:schemeClr val="accent1"/>
+          </a:effectRef>
+          <a:fontRef idx="minor">
+            <a:schemeClr val="lt1"/>
+          </a:fontRef>
+        </p:style>
+        <p:txBody>
+          <a:bodyPr rtlCol="0" anchor="ctr" wrap="none"/>
+          <a:lstStyle/>
+          <a:p>
+            <a:pPr algn="ctr"/>
+            <a:r>
+              <a:rPr sz="1500" b="1">
+                <a:solidFill>
+                  <a:srgbClr val="FFFFFF"/>
+                </a:solidFill>
+                <a:latin typeface="Century Gothic"/>
+              </a:rPr>
+              <a:t>2</a:t>
+            </a:r>
+          </a:p>
+        </p:txBody>
+      </p:sp>
+      <p:sp>
+        <p:nvSpPr>
+          <p:cNvPr id="8" name="TextBox 7"/>
+          <p:cNvSpPr txBox="1"/>
+          <p:nvPr/>
+        </p:nvSpPr>
+        <p:spPr>
+          <a:xfrm>
+            <a:off x="1600200" y="3163824"/>
+            <a:ext cx="9509760" cy="822960"/>
+          </a:xfrm>
+          <a:prstGeom prst="rect">
+            <a:avLst/>
+          </a:prstGeom>
+          <a:noFill/>
+        </p:spPr>
+        <p:txBody>
+          <a:bodyPr wrap="square" anchor="t" lIns="0" rIns="0" tIns="0" bIns="0">
+            <a:spAutoFit/>
+          </a:bodyPr>
+          <a:lstStyle/>
+          <a:p>
+            <a:pPr algn="l">
+              <a:lnSpc>
+                <a:spcPct val="130000"/>
+              </a:lnSpc>
+            </a:pPr>
+            <a:r>
+              <a:rPr sz="1500" b="0" i="0">
+                <a:solidFill>
+                  <a:srgbClr val="1C1730"/>
+                </a:solidFill>
+                <a:latin typeface="Calibri"/>
+              </a:rPr>
+              <a:t>Run "git log --format=..." on your own repo and find the parent-hash link between two commits.</a:t>
+            </a:r>
+          </a:p>
+        </p:txBody>
+      </p:sp>
+      <p:sp>
+        <p:nvSpPr>
+          <p:cNvPr id="9" name="Oval 8"/>
+          <p:cNvSpPr/>
+          <p:nvPr/>
+        </p:nvSpPr>
+        <p:spPr>
+          <a:xfrm>
+            <a:off x="822960" y="4069080"/>
+            <a:ext cx="502920" cy="502920"/>
+          </a:xfrm>
+          <a:prstGeom prst="ellipse">
+            <a:avLst/>
+          </a:prstGeom>
+          <a:solidFill>
+            <a:srgbClr val="33506A"/>
+          </a:solidFill>
+          <a:ln>
+            <a:noFill/>
+          </a:ln>
+          <a:effectLst/>
+        </p:spPr>
+        <p:style>
+          <a:lnRef idx="1">
+            <a:schemeClr val="accent1"/>
+          </a:lnRef>
+          <a:fillRef idx="3">
+            <a:schemeClr val="accent1"/>
+          </a:fillRef>
+          <a:effectRef idx="2">
+            <a:schemeClr val="accent1"/>
+          </a:effectRef>
+          <a:fontRef idx="minor">
+            <a:schemeClr val="lt1"/>
+          </a:fontRef>
+        </p:style>
+        <p:txBody>
+          <a:bodyPr rtlCol="0" anchor="ctr" wrap="none"/>
+          <a:lstStyle/>
+          <a:p>
+            <a:pPr algn="ctr"/>
+            <a:r>
+              <a:rPr sz="1500" b="1">
+                <a:solidFill>
+                  <a:srgbClr val="FFFFFF"/>
+                </a:solidFill>
+                <a:latin typeface="Century Gothic"/>
+              </a:rPr>
+              <a:t>3</a:t>
+            </a:r>
+          </a:p>
+        </p:txBody>
+      </p:sp>
+      <p:sp>
+        <p:nvSpPr>
+          <p:cNvPr id="10" name="TextBox 9"/>
+          <p:cNvSpPr txBox="1"/>
+          <p:nvPr/>
+        </p:nvSpPr>
+        <p:spPr>
+          <a:xfrm>
+            <a:off x="1600200" y="4123944"/>
+            <a:ext cx="9509760" cy="822960"/>
+          </a:xfrm>
+          <a:prstGeom prst="rect">
+            <a:avLst/>
+          </a:prstGeom>
+          <a:noFill/>
+        </p:spPr>
+        <p:txBody>
+          <a:bodyPr wrap="square" anchor="t" lIns="0" rIns="0" tIns="0" bIns="0">
+            <a:spAutoFit/>
+          </a:bodyPr>
+          <a:lstStyle/>
+          <a:p>
+            <a:pPr algn="l">
+              <a:lnSpc>
+                <a:spcPct val="130000"/>
+              </a:lnSpc>
+            </a:pPr>
+            <a:r>
+              <a:rPr sz="1500" b="0" i="0">
+                <a:solidFill>
+                  <a:srgbClr val="1C1730"/>
+                </a:solidFill>
+                <a:latin typeface="Calibri"/>
+              </a:rPr>
+              <a:t>On the Anders Brownworth Blockchain demo, edit an early block and watch every later block turn invalid.</a:t>
+            </a:r>
+          </a:p>
+        </p:txBody>
+      </p:sp>
+      <p:sp>
+        <p:nvSpPr>
+          <p:cNvPr id="11" name="Oval 10"/>
+          <p:cNvSpPr/>
+          <p:nvPr/>
+        </p:nvSpPr>
+        <p:spPr>
+          <a:xfrm>
+            <a:off x="822960" y="5029200"/>
+            <a:ext cx="502920" cy="502920"/>
+          </a:xfrm>
+          <a:prstGeom prst="ellipse">
+            <a:avLst/>
+          </a:prstGeom>
+          <a:solidFill>
+            <a:srgbClr val="33506A"/>
+          </a:solidFill>
+          <a:ln>
+            <a:noFill/>
+          </a:ln>
+          <a:effectLst/>
+        </p:spPr>
+        <p:style>
+          <a:lnRef idx="1">
+            <a:schemeClr val="accent1"/>
+          </a:lnRef>
+          <a:fillRef idx="3">
+            <a:schemeClr val="accent1"/>
+          </a:fillRef>
+          <a:effectRef idx="2">
+            <a:schemeClr val="accent1"/>
+          </a:effectRef>
+          <a:fontRef idx="minor">
+            <a:schemeClr val="lt1"/>
+          </a:fontRef>
+        </p:style>
+        <p:txBody>
+          <a:bodyPr rtlCol="0" anchor="ctr" wrap="none"/>
+          <a:lstStyle/>
+          <a:p>
+            <a:pPr algn="ctr"/>
+            <a:r>
+              <a:rPr sz="1500" b="1">
+                <a:solidFill>
+                  <a:srgbClr val="FFFFFF"/>
+                </a:solidFill>
+                <a:latin typeface="Century Gothic"/>
+              </a:rPr>
+              <a:t>4</a:t>
+            </a:r>
+          </a:p>
+        </p:txBody>
+      </p:sp>
+      <p:sp>
+        <p:nvSpPr>
+          <p:cNvPr id="12" name="TextBox 11"/>
+          <p:cNvSpPr txBox="1"/>
+          <p:nvPr/>
+        </p:nvSpPr>
+        <p:spPr>
+          <a:xfrm>
+            <a:off x="1600200" y="5084064"/>
+            <a:ext cx="9509760" cy="822960"/>
+          </a:xfrm>
+          <a:prstGeom prst="rect">
+            <a:avLst/>
+          </a:prstGeom>
+          <a:noFill/>
+        </p:spPr>
+        <p:txBody>
+          <a:bodyPr wrap="square" anchor="t" lIns="0" rIns="0" tIns="0" bIns="0">
+            <a:spAutoFit/>
+          </a:bodyPr>
+          <a:lstStyle/>
+          <a:p>
+            <a:pPr algn="l">
+              <a:lnSpc>
+                <a:spcPct val="130000"/>
+              </a:lnSpc>
+            </a:pPr>
+            <a:r>
+              <a:rPr sz="1500" b="0" i="0">
+                <a:solidFill>
+                  <a:srgbClr val="1C1730"/>
+                </a:solidFill>
+                <a:latin typeface="Calibri"/>
+              </a:rPr>
+              <a:t>Look up your own Week 1 testnet transaction on sepolia.etherscan.io.</a:t>
+            </a:r>
+          </a:p>
+        </p:txBody>
+      </p:sp>
+      <p:sp>
+        <p:nvSpPr>
+          <p:cNvPr id="13" name="TextBox 12"/>
+          <p:cNvSpPr txBox="1"/>
+          <p:nvPr/>
+        </p:nvSpPr>
+        <p:spPr>
+          <a:xfrm>
+            <a:off x="9966960" y="502920"/>
+            <a:ext cx="1371600" cy="320040"/>
+          </a:xfrm>
+          <a:prstGeom prst="rect">
+            <a:avLst/>
+          </a:prstGeom>
+          <a:noFill/>
+        </p:spPr>
+        <p:txBody>
+          <a:bodyPr wrap="square" anchor="t" lIns="0" rIns="0" tIns="0" bIns="0">
+            <a:spAutoFit/>
+          </a:bodyPr>
+          <a:lstStyle/>
+          <a:p>
+            <a:pPr algn="r">
+              <a:lnSpc>
+                <a:spcPct val="115000"/>
+              </a:lnSpc>
+            </a:pPr>
+            <a:r>
+              <a:rPr sz="1100" b="1" i="0">
+                <a:solidFill>
+                  <a:srgbClr val="5C576E"/>
+                </a:solidFill>
+                <a:latin typeface="Consolas"/>
+              </a:rPr>
+              <a:t>17 / 18</a:t>
+            </a:r>
+          </a:p>
+        </p:txBody>
+      </p:sp>
+    </p:spTree>
+  </p:cSld>
+  <p:clrMapOvr>
+    <a:masterClrMapping/>
+  </p:clrMapOvr>
+</p:sld>
+</file>
+
+<file path=ppt/slides/slide18.xml><?xml version="1.0" encoding="utf-8"?>
+<p:sld xmlns:a="http://schemas.openxmlformats.org/drawingml/2006/main" xmlns:p="http://schemas.openxmlformats.org/presentationml/2006/main" xmlns:r="http://schemas.openxmlformats.org/officeDocument/2006/relationships">
+  <p:cSld>
+    <p:spTree>
+      <p:nvGrpSpPr>
+        <p:cNvPr id="1" name=""/>
+        <p:cNvGrpSpPr/>
+        <p:nvPr/>
+      </p:nvGrpSpPr>
+      <p:grpSpPr/>
+      <p:sp>
+        <p:nvSpPr>
+          <p:cNvPr id="2" name="Rectangle 1"/>
+          <p:cNvSpPr/>
+          <p:nvPr/>
+        </p:nvSpPr>
+        <p:spPr>
+          <a:xfrm>
+            <a:off x="0" y="0"/>
+            <a:ext cx="12191695" cy="6858000"/>
+          </a:xfrm>
+          <a:prstGeom prst="rect">
+            <a:avLst/>
+          </a:prstGeom>
+          <a:solidFill>
             <a:srgbClr val="1C1730"/>
           </a:solidFill>
           <a:ln>
@@ -6491,7 +7841,7 @@
                 </a:solidFill>
                 <a:latin typeface="Consolas"/>
               </a:rPr>
-              <a:t>15 / 15</a:t>
+              <a:t>18 / 18</a:t>
             </a:r>
           </a:p>
         </p:txBody>
@@ -6588,11 +7938,11 @@
             <a:r>
               <a:rPr sz="1300" b="1" i="0">
                 <a:solidFill>
-                  <a:srgbClr val="33506A"/>
+                  <a:srgbClr val="5C576E"/>
                 </a:solidFill>
                 <a:latin typeface="Calibri"/>
               </a:rPr>
-              <a:t>TOPIC 03 — BLOCKS &amp; CHAINS</a:t>
+              <a:t>HOW THIS COURSE IS STRUCTURED</a:t>
             </a:r>
           </a:p>
         </p:txBody>
@@ -6631,21 +7981,69 @@
                 </a:solidFill>
                 <a:latin typeface="Century Gothic"/>
               </a:rPr>
-              <a:t>Why This Matters</a:t>
-            </a:r>
-          </a:p>
-        </p:txBody>
-      </p:sp>
-      <p:sp>
-        <p:nvSpPr>
-          <p:cNvPr id="5" name="TextBox 4"/>
-          <p:cNvSpPr txBox="1"/>
-          <p:nvPr/>
-        </p:nvSpPr>
-        <p:spPr>
-          <a:xfrm>
-            <a:off x="822960" y="1965960"/>
-            <a:ext cx="9875520" cy="1463040"/>
+              <a:t>Two Halves, Four Weeks Each</a:t>
+            </a:r>
+          </a:p>
+        </p:txBody>
+      </p:sp>
+      <p:sp>
+        <p:nvSpPr>
+          <p:cNvPr id="5" name="Rounded Rectangle 4"/>
+          <p:cNvSpPr/>
+          <p:nvPr/>
+        </p:nvSpPr>
+        <p:spPr>
+          <a:xfrm>
+            <a:off x="822960" y="2103120"/>
+            <a:ext cx="5120640" cy="2743200"/>
+          </a:xfrm>
+          <a:prstGeom prst="roundRect">
+            <a:avLst>
+              <a:gd name="adj" fmla="val 9000"/>
+            </a:avLst>
+          </a:prstGeom>
+          <a:solidFill>
+            <a:srgbClr val="FFFFFF"/>
+          </a:solidFill>
+          <a:ln w="12700">
+            <a:solidFill>
+              <a:srgbClr val="DED9EA"/>
+            </a:solidFill>
+          </a:ln>
+          <a:effectLst/>
+        </p:spPr>
+        <p:style>
+          <a:lnRef idx="1">
+            <a:schemeClr val="accent1"/>
+          </a:lnRef>
+          <a:fillRef idx="3">
+            <a:schemeClr val="accent1"/>
+          </a:fillRef>
+          <a:effectRef idx="2">
+            <a:schemeClr val="accent1"/>
+          </a:effectRef>
+          <a:fontRef idx="minor">
+            <a:schemeClr val="lt1"/>
+          </a:fontRef>
+        </p:style>
+        <p:txBody>
+          <a:bodyPr rtlCol="0" anchor="ctr"/>
+          <a:lstStyle/>
+          <a:p>
+            <a:pPr algn="ctr"/>
+          </a:p>
+        </p:txBody>
+      </p:sp>
+      <p:sp>
+        <p:nvSpPr>
+          <p:cNvPr id="6" name="TextBox 5"/>
+          <p:cNvSpPr txBox="1"/>
+          <p:nvPr/>
+        </p:nvSpPr>
+        <p:spPr>
+          <a:xfrm>
+            <a:off x="1078992" y="2359152"/>
+            <a:ext cx="4608576" cy="457200"/>
           </a:xfrm>
           <a:prstGeom prst="rect">
             <a:avLst/>
@@ -6660,73 +8058,201 @@
           <a:p>
             <a:pPr algn="l">
               <a:lnSpc>
-                <a:spcPct val="140000"/>
-              </a:lnSpc>
-            </a:pPr>
-            <a:r>
-              <a:rPr sz="1600" b="0" i="0">
+                <a:spcPct val="115000"/>
+              </a:lnSpc>
+            </a:pPr>
+            <a:r>
+              <a:rPr sz="1800" b="1" i="0">
+                <a:solidFill>
+                  <a:srgbClr val="1C1730"/>
+                </a:solidFill>
+                <a:latin typeface="Century Gothic"/>
+              </a:rPr>
+              <a:t>Half 1 · Weeks 1–4</a:t>
+            </a:r>
+          </a:p>
+        </p:txBody>
+      </p:sp>
+      <p:sp>
+        <p:nvSpPr>
+          <p:cNvPr id="7" name="TextBox 6"/>
+          <p:cNvSpPr txBox="1"/>
+          <p:nvPr/>
+        </p:nvSpPr>
+        <p:spPr>
+          <a:xfrm>
+            <a:off x="1078992" y="2816352"/>
+            <a:ext cx="4608576" cy="1892808"/>
+          </a:xfrm>
+          <a:prstGeom prst="rect">
+            <a:avLst/>
+          </a:prstGeom>
+          <a:noFill/>
+        </p:spPr>
+        <p:txBody>
+          <a:bodyPr wrap="square" anchor="t" lIns="0" rIns="0" tIns="0" bIns="0">
+            <a:spAutoFit/>
+          </a:bodyPr>
+          <a:lstStyle/>
+          <a:p>
+            <a:pPr algn="l">
+              <a:lnSpc>
+                <a:spcPct val="128000"/>
+              </a:lnSpc>
+            </a:pPr>
+            <a:r>
+              <a:rPr sz="1350" b="0" i="0">
+                <a:solidFill>
+                  <a:srgbClr val="1C1730"/>
+                </a:solidFill>
+                <a:latin typeface="Calibri"/>
+              </a:rPr>
+              <a:t>Basics &amp; Core Concepts. Everything you need to walk into a hackathon and build something real — wallets, contracts, tokens, a working dApp.</a:t>
+            </a:r>
+          </a:p>
+        </p:txBody>
+      </p:sp>
+      <p:sp>
+        <p:nvSpPr>
+          <p:cNvPr id="8" name="Rounded Rectangle 7"/>
+          <p:cNvSpPr/>
+          <p:nvPr/>
+        </p:nvSpPr>
+        <p:spPr>
+          <a:xfrm>
+            <a:off x="6217920" y="2103120"/>
+            <a:ext cx="5120640" cy="2743200"/>
+          </a:xfrm>
+          <a:prstGeom prst="roundRect">
+            <a:avLst>
+              <a:gd name="adj" fmla="val 9000"/>
+            </a:avLst>
+          </a:prstGeom>
+          <a:solidFill>
+            <a:srgbClr val="FFFFFF"/>
+          </a:solidFill>
+          <a:ln w="12700">
+            <a:solidFill>
+              <a:srgbClr val="DED9EA"/>
+            </a:solidFill>
+          </a:ln>
+          <a:effectLst/>
+        </p:spPr>
+        <p:style>
+          <a:lnRef idx="1">
+            <a:schemeClr val="accent1"/>
+          </a:lnRef>
+          <a:fillRef idx="3">
+            <a:schemeClr val="accent1"/>
+          </a:fillRef>
+          <a:effectRef idx="2">
+            <a:schemeClr val="accent1"/>
+          </a:effectRef>
+          <a:fontRef idx="minor">
+            <a:schemeClr val="lt1"/>
+          </a:fontRef>
+        </p:style>
+        <p:txBody>
+          <a:bodyPr rtlCol="0" anchor="ctr"/>
+          <a:lstStyle/>
+          <a:p>
+            <a:pPr algn="ctr"/>
+          </a:p>
+        </p:txBody>
+      </p:sp>
+      <p:sp>
+        <p:nvSpPr>
+          <p:cNvPr id="9" name="TextBox 8"/>
+          <p:cNvSpPr txBox="1"/>
+          <p:nvPr/>
+        </p:nvSpPr>
+        <p:spPr>
+          <a:xfrm>
+            <a:off x="6473952" y="2359152"/>
+            <a:ext cx="4608576" cy="457200"/>
+          </a:xfrm>
+          <a:prstGeom prst="rect">
+            <a:avLst/>
+          </a:prstGeom>
+          <a:noFill/>
+        </p:spPr>
+        <p:txBody>
+          <a:bodyPr wrap="square" anchor="t" lIns="0" rIns="0" tIns="0" bIns="0">
+            <a:spAutoFit/>
+          </a:bodyPr>
+          <a:lstStyle/>
+          <a:p>
+            <a:pPr algn="l">
+              <a:lnSpc>
+                <a:spcPct val="115000"/>
+              </a:lnSpc>
+            </a:pPr>
+            <a:r>
+              <a:rPr sz="1800" b="1" i="0">
                 <a:solidFill>
                   <a:srgbClr val="5C576E"/>
                 </a:solidFill>
+                <a:latin typeface="Century Gothic"/>
+              </a:rPr>
+              <a:t>Half 2 · Weeks 5–8</a:t>
+            </a:r>
+          </a:p>
+        </p:txBody>
+      </p:sp>
+      <p:sp>
+        <p:nvSpPr>
+          <p:cNvPr id="10" name="TextBox 9"/>
+          <p:cNvSpPr txBox="1"/>
+          <p:nvPr/>
+        </p:nvSpPr>
+        <p:spPr>
+          <a:xfrm>
+            <a:off x="6473952" y="2816352"/>
+            <a:ext cx="4608576" cy="1892808"/>
+          </a:xfrm>
+          <a:prstGeom prst="rect">
+            <a:avLst/>
+          </a:prstGeom>
+          <a:noFill/>
+        </p:spPr>
+        <p:txBody>
+          <a:bodyPr wrap="square" anchor="t" lIns="0" rIns="0" tIns="0" bIns="0">
+            <a:spAutoFit/>
+          </a:bodyPr>
+          <a:lstStyle/>
+          <a:p>
+            <a:pPr algn="l">
+              <a:lnSpc>
+                <a:spcPct val="128000"/>
+              </a:lnSpc>
+            </a:pPr>
+            <a:r>
+              <a:rPr sz="1350" b="0" i="0">
+                <a:solidFill>
+                  <a:srgbClr val="5C576E"/>
+                </a:solidFill>
                 <a:latin typeface="Calibri"/>
               </a:rPr>
-              <a:t>You now have tamper-evidence (hashing) and authorization (signing). This section shows how thousands of signed, hashed transactions get organized into the actual structure that gives "blockchain" its name.</a:t>
-            </a:r>
-          </a:p>
-        </p:txBody>
-      </p:sp>
-      <p:sp>
-        <p:nvSpPr>
-          <p:cNvPr id="6" name="TextBox 5"/>
-          <p:cNvSpPr txBox="1"/>
-          <p:nvPr/>
-        </p:nvSpPr>
-        <p:spPr>
-          <a:xfrm>
-            <a:off x="822960" y="3657600"/>
-            <a:ext cx="9875520" cy="365760"/>
-          </a:xfrm>
-          <a:prstGeom prst="rect">
-            <a:avLst/>
-          </a:prstGeom>
-          <a:noFill/>
-        </p:spPr>
-        <p:txBody>
-          <a:bodyPr wrap="square" anchor="t" lIns="0" rIns="0" tIns="0" bIns="0">
-            <a:spAutoFit/>
-          </a:bodyPr>
-          <a:lstStyle/>
-          <a:p>
-            <a:pPr algn="l">
-              <a:lnSpc>
-                <a:spcPct val="115000"/>
-              </a:lnSpc>
-            </a:pPr>
-            <a:r>
-              <a:rPr sz="1200" b="1" i="0">
-                <a:solidFill>
-                  <a:srgbClr val="33506A"/>
-                </a:solidFill>
-                <a:latin typeface="Calibri"/>
-              </a:rPr>
-              <a:t>WHAT THIS SECTION COVERS</a:t>
-            </a:r>
-          </a:p>
-        </p:txBody>
-      </p:sp>
-      <p:sp>
-        <p:nvSpPr>
-          <p:cNvPr id="7" name="Rectangle 6"/>
+              <a:t>Advanced Topics. Security, upgradeable contracts, Layer 2s, and the wider ecosystem — what separates a prototype from production.</a:t>
+            </a:r>
+          </a:p>
+        </p:txBody>
+      </p:sp>
+      <p:sp>
+        <p:nvSpPr>
+          <p:cNvPr id="11" name="Rounded Rectangle 10"/>
           <p:cNvSpPr/>
           <p:nvPr/>
         </p:nvSpPr>
         <p:spPr>
           <a:xfrm>
-            <a:off x="822960" y="4197096"/>
-            <a:ext cx="82296" cy="82296"/>
-          </a:xfrm>
-          <a:prstGeom prst="rect">
-            <a:avLst/>
+            <a:off x="822960" y="5074920"/>
+            <a:ext cx="3291840" cy="502920"/>
+          </a:xfrm>
+          <a:prstGeom prst="roundRect">
+            <a:avLst>
+              <a:gd name="adj" fmla="val 50000"/>
+            </a:avLst>
           </a:prstGeom>
           <a:solidFill>
             <a:srgbClr val="33506A"/>
@@ -6760,14 +8286,14 @@
       </p:sp>
       <p:sp>
         <p:nvSpPr>
-          <p:cNvPr id="8" name="TextBox 7"/>
-          <p:cNvSpPr txBox="1"/>
-          <p:nvPr/>
-        </p:nvSpPr>
-        <p:spPr>
-          <a:xfrm>
-            <a:off x="1051560" y="4114800"/>
-            <a:ext cx="4709160" cy="365760"/>
+          <p:cNvPr id="12" name="TextBox 11"/>
+          <p:cNvSpPr txBox="1"/>
+          <p:nvPr/>
+        </p:nvSpPr>
+        <p:spPr>
+          <a:xfrm>
+            <a:off x="1097280" y="5193792"/>
+            <a:ext cx="2926080" cy="320040"/>
           </a:xfrm>
           <a:prstGeom prst="rect">
             <a:avLst/>
@@ -6786,684 +8312,20 @@
               </a:lnSpc>
             </a:pPr>
             <a:r>
-              <a:rPr sz="1350" b="0" i="0">
-                <a:solidFill>
-                  <a:srgbClr val="1C1730"/>
+              <a:rPr sz="1250" b="1" i="0">
+                <a:solidFill>
+                  <a:srgbClr val="FFFFFF"/>
                 </a:solidFill>
                 <a:latin typeface="Calibri"/>
               </a:rPr>
-              <a:t>Core concept</a:t>
-            </a:r>
-          </a:p>
-        </p:txBody>
-      </p:sp>
-      <p:sp>
-        <p:nvSpPr>
-          <p:cNvPr id="9" name="Rectangle 8"/>
-          <p:cNvSpPr/>
-          <p:nvPr/>
-        </p:nvSpPr>
-        <p:spPr>
-          <a:xfrm>
-            <a:off x="6035040" y="4197096"/>
-            <a:ext cx="82296" cy="82296"/>
-          </a:xfrm>
-          <a:prstGeom prst="rect">
-            <a:avLst/>
-          </a:prstGeom>
-          <a:solidFill>
-            <a:srgbClr val="33506A"/>
-          </a:solidFill>
-          <a:ln>
-            <a:noFill/>
-          </a:ln>
-          <a:effectLst/>
-        </p:spPr>
-        <p:style>
-          <a:lnRef idx="1">
-            <a:schemeClr val="accent1"/>
-          </a:lnRef>
-          <a:fillRef idx="3">
-            <a:schemeClr val="accent1"/>
-          </a:fillRef>
-          <a:effectRef idx="2">
-            <a:schemeClr val="accent1"/>
-          </a:effectRef>
-          <a:fontRef idx="minor">
-            <a:schemeClr val="lt1"/>
-          </a:fontRef>
-        </p:style>
-        <p:txBody>
-          <a:bodyPr rtlCol="0" anchor="ctr"/>
-          <a:lstStyle/>
-          <a:p>
-            <a:pPr algn="ctr"/>
-          </a:p>
-        </p:txBody>
-      </p:sp>
-      <p:sp>
-        <p:nvSpPr>
-          <p:cNvPr id="10" name="TextBox 9"/>
-          <p:cNvSpPr txBox="1"/>
-          <p:nvPr/>
-        </p:nvSpPr>
-        <p:spPr>
-          <a:xfrm>
-            <a:off x="6263640" y="4114800"/>
-            <a:ext cx="4709160" cy="365760"/>
-          </a:xfrm>
-          <a:prstGeom prst="rect">
-            <a:avLst/>
-          </a:prstGeom>
-          <a:noFill/>
-        </p:spPr>
-        <p:txBody>
-          <a:bodyPr wrap="square" anchor="t" lIns="0" rIns="0" tIns="0" bIns="0">
-            <a:spAutoFit/>
-          </a:bodyPr>
-          <a:lstStyle/>
-          <a:p>
-            <a:pPr algn="l">
-              <a:lnSpc>
-                <a:spcPct val="115000"/>
-              </a:lnSpc>
-            </a:pPr>
-            <a:r>
-              <a:rPr sz="1350" b="0" i="0">
-                <a:solidFill>
-                  <a:srgbClr val="1C1730"/>
-                </a:solidFill>
-                <a:latin typeface="Calibri"/>
-              </a:rPr>
-              <a:t>Four key ideas, one at a time</a:t>
-            </a:r>
-          </a:p>
-        </p:txBody>
-      </p:sp>
-      <p:sp>
-        <p:nvSpPr>
-          <p:cNvPr id="11" name="Rectangle 10"/>
-          <p:cNvSpPr/>
-          <p:nvPr/>
-        </p:nvSpPr>
-        <p:spPr>
-          <a:xfrm>
-            <a:off x="822960" y="4654296"/>
-            <a:ext cx="82296" cy="82296"/>
-          </a:xfrm>
-          <a:prstGeom prst="rect">
-            <a:avLst/>
-          </a:prstGeom>
-          <a:solidFill>
-            <a:srgbClr val="33506A"/>
-          </a:solidFill>
-          <a:ln>
-            <a:noFill/>
-          </a:ln>
-          <a:effectLst/>
-        </p:spPr>
-        <p:style>
-          <a:lnRef idx="1">
-            <a:schemeClr val="accent1"/>
-          </a:lnRef>
-          <a:fillRef idx="3">
-            <a:schemeClr val="accent1"/>
-          </a:fillRef>
-          <a:effectRef idx="2">
-            <a:schemeClr val="accent1"/>
-          </a:effectRef>
-          <a:fontRef idx="minor">
-            <a:schemeClr val="lt1"/>
-          </a:fontRef>
-        </p:style>
-        <p:txBody>
-          <a:bodyPr rtlCol="0" anchor="ctr"/>
-          <a:lstStyle/>
-          <a:p>
-            <a:pPr algn="ctr"/>
-          </a:p>
-        </p:txBody>
-      </p:sp>
-      <p:sp>
-        <p:nvSpPr>
-          <p:cNvPr id="12" name="TextBox 11"/>
-          <p:cNvSpPr txBox="1"/>
-          <p:nvPr/>
-        </p:nvSpPr>
-        <p:spPr>
-          <a:xfrm>
-            <a:off x="1051560" y="4572000"/>
-            <a:ext cx="4709160" cy="365760"/>
-          </a:xfrm>
-          <a:prstGeom prst="rect">
-            <a:avLst/>
-          </a:prstGeom>
-          <a:noFill/>
-        </p:spPr>
-        <p:txBody>
-          <a:bodyPr wrap="square" anchor="t" lIns="0" rIns="0" tIns="0" bIns="0">
-            <a:spAutoFit/>
-          </a:bodyPr>
-          <a:lstStyle/>
-          <a:p>
-            <a:pPr algn="l">
-              <a:lnSpc>
-                <a:spcPct val="115000"/>
-              </a:lnSpc>
-            </a:pPr>
-            <a:r>
-              <a:rPr sz="1350" b="0" i="0">
-                <a:solidFill>
-                  <a:srgbClr val="1C1730"/>
-                </a:solidFill>
-                <a:latin typeface="Calibri"/>
-              </a:rPr>
-              <a:t>A real, reproducible worked example</a:t>
-            </a:r>
-          </a:p>
-        </p:txBody>
-      </p:sp>
-      <p:sp>
-        <p:nvSpPr>
-          <p:cNvPr id="13" name="Rectangle 12"/>
-          <p:cNvSpPr/>
-          <p:nvPr/>
-        </p:nvSpPr>
-        <p:spPr>
-          <a:xfrm>
-            <a:off x="6035040" y="4654296"/>
-            <a:ext cx="82296" cy="82296"/>
-          </a:xfrm>
-          <a:prstGeom prst="rect">
-            <a:avLst/>
-          </a:prstGeom>
-          <a:solidFill>
-            <a:srgbClr val="33506A"/>
-          </a:solidFill>
-          <a:ln>
-            <a:noFill/>
-          </a:ln>
-          <a:effectLst/>
-        </p:spPr>
-        <p:style>
-          <a:lnRef idx="1">
-            <a:schemeClr val="accent1"/>
-          </a:lnRef>
-          <a:fillRef idx="3">
-            <a:schemeClr val="accent1"/>
-          </a:fillRef>
-          <a:effectRef idx="2">
-            <a:schemeClr val="accent1"/>
-          </a:effectRef>
-          <a:fontRef idx="minor">
-            <a:schemeClr val="lt1"/>
-          </a:fontRef>
-        </p:style>
-        <p:txBody>
-          <a:bodyPr rtlCol="0" anchor="ctr"/>
-          <a:lstStyle/>
-          <a:p>
-            <a:pPr algn="ctr"/>
-          </a:p>
-        </p:txBody>
-      </p:sp>
-      <p:sp>
-        <p:nvSpPr>
-          <p:cNvPr id="14" name="TextBox 13"/>
-          <p:cNvSpPr txBox="1"/>
-          <p:nvPr/>
-        </p:nvSpPr>
-        <p:spPr>
-          <a:xfrm>
-            <a:off x="6263640" y="4572000"/>
-            <a:ext cx="4709160" cy="365760"/>
-          </a:xfrm>
-          <a:prstGeom prst="rect">
-            <a:avLst/>
-          </a:prstGeom>
-          <a:noFill/>
-        </p:spPr>
-        <p:txBody>
-          <a:bodyPr wrap="square" anchor="t" lIns="0" rIns="0" tIns="0" bIns="0">
-            <a:spAutoFit/>
-          </a:bodyPr>
-          <a:lstStyle/>
-          <a:p>
-            <a:pPr algn="l">
-              <a:lnSpc>
-                <a:spcPct val="115000"/>
-              </a:lnSpc>
-            </a:pPr>
-            <a:r>
-              <a:rPr sz="1350" b="0" i="0">
-                <a:solidFill>
-                  <a:srgbClr val="1C1730"/>
-                </a:solidFill>
-                <a:latin typeface="Calibri"/>
-              </a:rPr>
-              <a:t>Real-world uses beyond blockchain</a:t>
-            </a:r>
-          </a:p>
-        </p:txBody>
-      </p:sp>
-      <p:sp>
-        <p:nvSpPr>
-          <p:cNvPr id="15" name="Rectangle 14"/>
-          <p:cNvSpPr/>
-          <p:nvPr/>
-        </p:nvSpPr>
-        <p:spPr>
-          <a:xfrm>
-            <a:off x="822960" y="5111496"/>
-            <a:ext cx="82296" cy="82296"/>
-          </a:xfrm>
-          <a:prstGeom prst="rect">
-            <a:avLst/>
-          </a:prstGeom>
-          <a:solidFill>
-            <a:srgbClr val="33506A"/>
-          </a:solidFill>
-          <a:ln>
-            <a:noFill/>
-          </a:ln>
-          <a:effectLst/>
-        </p:spPr>
-        <p:style>
-          <a:lnRef idx="1">
-            <a:schemeClr val="accent1"/>
-          </a:lnRef>
-          <a:fillRef idx="3">
-            <a:schemeClr val="accent1"/>
-          </a:fillRef>
-          <a:effectRef idx="2">
-            <a:schemeClr val="accent1"/>
-          </a:effectRef>
-          <a:fontRef idx="minor">
-            <a:schemeClr val="lt1"/>
-          </a:fontRef>
-        </p:style>
-        <p:txBody>
-          <a:bodyPr rtlCol="0" anchor="ctr"/>
-          <a:lstStyle/>
-          <a:p>
-            <a:pPr algn="ctr"/>
-          </a:p>
-        </p:txBody>
-      </p:sp>
-      <p:sp>
-        <p:nvSpPr>
-          <p:cNvPr id="16" name="TextBox 15"/>
-          <p:cNvSpPr txBox="1"/>
-          <p:nvPr/>
-        </p:nvSpPr>
-        <p:spPr>
-          <a:xfrm>
-            <a:off x="1051560" y="5029200"/>
-            <a:ext cx="4709160" cy="365760"/>
-          </a:xfrm>
-          <a:prstGeom prst="rect">
-            <a:avLst/>
-          </a:prstGeom>
-          <a:noFill/>
-        </p:spPr>
-        <p:txBody>
-          <a:bodyPr wrap="square" anchor="t" lIns="0" rIns="0" tIns="0" bIns="0">
-            <a:spAutoFit/>
-          </a:bodyPr>
-          <a:lstStyle/>
-          <a:p>
-            <a:pPr algn="l">
-              <a:lnSpc>
-                <a:spcPct val="115000"/>
-              </a:lnSpc>
-            </a:pPr>
-            <a:r>
-              <a:rPr sz="1350" b="0" i="0">
-                <a:solidFill>
-                  <a:srgbClr val="1C1730"/>
-                </a:solidFill>
-                <a:latin typeface="Calibri"/>
-              </a:rPr>
-              <a:t>A flagship case study</a:t>
-            </a:r>
-          </a:p>
-        </p:txBody>
-      </p:sp>
-      <p:sp>
-        <p:nvSpPr>
-          <p:cNvPr id="17" name="Rectangle 16"/>
-          <p:cNvSpPr/>
-          <p:nvPr/>
-        </p:nvSpPr>
-        <p:spPr>
-          <a:xfrm>
-            <a:off x="6035040" y="5111496"/>
-            <a:ext cx="82296" cy="82296"/>
-          </a:xfrm>
-          <a:prstGeom prst="rect">
-            <a:avLst/>
-          </a:prstGeom>
-          <a:solidFill>
-            <a:srgbClr val="33506A"/>
-          </a:solidFill>
-          <a:ln>
-            <a:noFill/>
-          </a:ln>
-          <a:effectLst/>
-        </p:spPr>
-        <p:style>
-          <a:lnRef idx="1">
-            <a:schemeClr val="accent1"/>
-          </a:lnRef>
-          <a:fillRef idx="3">
-            <a:schemeClr val="accent1"/>
-          </a:fillRef>
-          <a:effectRef idx="2">
-            <a:schemeClr val="accent1"/>
-          </a:effectRef>
-          <a:fontRef idx="minor">
-            <a:schemeClr val="lt1"/>
-          </a:fontRef>
-        </p:style>
-        <p:txBody>
-          <a:bodyPr rtlCol="0" anchor="ctr"/>
-          <a:lstStyle/>
-          <a:p>
-            <a:pPr algn="ctr"/>
-          </a:p>
-        </p:txBody>
-      </p:sp>
-      <p:sp>
-        <p:nvSpPr>
-          <p:cNvPr id="18" name="TextBox 17"/>
-          <p:cNvSpPr txBox="1"/>
-          <p:nvPr/>
-        </p:nvSpPr>
-        <p:spPr>
-          <a:xfrm>
-            <a:off x="6263640" y="5029200"/>
-            <a:ext cx="4709160" cy="365760"/>
-          </a:xfrm>
-          <a:prstGeom prst="rect">
-            <a:avLst/>
-          </a:prstGeom>
-          <a:noFill/>
-        </p:spPr>
-        <p:txBody>
-          <a:bodyPr wrap="square" anchor="t" lIns="0" rIns="0" tIns="0" bIns="0">
-            <a:spAutoFit/>
-          </a:bodyPr>
-          <a:lstStyle/>
-          <a:p>
-            <a:pPr algn="l">
-              <a:lnSpc>
-                <a:spcPct val="115000"/>
-              </a:lnSpc>
-            </a:pPr>
-            <a:r>
-              <a:rPr sz="1350" b="0" i="0">
-                <a:solidFill>
-                  <a:srgbClr val="1C1730"/>
-                </a:solidFill>
-                <a:latin typeface="Calibri"/>
-              </a:rPr>
-              <a:t>A real-life analogy</a:t>
-            </a:r>
-          </a:p>
-        </p:txBody>
-      </p:sp>
-      <p:sp>
-        <p:nvSpPr>
-          <p:cNvPr id="19" name="Rectangle 18"/>
-          <p:cNvSpPr/>
-          <p:nvPr/>
-        </p:nvSpPr>
-        <p:spPr>
-          <a:xfrm>
-            <a:off x="822960" y="5568696"/>
-            <a:ext cx="82296" cy="82296"/>
-          </a:xfrm>
-          <a:prstGeom prst="rect">
-            <a:avLst/>
-          </a:prstGeom>
-          <a:solidFill>
-            <a:srgbClr val="33506A"/>
-          </a:solidFill>
-          <a:ln>
-            <a:noFill/>
-          </a:ln>
-          <a:effectLst/>
-        </p:spPr>
-        <p:style>
-          <a:lnRef idx="1">
-            <a:schemeClr val="accent1"/>
-          </a:lnRef>
-          <a:fillRef idx="3">
-            <a:schemeClr val="accent1"/>
-          </a:fillRef>
-          <a:effectRef idx="2">
-            <a:schemeClr val="accent1"/>
-          </a:effectRef>
-          <a:fontRef idx="minor">
-            <a:schemeClr val="lt1"/>
-          </a:fontRef>
-        </p:style>
-        <p:txBody>
-          <a:bodyPr rtlCol="0" anchor="ctr"/>
-          <a:lstStyle/>
-          <a:p>
-            <a:pPr algn="ctr"/>
-          </a:p>
-        </p:txBody>
-      </p:sp>
-      <p:sp>
-        <p:nvSpPr>
-          <p:cNvPr id="20" name="TextBox 19"/>
-          <p:cNvSpPr txBox="1"/>
-          <p:nvPr/>
-        </p:nvSpPr>
-        <p:spPr>
-          <a:xfrm>
-            <a:off x="1051560" y="5486400"/>
-            <a:ext cx="4709160" cy="365760"/>
-          </a:xfrm>
-          <a:prstGeom prst="rect">
-            <a:avLst/>
-          </a:prstGeom>
-          <a:noFill/>
-        </p:spPr>
-        <p:txBody>
-          <a:bodyPr wrap="square" anchor="t" lIns="0" rIns="0" tIns="0" bIns="0">
-            <a:spAutoFit/>
-          </a:bodyPr>
-          <a:lstStyle/>
-          <a:p>
-            <a:pPr algn="l">
-              <a:lnSpc>
-                <a:spcPct val="115000"/>
-              </a:lnSpc>
-            </a:pPr>
-            <a:r>
-              <a:rPr sz="1350" b="0" i="0">
-                <a:solidFill>
-                  <a:srgbClr val="1C1730"/>
-                </a:solidFill>
-                <a:latin typeface="Calibri"/>
-              </a:rPr>
-              <a:t>Common misconceptions</a:t>
-            </a:r>
-          </a:p>
-        </p:txBody>
-      </p:sp>
-      <p:sp>
-        <p:nvSpPr>
-          <p:cNvPr id="21" name="Rectangle 20"/>
-          <p:cNvSpPr/>
-          <p:nvPr/>
-        </p:nvSpPr>
-        <p:spPr>
-          <a:xfrm>
-            <a:off x="6035040" y="5568696"/>
-            <a:ext cx="82296" cy="82296"/>
-          </a:xfrm>
-          <a:prstGeom prst="rect">
-            <a:avLst/>
-          </a:prstGeom>
-          <a:solidFill>
-            <a:srgbClr val="33506A"/>
-          </a:solidFill>
-          <a:ln>
-            <a:noFill/>
-          </a:ln>
-          <a:effectLst/>
-        </p:spPr>
-        <p:style>
-          <a:lnRef idx="1">
-            <a:schemeClr val="accent1"/>
-          </a:lnRef>
-          <a:fillRef idx="3">
-            <a:schemeClr val="accent1"/>
-          </a:fillRef>
-          <a:effectRef idx="2">
-            <a:schemeClr val="accent1"/>
-          </a:effectRef>
-          <a:fontRef idx="minor">
-            <a:schemeClr val="lt1"/>
-          </a:fontRef>
-        </p:style>
-        <p:txBody>
-          <a:bodyPr rtlCol="0" anchor="ctr"/>
-          <a:lstStyle/>
-          <a:p>
-            <a:pPr algn="ctr"/>
-          </a:p>
-        </p:txBody>
-      </p:sp>
-      <p:sp>
-        <p:nvSpPr>
-          <p:cNvPr id="22" name="TextBox 21"/>
-          <p:cNvSpPr txBox="1"/>
-          <p:nvPr/>
-        </p:nvSpPr>
-        <p:spPr>
-          <a:xfrm>
-            <a:off x="6263640" y="5486400"/>
-            <a:ext cx="4709160" cy="365760"/>
-          </a:xfrm>
-          <a:prstGeom prst="rect">
-            <a:avLst/>
-          </a:prstGeom>
-          <a:noFill/>
-        </p:spPr>
-        <p:txBody>
-          <a:bodyPr wrap="square" anchor="t" lIns="0" rIns="0" tIns="0" bIns="0">
-            <a:spAutoFit/>
-          </a:bodyPr>
-          <a:lstStyle/>
-          <a:p>
-            <a:pPr algn="l">
-              <a:lnSpc>
-                <a:spcPct val="115000"/>
-              </a:lnSpc>
-            </a:pPr>
-            <a:r>
-              <a:rPr sz="1350" b="0" i="0">
-                <a:solidFill>
-                  <a:srgbClr val="1C1730"/>
-                </a:solidFill>
-                <a:latin typeface="Calibri"/>
-              </a:rPr>
-              <a:t>Hands-on practice</a:t>
-            </a:r>
-          </a:p>
-        </p:txBody>
-      </p:sp>
-      <p:sp>
-        <p:nvSpPr>
-          <p:cNvPr id="23" name="Rectangle 22"/>
-          <p:cNvSpPr/>
-          <p:nvPr/>
-        </p:nvSpPr>
-        <p:spPr>
-          <a:xfrm>
-            <a:off x="822960" y="6025896"/>
-            <a:ext cx="82296" cy="82296"/>
-          </a:xfrm>
-          <a:prstGeom prst="rect">
-            <a:avLst/>
-          </a:prstGeom>
-          <a:solidFill>
-            <a:srgbClr val="33506A"/>
-          </a:solidFill>
-          <a:ln>
-            <a:noFill/>
-          </a:ln>
-          <a:effectLst/>
-        </p:spPr>
-        <p:style>
-          <a:lnRef idx="1">
-            <a:schemeClr val="accent1"/>
-          </a:lnRef>
-          <a:fillRef idx="3">
-            <a:schemeClr val="accent1"/>
-          </a:fillRef>
-          <a:effectRef idx="2">
-            <a:schemeClr val="accent1"/>
-          </a:effectRef>
-          <a:fontRef idx="minor">
-            <a:schemeClr val="lt1"/>
-          </a:fontRef>
-        </p:style>
-        <p:txBody>
-          <a:bodyPr rtlCol="0" anchor="ctr"/>
-          <a:lstStyle/>
-          <a:p>
-            <a:pPr algn="ctr"/>
-          </a:p>
-        </p:txBody>
-      </p:sp>
-      <p:sp>
-        <p:nvSpPr>
-          <p:cNvPr id="24" name="TextBox 23"/>
-          <p:cNvSpPr txBox="1"/>
-          <p:nvPr/>
-        </p:nvSpPr>
-        <p:spPr>
-          <a:xfrm>
-            <a:off x="1051560" y="5943600"/>
-            <a:ext cx="4709160" cy="365760"/>
-          </a:xfrm>
-          <a:prstGeom prst="rect">
-            <a:avLst/>
-          </a:prstGeom>
-          <a:noFill/>
-        </p:spPr>
-        <p:txBody>
-          <a:bodyPr wrap="square" anchor="t" lIns="0" rIns="0" tIns="0" bIns="0">
-            <a:spAutoFit/>
-          </a:bodyPr>
-          <a:lstStyle/>
-          <a:p>
-            <a:pPr algn="l">
-              <a:lnSpc>
-                <a:spcPct val="115000"/>
-              </a:lnSpc>
-            </a:pPr>
-            <a:r>
-              <a:rPr sz="1350" b="0" i="0">
-                <a:solidFill>
-                  <a:srgbClr val="1C1730"/>
-                </a:solidFill>
-                <a:latin typeface="Calibri"/>
-              </a:rPr>
-              <a:t>Take-home assignment</a:t>
-            </a:r>
-          </a:p>
-        </p:txBody>
-      </p:sp>
-      <p:sp>
-        <p:nvSpPr>
-          <p:cNvPr id="25" name="TextBox 24"/>
+              <a:t>◉  YOU ARE HERE — WEEK 01</a:t>
+            </a:r>
+          </a:p>
+        </p:txBody>
+      </p:sp>
+      <p:sp>
+        <p:nvSpPr>
+          <p:cNvPr id="13" name="TextBox 12"/>
           <p:cNvSpPr txBox="1"/>
           <p:nvPr/>
         </p:nvSpPr>
@@ -7495,7 +8357,7 @@
                 </a:solidFill>
                 <a:latin typeface="Consolas"/>
               </a:rPr>
-              <a:t>02 / 15</a:t>
+              <a:t>02 / 18</a:t>
             </a:r>
           </a:p>
         </p:txBody>
@@ -7533,7 +8395,7 @@
             <a:avLst/>
           </a:prstGeom>
           <a:solidFill>
-            <a:srgbClr val="F8F6F2"/>
+            <a:srgbClr val="1C1730"/>
           </a:solidFill>
           <a:ln>
             <a:noFill/>
@@ -7570,7 +8432,7 @@
         </p:nvSpPr>
         <p:spPr>
           <a:xfrm>
-            <a:off x="822960" y="640080"/>
+            <a:off x="822960" y="731520"/>
             <a:ext cx="10058400" cy="365760"/>
           </a:xfrm>
           <a:prstGeom prst="rect">
@@ -7592,11 +8454,11 @@
             <a:r>
               <a:rPr sz="1300" b="1" i="0">
                 <a:solidFill>
-                  <a:srgbClr val="33506A"/>
+                  <a:srgbClr val="FFC53D"/>
                 </a:solidFill>
                 <a:latin typeface="Calibri"/>
               </a:rPr>
-              <a:t>TOPIC 03 — BLOCKS &amp; CHAINS</a:t>
+              <a:t>GROUND RULES</a:t>
             </a:r>
           </a:p>
         </p:txBody>
@@ -7609,7 +8471,7 @@
         </p:nvSpPr>
         <p:spPr>
           <a:xfrm>
-            <a:off x="822960" y="1097280"/>
+            <a:off x="822960" y="1188720"/>
             <a:ext cx="9601200" cy="1005840"/>
           </a:xfrm>
           <a:prstGeom prst="rect">
@@ -7631,102 +8493,90 @@
             <a:r>
               <a:rPr sz="3400" b="1" i="0">
                 <a:solidFill>
-                  <a:srgbClr val="1C1730"/>
+                  <a:srgbClr val="FFFFFF"/>
                 </a:solidFill>
                 <a:latin typeface="Century Gothic"/>
               </a:rPr>
-              <a:t>The Core Concept</a:t>
-            </a:r>
-          </a:p>
-        </p:txBody>
-      </p:sp>
-      <p:sp>
-        <p:nvSpPr>
-          <p:cNvPr id="5" name="Rounded Rectangle 4"/>
-          <p:cNvSpPr/>
+              <a:t>Before You Begin</a:t>
+            </a:r>
+          </a:p>
+        </p:txBody>
+      </p:sp>
+      <p:sp>
+        <p:nvSpPr>
+          <p:cNvPr id="5" name="TextBox 4"/>
+          <p:cNvSpPr txBox="1"/>
           <p:nvPr/>
         </p:nvSpPr>
         <p:spPr>
           <a:xfrm>
             <a:off x="822960" y="2286000"/>
-            <a:ext cx="10515600" cy="3291840"/>
-          </a:xfrm>
-          <a:prstGeom prst="roundRect">
-            <a:avLst>
-              <a:gd name="adj" fmla="val 4000"/>
-            </a:avLst>
-          </a:prstGeom>
-          <a:solidFill>
-            <a:srgbClr val="FFFFFF"/>
-          </a:solidFill>
-          <a:ln>
-            <a:noFill/>
-          </a:ln>
-          <a:effectLst/>
-        </p:spPr>
-        <p:style>
-          <a:lnRef idx="1">
-            <a:schemeClr val="accent1"/>
-          </a:lnRef>
-          <a:fillRef idx="3">
-            <a:schemeClr val="accent1"/>
-          </a:fillRef>
-          <a:effectRef idx="2">
-            <a:schemeClr val="accent1"/>
-          </a:effectRef>
-          <a:fontRef idx="minor">
-            <a:schemeClr val="lt1"/>
-          </a:fontRef>
-        </p:style>
-        <p:txBody>
-          <a:bodyPr rtlCol="0" anchor="ctr"/>
-          <a:lstStyle/>
-          <a:p>
-            <a:pPr algn="ctr"/>
-          </a:p>
-        </p:txBody>
-      </p:sp>
-      <p:sp>
-        <p:nvSpPr>
-          <p:cNvPr id="6" name="Rectangle 5"/>
-          <p:cNvSpPr/>
-          <p:nvPr/>
-        </p:nvSpPr>
-        <p:spPr>
-          <a:xfrm>
-            <a:off x="822960" y="2286000"/>
-            <a:ext cx="91440" cy="3291840"/>
-          </a:xfrm>
-          <a:prstGeom prst="rect">
-            <a:avLst/>
-          </a:prstGeom>
-          <a:solidFill>
-            <a:srgbClr val="33506A"/>
-          </a:solidFill>
-          <a:ln>
-            <a:noFill/>
-          </a:ln>
-          <a:effectLst/>
-        </p:spPr>
-        <p:style>
-          <a:lnRef idx="1">
-            <a:schemeClr val="accent1"/>
-          </a:lnRef>
-          <a:fillRef idx="3">
-            <a:schemeClr val="accent1"/>
-          </a:fillRef>
-          <a:effectRef idx="2">
-            <a:schemeClr val="accent1"/>
-          </a:effectRef>
-          <a:fontRef idx="minor">
-            <a:schemeClr val="lt1"/>
-          </a:fontRef>
-        </p:style>
-        <p:txBody>
-          <a:bodyPr rtlCol="0" anchor="ctr"/>
-          <a:lstStyle/>
-          <a:p>
-            <a:pPr algn="ctr"/>
+            <a:ext cx="548640" cy="457200"/>
+          </a:xfrm>
+          <a:prstGeom prst="rect">
+            <a:avLst/>
+          </a:prstGeom>
+          <a:noFill/>
+        </p:spPr>
+        <p:txBody>
+          <a:bodyPr wrap="square" anchor="t" lIns="0" rIns="0" tIns="0" bIns="0">
+            <a:spAutoFit/>
+          </a:bodyPr>
+          <a:lstStyle/>
+          <a:p>
+            <a:pPr algn="l">
+              <a:lnSpc>
+                <a:spcPct val="115000"/>
+              </a:lnSpc>
+            </a:pPr>
+            <a:r>
+              <a:rPr sz="1800" b="1" i="0">
+                <a:solidFill>
+                  <a:srgbClr val="FFC53D"/>
+                </a:solidFill>
+                <a:latin typeface="Century Gothic"/>
+              </a:rPr>
+              <a:t>01</a:t>
+            </a:r>
+          </a:p>
+        </p:txBody>
+      </p:sp>
+      <p:sp>
+        <p:nvSpPr>
+          <p:cNvPr id="6" name="TextBox 5"/>
+          <p:cNvSpPr txBox="1"/>
+          <p:nvPr/>
+        </p:nvSpPr>
+        <p:spPr>
+          <a:xfrm>
+            <a:off x="1463040" y="2313432"/>
+            <a:ext cx="9326880" cy="548640"/>
+          </a:xfrm>
+          <a:prstGeom prst="rect">
+            <a:avLst/>
+          </a:prstGeom>
+          <a:noFill/>
+        </p:spPr>
+        <p:txBody>
+          <a:bodyPr wrap="square" anchor="t" lIns="0" rIns="0" tIns="0" bIns="0">
+            <a:spAutoFit/>
+          </a:bodyPr>
+          <a:lstStyle/>
+          <a:p>
+            <a:pPr algn="l">
+              <a:lnSpc>
+                <a:spcPct val="130000"/>
+              </a:lnSpc>
+            </a:pPr>
+            <a:r>
+              <a:rPr sz="1450" b="0" i="0">
+                <a:solidFill>
+                  <a:srgbClr val="E9E6F2"/>
+                </a:solidFill>
+                <a:latin typeface="Calibri"/>
+              </a:rPr>
+              <a:t>Understand before you copy — if you can't explain a line of code, don't ship it.</a:t>
+            </a:r>
           </a:p>
         </p:txBody>
       </p:sp>
@@ -7738,8 +8588,8 @@
         </p:nvSpPr>
         <p:spPr>
           <a:xfrm>
-            <a:off x="1280160" y="2697480"/>
-            <a:ext cx="9601200" cy="2560320"/>
+            <a:off x="822960" y="2999232"/>
+            <a:ext cx="548640" cy="457200"/>
           </a:xfrm>
           <a:prstGeom prst="rect">
             <a:avLst/>
@@ -7754,24 +8604,297 @@
           <a:p>
             <a:pPr algn="l">
               <a:lnSpc>
-                <a:spcPct val="155000"/>
-              </a:lnSpc>
-            </a:pPr>
-            <a:r>
-              <a:rPr sz="2000" b="0" i="0">
-                <a:solidFill>
-                  <a:srgbClr val="1C1730"/>
+                <a:spcPct val="115000"/>
+              </a:lnSpc>
+            </a:pPr>
+            <a:r>
+              <a:rPr sz="1800" b="1" i="0">
+                <a:solidFill>
+                  <a:srgbClr val="FFC53D"/>
+                </a:solidFill>
+                <a:latin typeface="Century Gothic"/>
+              </a:rPr>
+              <a:t>02</a:t>
+            </a:r>
+          </a:p>
+        </p:txBody>
+      </p:sp>
+      <p:sp>
+        <p:nvSpPr>
+          <p:cNvPr id="8" name="TextBox 7"/>
+          <p:cNvSpPr txBox="1"/>
+          <p:nvPr/>
+        </p:nvSpPr>
+        <p:spPr>
+          <a:xfrm>
+            <a:off x="1463040" y="3026664"/>
+            <a:ext cx="9326880" cy="548640"/>
+          </a:xfrm>
+          <a:prstGeom prst="rect">
+            <a:avLst/>
+          </a:prstGeom>
+          <a:noFill/>
+        </p:spPr>
+        <p:txBody>
+          <a:bodyPr wrap="square" anchor="t" lIns="0" rIns="0" tIns="0" bIns="0">
+            <a:spAutoFit/>
+          </a:bodyPr>
+          <a:lstStyle/>
+          <a:p>
+            <a:pPr algn="l">
+              <a:lnSpc>
+                <a:spcPct val="130000"/>
+              </a:lnSpc>
+            </a:pPr>
+            <a:r>
+              <a:rPr sz="1450" b="0" i="0">
+                <a:solidFill>
+                  <a:srgbClr val="E9E6F2"/>
                 </a:solidFill>
                 <a:latin typeface="Calibri"/>
               </a:rPr>
-              <a:t>A block is a batch of transactions plus metadata — critically, the hash of the block before it. Because of the avalanche effect from Topic 01, editing an old block changes its hash, which breaks every block chained after it. That domino effect is the entire trick.</a:t>
-            </a:r>
-          </a:p>
-        </p:txBody>
-      </p:sp>
-      <p:sp>
-        <p:nvSpPr>
-          <p:cNvPr id="8" name="TextBox 7"/>
+              <a:t>Testnet first, always — never deploy something you haven't tested locally and on a testnet.</a:t>
+            </a:r>
+          </a:p>
+        </p:txBody>
+      </p:sp>
+      <p:sp>
+        <p:nvSpPr>
+          <p:cNvPr id="9" name="TextBox 8"/>
+          <p:cNvSpPr txBox="1"/>
+          <p:nvPr/>
+        </p:nvSpPr>
+        <p:spPr>
+          <a:xfrm>
+            <a:off x="822960" y="3712464"/>
+            <a:ext cx="548640" cy="457200"/>
+          </a:xfrm>
+          <a:prstGeom prst="rect">
+            <a:avLst/>
+          </a:prstGeom>
+          <a:noFill/>
+        </p:spPr>
+        <p:txBody>
+          <a:bodyPr wrap="square" anchor="t" lIns="0" rIns="0" tIns="0" bIns="0">
+            <a:spAutoFit/>
+          </a:bodyPr>
+          <a:lstStyle/>
+          <a:p>
+            <a:pPr algn="l">
+              <a:lnSpc>
+                <a:spcPct val="115000"/>
+              </a:lnSpc>
+            </a:pPr>
+            <a:r>
+              <a:rPr sz="1800" b="1" i="0">
+                <a:solidFill>
+                  <a:srgbClr val="FFC53D"/>
+                </a:solidFill>
+                <a:latin typeface="Century Gothic"/>
+              </a:rPr>
+              <a:t>03</a:t>
+            </a:r>
+          </a:p>
+        </p:txBody>
+      </p:sp>
+      <p:sp>
+        <p:nvSpPr>
+          <p:cNvPr id="10" name="TextBox 9"/>
+          <p:cNvSpPr txBox="1"/>
+          <p:nvPr/>
+        </p:nvSpPr>
+        <p:spPr>
+          <a:xfrm>
+            <a:off x="1463040" y="3739896"/>
+            <a:ext cx="9326880" cy="548640"/>
+          </a:xfrm>
+          <a:prstGeom prst="rect">
+            <a:avLst/>
+          </a:prstGeom>
+          <a:noFill/>
+        </p:spPr>
+        <p:txBody>
+          <a:bodyPr wrap="square" anchor="t" lIns="0" rIns="0" tIns="0" bIns="0">
+            <a:spAutoFit/>
+          </a:bodyPr>
+          <a:lstStyle/>
+          <a:p>
+            <a:pPr algn="l">
+              <a:lnSpc>
+                <a:spcPct val="130000"/>
+              </a:lnSpc>
+            </a:pPr>
+            <a:r>
+              <a:rPr sz="1450" b="0" i="0">
+                <a:solidFill>
+                  <a:srgbClr val="E9E6F2"/>
+                </a:solidFill>
+                <a:latin typeface="Calibri"/>
+              </a:rPr>
+              <a:t>No frontend before your contract works from the command line.</a:t>
+            </a:r>
+          </a:p>
+        </p:txBody>
+      </p:sp>
+      <p:sp>
+        <p:nvSpPr>
+          <p:cNvPr id="11" name="TextBox 10"/>
+          <p:cNvSpPr txBox="1"/>
+          <p:nvPr/>
+        </p:nvSpPr>
+        <p:spPr>
+          <a:xfrm>
+            <a:off x="822960" y="4425696"/>
+            <a:ext cx="548640" cy="457200"/>
+          </a:xfrm>
+          <a:prstGeom prst="rect">
+            <a:avLst/>
+          </a:prstGeom>
+          <a:noFill/>
+        </p:spPr>
+        <p:txBody>
+          <a:bodyPr wrap="square" anchor="t" lIns="0" rIns="0" tIns="0" bIns="0">
+            <a:spAutoFit/>
+          </a:bodyPr>
+          <a:lstStyle/>
+          <a:p>
+            <a:pPr algn="l">
+              <a:lnSpc>
+                <a:spcPct val="115000"/>
+              </a:lnSpc>
+            </a:pPr>
+            <a:r>
+              <a:rPr sz="1800" b="1" i="0">
+                <a:solidFill>
+                  <a:srgbClr val="FFC53D"/>
+                </a:solidFill>
+                <a:latin typeface="Century Gothic"/>
+              </a:rPr>
+              <a:t>04</a:t>
+            </a:r>
+          </a:p>
+        </p:txBody>
+      </p:sp>
+      <p:sp>
+        <p:nvSpPr>
+          <p:cNvPr id="12" name="TextBox 11"/>
+          <p:cNvSpPr txBox="1"/>
+          <p:nvPr/>
+        </p:nvSpPr>
+        <p:spPr>
+          <a:xfrm>
+            <a:off x="1463040" y="4453128"/>
+            <a:ext cx="9326880" cy="548640"/>
+          </a:xfrm>
+          <a:prstGeom prst="rect">
+            <a:avLst/>
+          </a:prstGeom>
+          <a:noFill/>
+        </p:spPr>
+        <p:txBody>
+          <a:bodyPr wrap="square" anchor="t" lIns="0" rIns="0" tIns="0" bIns="0">
+            <a:spAutoFit/>
+          </a:bodyPr>
+          <a:lstStyle/>
+          <a:p>
+            <a:pPr algn="l">
+              <a:lnSpc>
+                <a:spcPct val="130000"/>
+              </a:lnSpc>
+            </a:pPr>
+            <a:r>
+              <a:rPr sz="1450" b="0" i="0">
+                <a:solidFill>
+                  <a:srgbClr val="E9E6F2"/>
+                </a:solidFill>
+                <a:latin typeface="Calibri"/>
+              </a:rPr>
+              <a:t>Every contract gets at least a basic test — an untested contract is unfinished.</a:t>
+            </a:r>
+          </a:p>
+        </p:txBody>
+      </p:sp>
+      <p:sp>
+        <p:nvSpPr>
+          <p:cNvPr id="13" name="TextBox 12"/>
+          <p:cNvSpPr txBox="1"/>
+          <p:nvPr/>
+        </p:nvSpPr>
+        <p:spPr>
+          <a:xfrm>
+            <a:off x="822960" y="5138928"/>
+            <a:ext cx="548640" cy="457200"/>
+          </a:xfrm>
+          <a:prstGeom prst="rect">
+            <a:avLst/>
+          </a:prstGeom>
+          <a:noFill/>
+        </p:spPr>
+        <p:txBody>
+          <a:bodyPr wrap="square" anchor="t" lIns="0" rIns="0" tIns="0" bIns="0">
+            <a:spAutoFit/>
+          </a:bodyPr>
+          <a:lstStyle/>
+          <a:p>
+            <a:pPr algn="l">
+              <a:lnSpc>
+                <a:spcPct val="115000"/>
+              </a:lnSpc>
+            </a:pPr>
+            <a:r>
+              <a:rPr sz="1800" b="1" i="0">
+                <a:solidFill>
+                  <a:srgbClr val="FFC53D"/>
+                </a:solidFill>
+                <a:latin typeface="Century Gothic"/>
+              </a:rPr>
+              <a:t>05</a:t>
+            </a:r>
+          </a:p>
+        </p:txBody>
+      </p:sp>
+      <p:sp>
+        <p:nvSpPr>
+          <p:cNvPr id="14" name="TextBox 13"/>
+          <p:cNvSpPr txBox="1"/>
+          <p:nvPr/>
+        </p:nvSpPr>
+        <p:spPr>
+          <a:xfrm>
+            <a:off x="1463040" y="5166360"/>
+            <a:ext cx="9326880" cy="548640"/>
+          </a:xfrm>
+          <a:prstGeom prst="rect">
+            <a:avLst/>
+          </a:prstGeom>
+          <a:noFill/>
+        </p:spPr>
+        <p:txBody>
+          <a:bodyPr wrap="square" anchor="t" lIns="0" rIns="0" tIns="0" bIns="0">
+            <a:spAutoFit/>
+          </a:bodyPr>
+          <a:lstStyle/>
+          <a:p>
+            <a:pPr algn="l">
+              <a:lnSpc>
+                <a:spcPct val="130000"/>
+              </a:lnSpc>
+            </a:pPr>
+            <a:r>
+              <a:rPr sz="1450" b="0" i="0">
+                <a:solidFill>
+                  <a:srgbClr val="E9E6F2"/>
+                </a:solidFill>
+                <a:latin typeface="Calibri"/>
+              </a:rPr>
+              <a:t>Treat every external call as a potential attack.</a:t>
+            </a:r>
+          </a:p>
+        </p:txBody>
+      </p:sp>
+      <p:sp>
+        <p:nvSpPr>
+          <p:cNvPr id="15" name="TextBox 14"/>
           <p:cNvSpPr txBox="1"/>
           <p:nvPr/>
         </p:nvSpPr>
@@ -7803,7 +8926,7 @@
                 </a:solidFill>
                 <a:latin typeface="Consolas"/>
               </a:rPr>
-              <a:t>03 / 15</a:t>
+              <a:t>03 / 18</a:t>
             </a:r>
           </a:p>
         </p:txBody>
@@ -7841,7 +8964,7 @@
             <a:avLst/>
           </a:prstGeom>
           <a:solidFill>
-            <a:srgbClr val="F8F6F2"/>
+            <a:srgbClr val="1C1730"/>
           </a:solidFill>
           <a:ln>
             <a:noFill/>
@@ -7870,180 +8993,48 @@
           </a:p>
         </p:txBody>
       </p:sp>
-      <p:sp>
-        <p:nvSpPr>
-          <p:cNvPr id="3" name="TextBox 2"/>
-          <p:cNvSpPr txBox="1"/>
-          <p:nvPr/>
-        </p:nvSpPr>
-        <p:spPr>
-          <a:xfrm>
-            <a:off x="822960" y="640080"/>
-            <a:ext cx="10058400" cy="365760"/>
-          </a:xfrm>
-          <a:prstGeom prst="rect">
-            <a:avLst/>
-          </a:prstGeom>
-          <a:noFill/>
-        </p:spPr>
-        <p:txBody>
-          <a:bodyPr wrap="square" anchor="t" lIns="0" rIns="0" tIns="0" bIns="0">
-            <a:spAutoFit/>
-          </a:bodyPr>
-          <a:lstStyle/>
-          <a:p>
-            <a:pPr algn="l">
-              <a:lnSpc>
-                <a:spcPct val="115000"/>
-              </a:lnSpc>
-            </a:pPr>
-            <a:r>
-              <a:rPr sz="1300" b="1" i="0">
-                <a:solidFill>
-                  <a:srgbClr val="33506A"/>
-                </a:solidFill>
-                <a:latin typeface="Calibri"/>
-              </a:rPr>
-              <a:t>TOPIC 03 — BLOCKS &amp; CHAINS</a:t>
-            </a:r>
-          </a:p>
-        </p:txBody>
-      </p:sp>
-      <p:sp>
-        <p:nvSpPr>
-          <p:cNvPr id="4" name="TextBox 3"/>
-          <p:cNvSpPr txBox="1"/>
-          <p:nvPr/>
-        </p:nvSpPr>
-        <p:spPr>
-          <a:xfrm>
-            <a:off x="8503920" y="640080"/>
-            <a:ext cx="2834640" cy="365760"/>
-          </a:xfrm>
-          <a:prstGeom prst="rect">
-            <a:avLst/>
-          </a:prstGeom>
-          <a:noFill/>
-        </p:spPr>
-        <p:txBody>
-          <a:bodyPr wrap="square" anchor="t" lIns="0" rIns="0" tIns="0" bIns="0">
-            <a:spAutoFit/>
-          </a:bodyPr>
-          <a:lstStyle/>
-          <a:p>
-            <a:pPr algn="r">
-              <a:lnSpc>
-                <a:spcPct val="115000"/>
-              </a:lnSpc>
-            </a:pPr>
-            <a:r>
-              <a:rPr sz="1200" b="1" i="0">
-                <a:solidFill>
-                  <a:srgbClr val="5C576E"/>
-                </a:solidFill>
-                <a:latin typeface="Calibri"/>
-              </a:rPr>
-              <a:t>KEY IDEA 1 / 4</a:t>
-            </a:r>
-          </a:p>
-        </p:txBody>
-      </p:sp>
-      <p:sp>
-        <p:nvSpPr>
-          <p:cNvPr id="5" name="TextBox 4"/>
-          <p:cNvSpPr txBox="1"/>
-          <p:nvPr/>
-        </p:nvSpPr>
-        <p:spPr>
-          <a:xfrm>
-            <a:off x="822960" y="1097280"/>
-            <a:ext cx="9601200" cy="1005840"/>
-          </a:xfrm>
-          <a:prstGeom prst="rect">
-            <a:avLst/>
-          </a:prstGeom>
-          <a:noFill/>
-        </p:spPr>
-        <p:txBody>
-          <a:bodyPr wrap="square" anchor="t" lIns="0" rIns="0" tIns="0" bIns="0">
-            <a:spAutoFit/>
-          </a:bodyPr>
-          <a:lstStyle/>
-          <a:p>
-            <a:pPr algn="l">
-              <a:lnSpc>
-                <a:spcPct val="105000"/>
-              </a:lnSpc>
-            </a:pPr>
-            <a:r>
-              <a:rPr sz="3200" b="1" i="0">
-                <a:solidFill>
-                  <a:srgbClr val="1C1730"/>
-                </a:solidFill>
-                <a:latin typeface="Century Gothic"/>
-              </a:rPr>
-              <a:t>Timestamp &amp; Transactions</a:t>
-            </a:r>
-          </a:p>
-        </p:txBody>
-      </p:sp>
-      <p:sp>
-        <p:nvSpPr>
-          <p:cNvPr id="6" name="TextBox 5"/>
-          <p:cNvSpPr txBox="1"/>
-          <p:nvPr/>
-        </p:nvSpPr>
-        <p:spPr>
-          <a:xfrm>
-            <a:off x="822960" y="2148840"/>
-            <a:ext cx="9875520" cy="2011680"/>
-          </a:xfrm>
-          <a:prstGeom prst="rect">
-            <a:avLst/>
-          </a:prstGeom>
-          <a:noFill/>
-        </p:spPr>
-        <p:txBody>
-          <a:bodyPr wrap="square" anchor="t" lIns="0" rIns="0" tIns="0" bIns="0">
-            <a:spAutoFit/>
-          </a:bodyPr>
-          <a:lstStyle/>
-          <a:p>
-            <a:pPr algn="l">
-              <a:lnSpc>
-                <a:spcPct val="150000"/>
-              </a:lnSpc>
-            </a:pPr>
-            <a:r>
-              <a:rPr sz="1650" b="0" i="0">
-                <a:solidFill>
-                  <a:srgbClr val="1C1730"/>
-                </a:solidFill>
-                <a:latin typeface="Calibri"/>
-              </a:rPr>
-              <a:t>Every block records when it was created, plus the batch of transaction data it holds — Ethereum groups a new batch roughly every 12 seconds.</a:t>
-            </a:r>
-          </a:p>
-        </p:txBody>
-      </p:sp>
-      <p:sp>
-        <p:nvSpPr>
-          <p:cNvPr id="7" name="Rounded Rectangle 6"/>
+      <p:pic>
+        <p:nvPicPr>
+          <p:cNvPr id="3" name="Picture 2" descr="_cover_03.jpg"/>
+          <p:cNvPicPr>
+            <a:picLocks noChangeAspect="1"/>
+          </p:cNvPicPr>
+          <p:nvPr/>
+        </p:nvPicPr>
+        <p:blipFill>
+          <a:blip r:embed="rId2"/>
+          <a:stretch>
+            <a:fillRect/>
+          </a:stretch>
+        </p:blipFill>
+        <p:spPr>
+          <a:xfrm>
+            <a:off x="0" y="0"/>
+            <a:ext cx="12191695" cy="6858000"/>
+          </a:xfrm>
+          <a:prstGeom prst="rect">
+            <a:avLst/>
+          </a:prstGeom>
+        </p:spPr>
+      </p:pic>
+      <p:sp>
+        <p:nvSpPr>
+          <p:cNvPr id="4" name="Rectangle 3"/>
           <p:cNvSpPr/>
           <p:nvPr/>
         </p:nvSpPr>
         <p:spPr>
           <a:xfrm>
-            <a:off x="822960" y="4434840"/>
-            <a:ext cx="10515600" cy="1280160"/>
-          </a:xfrm>
-          <a:prstGeom prst="roundRect">
-            <a:avLst>
-              <a:gd name="adj" fmla="val 6000"/>
-            </a:avLst>
+            <a:off x="0" y="0"/>
+            <a:ext cx="12191695" cy="6858000"/>
+          </a:xfrm>
+          <a:prstGeom prst="rect">
+            <a:avLst/>
           </a:prstGeom>
           <a:solidFill>
-            <a:srgbClr val="EAEDF0"/>
+            <a:srgbClr val="1C1730">
+              <a:alpha val="45000"/>
+            </a:srgbClr>
           </a:solidFill>
           <a:ln>
             <a:noFill/>
@@ -8074,14 +9065,138 @@
       </p:sp>
       <p:sp>
         <p:nvSpPr>
+          <p:cNvPr id="5" name="Rectangle 4"/>
+          <p:cNvSpPr/>
+          <p:nvPr/>
+        </p:nvSpPr>
+        <p:spPr>
+          <a:xfrm>
+            <a:off x="0" y="0"/>
+            <a:ext cx="12191695" cy="6858000"/>
+          </a:xfrm>
+          <a:prstGeom prst="rect">
+            <a:avLst/>
+          </a:prstGeom>
+          <a:solidFill>
+            <a:srgbClr val="33506A">
+              <a:alpha val="35000"/>
+            </a:srgbClr>
+          </a:solidFill>
+          <a:ln>
+            <a:noFill/>
+          </a:ln>
+          <a:effectLst/>
+        </p:spPr>
+        <p:style>
+          <a:lnRef idx="1">
+            <a:schemeClr val="accent1"/>
+          </a:lnRef>
+          <a:fillRef idx="3">
+            <a:schemeClr val="accent1"/>
+          </a:fillRef>
+          <a:effectRef idx="2">
+            <a:schemeClr val="accent1"/>
+          </a:effectRef>
+          <a:fontRef idx="minor">
+            <a:schemeClr val="lt1"/>
+          </a:fontRef>
+        </p:style>
+        <p:txBody>
+          <a:bodyPr rtlCol="0" anchor="ctr"/>
+          <a:lstStyle/>
+          <a:p>
+            <a:pPr algn="ctr"/>
+          </a:p>
+        </p:txBody>
+      </p:sp>
+      <p:sp>
+        <p:nvSpPr>
+          <p:cNvPr id="6" name="TextBox 5"/>
+          <p:cNvSpPr txBox="1"/>
+          <p:nvPr/>
+        </p:nvSpPr>
+        <p:spPr>
+          <a:xfrm>
+            <a:off x="822960" y="502920"/>
+            <a:ext cx="9144000" cy="365760"/>
+          </a:xfrm>
+          <a:prstGeom prst="rect">
+            <a:avLst/>
+          </a:prstGeom>
+          <a:noFill/>
+        </p:spPr>
+        <p:txBody>
+          <a:bodyPr wrap="square" anchor="t" lIns="0" rIns="0" tIns="0" bIns="0">
+            <a:spAutoFit/>
+          </a:bodyPr>
+          <a:lstStyle/>
+          <a:p>
+            <a:pPr algn="l">
+              <a:lnSpc>
+                <a:spcPct val="115000"/>
+              </a:lnSpc>
+            </a:pPr>
+            <a:r>
+              <a:rPr sz="1300" b="1" i="0">
+                <a:solidFill>
+                  <a:srgbClr val="FFC53D"/>
+                </a:solidFill>
+                <a:latin typeface="Calibri"/>
+              </a:rPr>
+              <a:t>BlockchainCourse · Curriculum · Week 01 · Topic 03 of 04</a:t>
+            </a:r>
+          </a:p>
+        </p:txBody>
+      </p:sp>
+      <p:sp>
+        <p:nvSpPr>
+          <p:cNvPr id="7" name="TextBox 6"/>
+          <p:cNvSpPr txBox="1"/>
+          <p:nvPr/>
+        </p:nvSpPr>
+        <p:spPr>
+          <a:xfrm>
+            <a:off x="822960" y="1188720"/>
+            <a:ext cx="5486400" cy="1188720"/>
+          </a:xfrm>
+          <a:prstGeom prst="rect">
+            <a:avLst/>
+          </a:prstGeom>
+          <a:noFill/>
+        </p:spPr>
+        <p:txBody>
+          <a:bodyPr wrap="square" anchor="t" lIns="0" rIns="0" tIns="0" bIns="0">
+            <a:spAutoFit/>
+          </a:bodyPr>
+          <a:lstStyle/>
+          <a:p>
+            <a:pPr algn="l">
+              <a:lnSpc>
+                <a:spcPct val="115000"/>
+              </a:lnSpc>
+            </a:pPr>
+            <a:r>
+              <a:rPr sz="10000" b="1" i="0">
+                <a:solidFill>
+                  <a:srgbClr val="FFFFFF"/>
+                </a:solidFill>
+                <a:latin typeface="Century Gothic"/>
+              </a:rPr>
+              <a:t>03</a:t>
+            </a:r>
+          </a:p>
+        </p:txBody>
+      </p:sp>
+      <p:sp>
+        <p:nvSpPr>
           <p:cNvPr id="8" name="TextBox 7"/>
           <p:cNvSpPr txBox="1"/>
           <p:nvPr/>
         </p:nvSpPr>
         <p:spPr>
           <a:xfrm>
-            <a:off x="1143000" y="4617720"/>
-            <a:ext cx="9875520" cy="320040"/>
+            <a:off x="822960" y="2423160"/>
+            <a:ext cx="8961120" cy="1554480"/>
           </a:xfrm>
           <a:prstGeom prst="rect">
             <a:avLst/>
@@ -8096,63 +9211,334 @@
           <a:p>
             <a:pPr algn="l">
               <a:lnSpc>
+                <a:spcPct val="105000"/>
+              </a:lnSpc>
+            </a:pPr>
+            <a:r>
+              <a:rPr sz="4600" b="1" i="0">
+                <a:solidFill>
+                  <a:srgbClr val="FFFFFF"/>
+                </a:solidFill>
+                <a:latin typeface="Century Gothic"/>
+              </a:rPr>
+              <a:t>Blocks &amp; Chains</a:t>
+            </a:r>
+          </a:p>
+        </p:txBody>
+      </p:sp>
+      <p:sp>
+        <p:nvSpPr>
+          <p:cNvPr id="9" name="TextBox 8"/>
+          <p:cNvSpPr txBox="1"/>
+          <p:nvPr/>
+        </p:nvSpPr>
+        <p:spPr>
+          <a:xfrm>
+            <a:off x="822960" y="4160520"/>
+            <a:ext cx="6858000" cy="1097280"/>
+          </a:xfrm>
+          <a:prstGeom prst="rect">
+            <a:avLst/>
+          </a:prstGeom>
+          <a:noFill/>
+        </p:spPr>
+        <p:txBody>
+          <a:bodyPr wrap="square" anchor="t" lIns="0" rIns="0" tIns="0" bIns="0">
+            <a:spAutoFit/>
+          </a:bodyPr>
+          <a:lstStyle/>
+          <a:p>
+            <a:pPr algn="l">
+              <a:lnSpc>
+                <a:spcPct val="125000"/>
+              </a:lnSpc>
+            </a:pPr>
+            <a:r>
+              <a:rPr sz="1900" b="0" i="0">
+                <a:solidFill>
+                  <a:srgbClr val="FFFFFF"/>
+                </a:solidFill>
+                <a:latin typeface="Calibri"/>
+              </a:rPr>
+              <a:t>Link history together so a single altered link breaks everything after it.</a:t>
+            </a:r>
+          </a:p>
+        </p:txBody>
+      </p:sp>
+      <p:sp>
+        <p:nvSpPr>
+          <p:cNvPr id="10" name="Rounded Rectangle 9"/>
+          <p:cNvSpPr/>
+          <p:nvPr/>
+        </p:nvSpPr>
+        <p:spPr>
+          <a:xfrm>
+            <a:off x="822960" y="5669280"/>
+            <a:ext cx="1100937" cy="402336"/>
+          </a:xfrm>
+          <a:prstGeom prst="roundRect">
+            <a:avLst>
+              <a:gd name="adj" fmla="val 50000"/>
+            </a:avLst>
+          </a:prstGeom>
+          <a:solidFill>
+            <a:srgbClr val="FFFFFF">
+              <a:alpha val="14000"/>
+            </a:srgbClr>
+          </a:solidFill>
+          <a:ln w="9525">
+            <a:solidFill>
+              <a:srgbClr val="FFFFFF"/>
+            </a:solidFill>
+          </a:ln>
+          <a:effectLst/>
+        </p:spPr>
+        <p:style>
+          <a:lnRef idx="1">
+            <a:schemeClr val="accent1"/>
+          </a:lnRef>
+          <a:fillRef idx="3">
+            <a:schemeClr val="accent1"/>
+          </a:fillRef>
+          <a:effectRef idx="2">
+            <a:schemeClr val="accent1"/>
+          </a:effectRef>
+          <a:fontRef idx="minor">
+            <a:schemeClr val="lt1"/>
+          </a:fontRef>
+        </p:style>
+        <p:txBody>
+          <a:bodyPr rtlCol="0" anchor="ctr" lIns="109728" rIns="109728" tIns="18288" bIns="18288" wrap="none"/>
+          <a:lstStyle/>
+          <a:p>
+            <a:pPr algn="ctr"/>
+            <a:r>
+              <a:rPr sz="1100" b="0">
+                <a:solidFill>
+                  <a:srgbClr val="DDD9E8"/>
+                </a:solidFill>
+                <a:latin typeface="Calibri"/>
+              </a:rPr>
+              <a:t>01 · Hashing</a:t>
+            </a:r>
+          </a:p>
+        </p:txBody>
+      </p:sp>
+      <p:sp>
+        <p:nvSpPr>
+          <p:cNvPr id="11" name="Rounded Rectangle 10"/>
+          <p:cNvSpPr/>
+          <p:nvPr/>
+        </p:nvSpPr>
+        <p:spPr>
+          <a:xfrm>
+            <a:off x="2070201" y="5669280"/>
+            <a:ext cx="2022652" cy="402336"/>
+          </a:xfrm>
+          <a:prstGeom prst="roundRect">
+            <a:avLst>
+              <a:gd name="adj" fmla="val 50000"/>
+            </a:avLst>
+          </a:prstGeom>
+          <a:solidFill>
+            <a:srgbClr val="FFFFFF">
+              <a:alpha val="14000"/>
+            </a:srgbClr>
+          </a:solidFill>
+          <a:ln w="9525">
+            <a:solidFill>
+              <a:srgbClr val="FFFFFF"/>
+            </a:solidFill>
+          </a:ln>
+          <a:effectLst/>
+        </p:spPr>
+        <p:style>
+          <a:lnRef idx="1">
+            <a:schemeClr val="accent1"/>
+          </a:lnRef>
+          <a:fillRef idx="3">
+            <a:schemeClr val="accent1"/>
+          </a:fillRef>
+          <a:effectRef idx="2">
+            <a:schemeClr val="accent1"/>
+          </a:effectRef>
+          <a:fontRef idx="minor">
+            <a:schemeClr val="lt1"/>
+          </a:fontRef>
+        </p:style>
+        <p:txBody>
+          <a:bodyPr rtlCol="0" anchor="ctr" lIns="109728" rIns="109728" tIns="18288" bIns="18288" wrap="none"/>
+          <a:lstStyle/>
+          <a:p>
+            <a:pPr algn="ctr"/>
+            <a:r>
+              <a:rPr sz="1100" b="0">
+                <a:solidFill>
+                  <a:srgbClr val="DDD9E8"/>
+                </a:solidFill>
+                <a:latin typeface="Calibri"/>
+              </a:rPr>
+              <a:t>02 · Public / Private Keys</a:t>
+            </a:r>
+          </a:p>
+        </p:txBody>
+      </p:sp>
+      <p:sp>
+        <p:nvSpPr>
+          <p:cNvPr id="12" name="Rounded Rectangle 11"/>
+          <p:cNvSpPr/>
+          <p:nvPr/>
+        </p:nvSpPr>
+        <p:spPr>
+          <a:xfrm>
+            <a:off x="4239157" y="5669280"/>
+            <a:ext cx="1627632" cy="402336"/>
+          </a:xfrm>
+          <a:prstGeom prst="roundRect">
+            <a:avLst>
+              <a:gd name="adj" fmla="val 50000"/>
+            </a:avLst>
+          </a:prstGeom>
+          <a:solidFill>
+            <a:srgbClr val="33506A"/>
+          </a:solidFill>
+          <a:ln>
+            <a:noFill/>
+          </a:ln>
+          <a:effectLst/>
+        </p:spPr>
+        <p:style>
+          <a:lnRef idx="1">
+            <a:schemeClr val="accent1"/>
+          </a:lnRef>
+          <a:fillRef idx="3">
+            <a:schemeClr val="accent1"/>
+          </a:fillRef>
+          <a:effectRef idx="2">
+            <a:schemeClr val="accent1"/>
+          </a:effectRef>
+          <a:fontRef idx="minor">
+            <a:schemeClr val="lt1"/>
+          </a:fontRef>
+        </p:style>
+        <p:txBody>
+          <a:bodyPr rtlCol="0" anchor="ctr" lIns="109728" rIns="109728" tIns="18288" bIns="18288" wrap="none"/>
+          <a:lstStyle/>
+          <a:p>
+            <a:pPr algn="ctr"/>
+            <a:r>
+              <a:rPr sz="1100" b="1">
+                <a:solidFill>
+                  <a:srgbClr val="FFFFFF"/>
+                </a:solidFill>
+                <a:latin typeface="Calibri"/>
+              </a:rPr>
+              <a:t>03 · Blocks &amp; Chains</a:t>
+            </a:r>
+          </a:p>
+        </p:txBody>
+      </p:sp>
+      <p:sp>
+        <p:nvSpPr>
+          <p:cNvPr id="13" name="Rounded Rectangle 12"/>
+          <p:cNvSpPr/>
+          <p:nvPr/>
+        </p:nvSpPr>
+        <p:spPr>
+          <a:xfrm>
+            <a:off x="6013093" y="5669280"/>
+            <a:ext cx="1232611" cy="402336"/>
+          </a:xfrm>
+          <a:prstGeom prst="roundRect">
+            <a:avLst>
+              <a:gd name="adj" fmla="val 50000"/>
+            </a:avLst>
+          </a:prstGeom>
+          <a:solidFill>
+            <a:srgbClr val="FFFFFF">
+              <a:alpha val="14000"/>
+            </a:srgbClr>
+          </a:solidFill>
+          <a:ln w="9525">
+            <a:solidFill>
+              <a:srgbClr val="FFFFFF"/>
+            </a:solidFill>
+          </a:ln>
+          <a:effectLst/>
+        </p:spPr>
+        <p:style>
+          <a:lnRef idx="1">
+            <a:schemeClr val="accent1"/>
+          </a:lnRef>
+          <a:fillRef idx="3">
+            <a:schemeClr val="accent1"/>
+          </a:fillRef>
+          <a:effectRef idx="2">
+            <a:schemeClr val="accent1"/>
+          </a:effectRef>
+          <a:fontRef idx="minor">
+            <a:schemeClr val="lt1"/>
+          </a:fontRef>
+        </p:style>
+        <p:txBody>
+          <a:bodyPr rtlCol="0" anchor="ctr" lIns="109728" rIns="109728" tIns="18288" bIns="18288" wrap="none"/>
+          <a:lstStyle/>
+          <a:p>
+            <a:pPr algn="ctr"/>
+            <a:r>
+              <a:rPr sz="1100" b="0">
+                <a:solidFill>
+                  <a:srgbClr val="DDD9E8"/>
+                </a:solidFill>
+                <a:latin typeface="Calibri"/>
+              </a:rPr>
+              <a:t>04 · Consensus</a:t>
+            </a:r>
+          </a:p>
+        </p:txBody>
+      </p:sp>
+      <p:sp>
+        <p:nvSpPr>
+          <p:cNvPr id="14" name="TextBox 13"/>
+          <p:cNvSpPr txBox="1"/>
+          <p:nvPr/>
+        </p:nvSpPr>
+        <p:spPr>
+          <a:xfrm>
+            <a:off x="822960" y="6446520"/>
+            <a:ext cx="8229600" cy="320040"/>
+          </a:xfrm>
+          <a:prstGeom prst="rect">
+            <a:avLst/>
+          </a:prstGeom>
+          <a:noFill/>
+        </p:spPr>
+        <p:txBody>
+          <a:bodyPr wrap="square" anchor="t" lIns="0" rIns="0" tIns="0" bIns="0">
+            <a:spAutoFit/>
+          </a:bodyPr>
+          <a:lstStyle/>
+          <a:p>
+            <a:pPr algn="l">
+              <a:lnSpc>
                 <a:spcPct val="115000"/>
               </a:lnSpc>
             </a:pPr>
             <a:r>
-              <a:rPr sz="1100" b="1" i="0">
-                <a:solidFill>
-                  <a:srgbClr val="33506A"/>
+              <a:rPr sz="1000" b="0" i="0">
+                <a:solidFill>
+                  <a:srgbClr val="E9E6F2"/>
                 </a:solidFill>
                 <a:latin typeface="Calibri"/>
               </a:rPr>
-              <a:t>EXAMPLE</a:t>
-            </a:r>
-          </a:p>
-        </p:txBody>
-      </p:sp>
-      <p:sp>
-        <p:nvSpPr>
-          <p:cNvPr id="9" name="TextBox 8"/>
-          <p:cNvSpPr txBox="1"/>
-          <p:nvPr/>
-        </p:nvSpPr>
-        <p:spPr>
-          <a:xfrm>
-            <a:off x="1143000" y="4956048"/>
-            <a:ext cx="9875520" cy="640080"/>
-          </a:xfrm>
-          <a:prstGeom prst="rect">
-            <a:avLst/>
-          </a:prstGeom>
-          <a:noFill/>
-        </p:spPr>
-        <p:txBody>
-          <a:bodyPr wrap="square" anchor="t" lIns="0" rIns="0" tIns="0" bIns="0">
-            <a:spAutoFit/>
-          </a:bodyPr>
-          <a:lstStyle/>
-          <a:p>
-            <a:pPr algn="l">
-              <a:lnSpc>
-                <a:spcPct val="130000"/>
-              </a:lnSpc>
-            </a:pPr>
-            <a:r>
-              <a:rPr sz="1400" b="0" i="0">
-                <a:solidFill>
-                  <a:srgbClr val="1C1730"/>
-                </a:solidFill>
-                <a:latin typeface="Consolas"/>
-              </a:rPr>
-              <a:t>One block ≈ hundreds of transactions, bundled together.</a:t>
-            </a:r>
-          </a:p>
-        </p:txBody>
-      </p:sp>
-      <p:sp>
-        <p:nvSpPr>
-          <p:cNvPr id="10" name="TextBox 9"/>
+              <a:t>Photo: Petritap / Wikimedia Commons, CC BY-SA 3.0</a:t>
+            </a:r>
+          </a:p>
+        </p:txBody>
+      </p:sp>
+      <p:sp>
+        <p:nvSpPr>
+          <p:cNvPr id="15" name="TextBox 14"/>
           <p:cNvSpPr txBox="1"/>
           <p:nvPr/>
         </p:nvSpPr>
@@ -8184,7 +9570,7 @@
                 </a:solidFill>
                 <a:latin typeface="Consolas"/>
               </a:rPr>
-              <a:t>04 / 15</a:t>
+              <a:t>04 / 18</a:t>
             </a:r>
           </a:p>
         </p:txBody>
@@ -8298,21 +9684,99 @@
         </p:nvSpPr>
         <p:spPr>
           <a:xfrm>
-            <a:off x="8503920" y="640080"/>
-            <a:ext cx="2834640" cy="365760"/>
-          </a:xfrm>
-          <a:prstGeom prst="rect">
-            <a:avLst/>
-          </a:prstGeom>
-          <a:noFill/>
-        </p:spPr>
-        <p:txBody>
-          <a:bodyPr wrap="square" anchor="t" lIns="0" rIns="0" tIns="0" bIns="0">
-            <a:spAutoFit/>
-          </a:bodyPr>
-          <a:lstStyle/>
-          <a:p>
-            <a:pPr algn="r">
+            <a:off x="822960" y="1051560"/>
+            <a:ext cx="9601200" cy="1005840"/>
+          </a:xfrm>
+          <a:prstGeom prst="rect">
+            <a:avLst/>
+          </a:prstGeom>
+          <a:noFill/>
+        </p:spPr>
+        <p:txBody>
+          <a:bodyPr wrap="square" anchor="t" lIns="0" rIns="0" tIns="0" bIns="0">
+            <a:spAutoFit/>
+          </a:bodyPr>
+          <a:lstStyle/>
+          <a:p>
+            <a:pPr algn="l">
+              <a:lnSpc>
+                <a:spcPct val="105000"/>
+              </a:lnSpc>
+            </a:pPr>
+            <a:r>
+              <a:rPr sz="3200" b="1" i="0">
+                <a:solidFill>
+                  <a:srgbClr val="1C1730"/>
+                </a:solidFill>
+                <a:latin typeface="Century Gothic"/>
+              </a:rPr>
+              <a:t>Why This Matters</a:t>
+            </a:r>
+          </a:p>
+        </p:txBody>
+      </p:sp>
+      <p:sp>
+        <p:nvSpPr>
+          <p:cNvPr id="5" name="TextBox 4"/>
+          <p:cNvSpPr txBox="1"/>
+          <p:nvPr/>
+        </p:nvSpPr>
+        <p:spPr>
+          <a:xfrm>
+            <a:off x="822960" y="1965960"/>
+            <a:ext cx="9875520" cy="1463040"/>
+          </a:xfrm>
+          <a:prstGeom prst="rect">
+            <a:avLst/>
+          </a:prstGeom>
+          <a:noFill/>
+        </p:spPr>
+        <p:txBody>
+          <a:bodyPr wrap="square" anchor="t" lIns="0" rIns="0" tIns="0" bIns="0">
+            <a:spAutoFit/>
+          </a:bodyPr>
+          <a:lstStyle/>
+          <a:p>
+            <a:pPr algn="l">
+              <a:lnSpc>
+                <a:spcPct val="140000"/>
+              </a:lnSpc>
+            </a:pPr>
+            <a:r>
+              <a:rPr sz="1600" b="0" i="0">
+                <a:solidFill>
+                  <a:srgbClr val="5C576E"/>
+                </a:solidFill>
+                <a:latin typeface="Calibri"/>
+              </a:rPr>
+              <a:t>You now have tamper-evidence (hashing) and authorization (signing). This section shows how thousands of signed, hashed transactions get organized into the actual structure that gives "blockchain" its name.</a:t>
+            </a:r>
+          </a:p>
+        </p:txBody>
+      </p:sp>
+      <p:sp>
+        <p:nvSpPr>
+          <p:cNvPr id="6" name="TextBox 5"/>
+          <p:cNvSpPr txBox="1"/>
+          <p:nvPr/>
+        </p:nvSpPr>
+        <p:spPr>
+          <a:xfrm>
+            <a:off x="822960" y="3657600"/>
+            <a:ext cx="9875520" cy="365760"/>
+          </a:xfrm>
+          <a:prstGeom prst="rect">
+            <a:avLst/>
+          </a:prstGeom>
+          <a:noFill/>
+        </p:spPr>
+        <p:txBody>
+          <a:bodyPr wrap="square" anchor="t" lIns="0" rIns="0" tIns="0" bIns="0">
+            <a:spAutoFit/>
+          </a:bodyPr>
+          <a:lstStyle/>
+          <a:p>
+            <a:pPr algn="l">
               <a:lnSpc>
                 <a:spcPct val="115000"/>
               </a:lnSpc>
@@ -8320,111 +9784,31 @@
             <a:r>
               <a:rPr sz="1200" b="1" i="0">
                 <a:solidFill>
-                  <a:srgbClr val="5C576E"/>
+                  <a:srgbClr val="33506A"/>
                 </a:solidFill>
                 <a:latin typeface="Calibri"/>
               </a:rPr>
-              <a:t>KEY IDEA 2 / 4</a:t>
-            </a:r>
-          </a:p>
-        </p:txBody>
-      </p:sp>
-      <p:sp>
-        <p:nvSpPr>
-          <p:cNvPr id="5" name="TextBox 4"/>
-          <p:cNvSpPr txBox="1"/>
-          <p:nvPr/>
-        </p:nvSpPr>
-        <p:spPr>
-          <a:xfrm>
-            <a:off x="822960" y="1097280"/>
-            <a:ext cx="9601200" cy="1005840"/>
-          </a:xfrm>
-          <a:prstGeom prst="rect">
-            <a:avLst/>
-          </a:prstGeom>
-          <a:noFill/>
-        </p:spPr>
-        <p:txBody>
-          <a:bodyPr wrap="square" anchor="t" lIns="0" rIns="0" tIns="0" bIns="0">
-            <a:spAutoFit/>
-          </a:bodyPr>
-          <a:lstStyle/>
-          <a:p>
-            <a:pPr algn="l">
-              <a:lnSpc>
-                <a:spcPct val="105000"/>
-              </a:lnSpc>
-            </a:pPr>
-            <a:r>
-              <a:rPr sz="3200" b="1" i="0">
-                <a:solidFill>
-                  <a:srgbClr val="1C1730"/>
-                </a:solidFill>
-                <a:latin typeface="Century Gothic"/>
-              </a:rPr>
-              <a:t>Previous Hash</a:t>
-            </a:r>
-          </a:p>
-        </p:txBody>
-      </p:sp>
-      <p:sp>
-        <p:nvSpPr>
-          <p:cNvPr id="6" name="TextBox 5"/>
-          <p:cNvSpPr txBox="1"/>
-          <p:nvPr/>
-        </p:nvSpPr>
-        <p:spPr>
-          <a:xfrm>
-            <a:off x="822960" y="2148840"/>
-            <a:ext cx="9875520" cy="2011680"/>
-          </a:xfrm>
-          <a:prstGeom prst="rect">
-            <a:avLst/>
-          </a:prstGeom>
-          <a:noFill/>
-        </p:spPr>
-        <p:txBody>
-          <a:bodyPr wrap="square" anchor="t" lIns="0" rIns="0" tIns="0" bIns="0">
-            <a:spAutoFit/>
-          </a:bodyPr>
-          <a:lstStyle/>
-          <a:p>
-            <a:pPr algn="l">
-              <a:lnSpc>
-                <a:spcPct val="150000"/>
-              </a:lnSpc>
-            </a:pPr>
-            <a:r>
-              <a:rPr sz="1650" b="0" i="0">
-                <a:solidFill>
-                  <a:srgbClr val="1C1730"/>
-                </a:solidFill>
-                <a:latin typeface="Calibri"/>
-              </a:rPr>
-              <a:t>The literal link to the block directly before it. This single field is what makes it a "chain" at all, rather than just a list of unconnected blocks.</a:t>
-            </a:r>
-          </a:p>
-        </p:txBody>
-      </p:sp>
-      <p:sp>
-        <p:nvSpPr>
-          <p:cNvPr id="7" name="Rounded Rectangle 6"/>
+              <a:t>WHAT THIS SECTION COVERS</a:t>
+            </a:r>
+          </a:p>
+        </p:txBody>
+      </p:sp>
+      <p:sp>
+        <p:nvSpPr>
+          <p:cNvPr id="7" name="Rectangle 6"/>
           <p:cNvSpPr/>
           <p:nvPr/>
         </p:nvSpPr>
         <p:spPr>
           <a:xfrm>
-            <a:off x="822960" y="4434840"/>
-            <a:ext cx="10515600" cy="1280160"/>
-          </a:xfrm>
-          <a:prstGeom prst="roundRect">
-            <a:avLst>
-              <a:gd name="adj" fmla="val 6000"/>
-            </a:avLst>
+            <a:off x="822960" y="4197096"/>
+            <a:ext cx="82296" cy="82296"/>
+          </a:xfrm>
+          <a:prstGeom prst="rect">
+            <a:avLst/>
           </a:prstGeom>
           <a:solidFill>
-            <a:srgbClr val="EAEDF0"/>
+            <a:srgbClr val="33506A"/>
           </a:solidFill>
           <a:ln>
             <a:noFill/>
@@ -8461,8 +9845,8 @@
         </p:nvSpPr>
         <p:spPr>
           <a:xfrm>
-            <a:off x="1143000" y="4617720"/>
-            <a:ext cx="9875520" cy="320040"/>
+            <a:off x="1051560" y="4114800"/>
+            <a:ext cx="4709160" cy="365760"/>
           </a:xfrm>
           <a:prstGeom prst="rect">
             <a:avLst/>
@@ -8481,27 +9865,71 @@
               </a:lnSpc>
             </a:pPr>
             <a:r>
-              <a:rPr sz="1100" b="1" i="0">
-                <a:solidFill>
-                  <a:srgbClr val="33506A"/>
+              <a:rPr sz="1350" b="0" i="0">
+                <a:solidFill>
+                  <a:srgbClr val="1C1730"/>
                 </a:solidFill>
                 <a:latin typeface="Calibri"/>
               </a:rPr>
-              <a:t>EXAMPLE</a:t>
-            </a:r>
-          </a:p>
-        </p:txBody>
-      </p:sp>
-      <p:sp>
-        <p:nvSpPr>
-          <p:cNvPr id="9" name="TextBox 8"/>
-          <p:cNvSpPr txBox="1"/>
-          <p:nvPr/>
-        </p:nvSpPr>
-        <p:spPr>
-          <a:xfrm>
-            <a:off x="1143000" y="4956048"/>
-            <a:ext cx="9875520" cy="640080"/>
+              <a:t>Core concept</a:t>
+            </a:r>
+          </a:p>
+        </p:txBody>
+      </p:sp>
+      <p:sp>
+        <p:nvSpPr>
+          <p:cNvPr id="9" name="Rectangle 8"/>
+          <p:cNvSpPr/>
+          <p:nvPr/>
+        </p:nvSpPr>
+        <p:spPr>
+          <a:xfrm>
+            <a:off x="6035040" y="4197096"/>
+            <a:ext cx="82296" cy="82296"/>
+          </a:xfrm>
+          <a:prstGeom prst="rect">
+            <a:avLst/>
+          </a:prstGeom>
+          <a:solidFill>
+            <a:srgbClr val="33506A"/>
+          </a:solidFill>
+          <a:ln>
+            <a:noFill/>
+          </a:ln>
+          <a:effectLst/>
+        </p:spPr>
+        <p:style>
+          <a:lnRef idx="1">
+            <a:schemeClr val="accent1"/>
+          </a:lnRef>
+          <a:fillRef idx="3">
+            <a:schemeClr val="accent1"/>
+          </a:fillRef>
+          <a:effectRef idx="2">
+            <a:schemeClr val="accent1"/>
+          </a:effectRef>
+          <a:fontRef idx="minor">
+            <a:schemeClr val="lt1"/>
+          </a:fontRef>
+        </p:style>
+        <p:txBody>
+          <a:bodyPr rtlCol="0" anchor="ctr"/>
+          <a:lstStyle/>
+          <a:p>
+            <a:pPr algn="ctr"/>
+          </a:p>
+        </p:txBody>
+      </p:sp>
+      <p:sp>
+        <p:nvSpPr>
+          <p:cNvPr id="10" name="TextBox 9"/>
+          <p:cNvSpPr txBox="1"/>
+          <p:nvPr/>
+        </p:nvSpPr>
+        <p:spPr>
+          <a:xfrm>
+            <a:off x="6263640" y="4114800"/>
+            <a:ext cx="4709160" cy="365760"/>
           </a:xfrm>
           <a:prstGeom prst="rect">
             <a:avLst/>
@@ -8516,24 +9944,605 @@
           <a:p>
             <a:pPr algn="l">
               <a:lnSpc>
-                <a:spcPct val="130000"/>
-              </a:lnSpc>
-            </a:pPr>
-            <a:r>
-              <a:rPr sz="1400" b="0" i="0">
+                <a:spcPct val="115000"/>
+              </a:lnSpc>
+            </a:pPr>
+            <a:r>
+              <a:rPr sz="1350" b="0" i="0">
                 <a:solidFill>
                   <a:srgbClr val="1C1730"/>
                 </a:solidFill>
-                <a:latin typeface="Consolas"/>
-              </a:rPr>
-              <a:t>Block #101's data includes: prevHash = hash(Block #100)</a:t>
-            </a:r>
-          </a:p>
-        </p:txBody>
-      </p:sp>
-      <p:sp>
-        <p:nvSpPr>
-          <p:cNvPr id="10" name="TextBox 9"/>
+                <a:latin typeface="Calibri"/>
+              </a:rPr>
+              <a:t>Four key ideas, one at a time</a:t>
+            </a:r>
+          </a:p>
+        </p:txBody>
+      </p:sp>
+      <p:sp>
+        <p:nvSpPr>
+          <p:cNvPr id="11" name="Rectangle 10"/>
+          <p:cNvSpPr/>
+          <p:nvPr/>
+        </p:nvSpPr>
+        <p:spPr>
+          <a:xfrm>
+            <a:off x="822960" y="4654296"/>
+            <a:ext cx="82296" cy="82296"/>
+          </a:xfrm>
+          <a:prstGeom prst="rect">
+            <a:avLst/>
+          </a:prstGeom>
+          <a:solidFill>
+            <a:srgbClr val="33506A"/>
+          </a:solidFill>
+          <a:ln>
+            <a:noFill/>
+          </a:ln>
+          <a:effectLst/>
+        </p:spPr>
+        <p:style>
+          <a:lnRef idx="1">
+            <a:schemeClr val="accent1"/>
+          </a:lnRef>
+          <a:fillRef idx="3">
+            <a:schemeClr val="accent1"/>
+          </a:fillRef>
+          <a:effectRef idx="2">
+            <a:schemeClr val="accent1"/>
+          </a:effectRef>
+          <a:fontRef idx="minor">
+            <a:schemeClr val="lt1"/>
+          </a:fontRef>
+        </p:style>
+        <p:txBody>
+          <a:bodyPr rtlCol="0" anchor="ctr"/>
+          <a:lstStyle/>
+          <a:p>
+            <a:pPr algn="ctr"/>
+          </a:p>
+        </p:txBody>
+      </p:sp>
+      <p:sp>
+        <p:nvSpPr>
+          <p:cNvPr id="12" name="TextBox 11"/>
+          <p:cNvSpPr txBox="1"/>
+          <p:nvPr/>
+        </p:nvSpPr>
+        <p:spPr>
+          <a:xfrm>
+            <a:off x="1051560" y="4572000"/>
+            <a:ext cx="4709160" cy="365760"/>
+          </a:xfrm>
+          <a:prstGeom prst="rect">
+            <a:avLst/>
+          </a:prstGeom>
+          <a:noFill/>
+        </p:spPr>
+        <p:txBody>
+          <a:bodyPr wrap="square" anchor="t" lIns="0" rIns="0" tIns="0" bIns="0">
+            <a:spAutoFit/>
+          </a:bodyPr>
+          <a:lstStyle/>
+          <a:p>
+            <a:pPr algn="l">
+              <a:lnSpc>
+                <a:spcPct val="115000"/>
+              </a:lnSpc>
+            </a:pPr>
+            <a:r>
+              <a:rPr sz="1350" b="0" i="0">
+                <a:solidFill>
+                  <a:srgbClr val="1C1730"/>
+                </a:solidFill>
+                <a:latin typeface="Calibri"/>
+              </a:rPr>
+              <a:t>A real, reproducible worked example</a:t>
+            </a:r>
+          </a:p>
+        </p:txBody>
+      </p:sp>
+      <p:sp>
+        <p:nvSpPr>
+          <p:cNvPr id="13" name="Rectangle 12"/>
+          <p:cNvSpPr/>
+          <p:nvPr/>
+        </p:nvSpPr>
+        <p:spPr>
+          <a:xfrm>
+            <a:off x="6035040" y="4654296"/>
+            <a:ext cx="82296" cy="82296"/>
+          </a:xfrm>
+          <a:prstGeom prst="rect">
+            <a:avLst/>
+          </a:prstGeom>
+          <a:solidFill>
+            <a:srgbClr val="33506A"/>
+          </a:solidFill>
+          <a:ln>
+            <a:noFill/>
+          </a:ln>
+          <a:effectLst/>
+        </p:spPr>
+        <p:style>
+          <a:lnRef idx="1">
+            <a:schemeClr val="accent1"/>
+          </a:lnRef>
+          <a:fillRef idx="3">
+            <a:schemeClr val="accent1"/>
+          </a:fillRef>
+          <a:effectRef idx="2">
+            <a:schemeClr val="accent1"/>
+          </a:effectRef>
+          <a:fontRef idx="minor">
+            <a:schemeClr val="lt1"/>
+          </a:fontRef>
+        </p:style>
+        <p:txBody>
+          <a:bodyPr rtlCol="0" anchor="ctr"/>
+          <a:lstStyle/>
+          <a:p>
+            <a:pPr algn="ctr"/>
+          </a:p>
+        </p:txBody>
+      </p:sp>
+      <p:sp>
+        <p:nvSpPr>
+          <p:cNvPr id="14" name="TextBox 13"/>
+          <p:cNvSpPr txBox="1"/>
+          <p:nvPr/>
+        </p:nvSpPr>
+        <p:spPr>
+          <a:xfrm>
+            <a:off x="6263640" y="4572000"/>
+            <a:ext cx="4709160" cy="365760"/>
+          </a:xfrm>
+          <a:prstGeom prst="rect">
+            <a:avLst/>
+          </a:prstGeom>
+          <a:noFill/>
+        </p:spPr>
+        <p:txBody>
+          <a:bodyPr wrap="square" anchor="t" lIns="0" rIns="0" tIns="0" bIns="0">
+            <a:spAutoFit/>
+          </a:bodyPr>
+          <a:lstStyle/>
+          <a:p>
+            <a:pPr algn="l">
+              <a:lnSpc>
+                <a:spcPct val="115000"/>
+              </a:lnSpc>
+            </a:pPr>
+            <a:r>
+              <a:rPr sz="1350" b="0" i="0">
+                <a:solidFill>
+                  <a:srgbClr val="1C1730"/>
+                </a:solidFill>
+                <a:latin typeface="Calibri"/>
+              </a:rPr>
+              <a:t>Real-world uses beyond blockchain</a:t>
+            </a:r>
+          </a:p>
+        </p:txBody>
+      </p:sp>
+      <p:sp>
+        <p:nvSpPr>
+          <p:cNvPr id="15" name="Rectangle 14"/>
+          <p:cNvSpPr/>
+          <p:nvPr/>
+        </p:nvSpPr>
+        <p:spPr>
+          <a:xfrm>
+            <a:off x="822960" y="5111496"/>
+            <a:ext cx="82296" cy="82296"/>
+          </a:xfrm>
+          <a:prstGeom prst="rect">
+            <a:avLst/>
+          </a:prstGeom>
+          <a:solidFill>
+            <a:srgbClr val="33506A"/>
+          </a:solidFill>
+          <a:ln>
+            <a:noFill/>
+          </a:ln>
+          <a:effectLst/>
+        </p:spPr>
+        <p:style>
+          <a:lnRef idx="1">
+            <a:schemeClr val="accent1"/>
+          </a:lnRef>
+          <a:fillRef idx="3">
+            <a:schemeClr val="accent1"/>
+          </a:fillRef>
+          <a:effectRef idx="2">
+            <a:schemeClr val="accent1"/>
+          </a:effectRef>
+          <a:fontRef idx="minor">
+            <a:schemeClr val="lt1"/>
+          </a:fontRef>
+        </p:style>
+        <p:txBody>
+          <a:bodyPr rtlCol="0" anchor="ctr"/>
+          <a:lstStyle/>
+          <a:p>
+            <a:pPr algn="ctr"/>
+          </a:p>
+        </p:txBody>
+      </p:sp>
+      <p:sp>
+        <p:nvSpPr>
+          <p:cNvPr id="16" name="TextBox 15"/>
+          <p:cNvSpPr txBox="1"/>
+          <p:nvPr/>
+        </p:nvSpPr>
+        <p:spPr>
+          <a:xfrm>
+            <a:off x="1051560" y="5029200"/>
+            <a:ext cx="4709160" cy="365760"/>
+          </a:xfrm>
+          <a:prstGeom prst="rect">
+            <a:avLst/>
+          </a:prstGeom>
+          <a:noFill/>
+        </p:spPr>
+        <p:txBody>
+          <a:bodyPr wrap="square" anchor="t" lIns="0" rIns="0" tIns="0" bIns="0">
+            <a:spAutoFit/>
+          </a:bodyPr>
+          <a:lstStyle/>
+          <a:p>
+            <a:pPr algn="l">
+              <a:lnSpc>
+                <a:spcPct val="115000"/>
+              </a:lnSpc>
+            </a:pPr>
+            <a:r>
+              <a:rPr sz="1350" b="0" i="0">
+                <a:solidFill>
+                  <a:srgbClr val="1C1730"/>
+                </a:solidFill>
+                <a:latin typeface="Calibri"/>
+              </a:rPr>
+              <a:t>A flagship case study</a:t>
+            </a:r>
+          </a:p>
+        </p:txBody>
+      </p:sp>
+      <p:sp>
+        <p:nvSpPr>
+          <p:cNvPr id="17" name="Rectangle 16"/>
+          <p:cNvSpPr/>
+          <p:nvPr/>
+        </p:nvSpPr>
+        <p:spPr>
+          <a:xfrm>
+            <a:off x="6035040" y="5111496"/>
+            <a:ext cx="82296" cy="82296"/>
+          </a:xfrm>
+          <a:prstGeom prst="rect">
+            <a:avLst/>
+          </a:prstGeom>
+          <a:solidFill>
+            <a:srgbClr val="33506A"/>
+          </a:solidFill>
+          <a:ln>
+            <a:noFill/>
+          </a:ln>
+          <a:effectLst/>
+        </p:spPr>
+        <p:style>
+          <a:lnRef idx="1">
+            <a:schemeClr val="accent1"/>
+          </a:lnRef>
+          <a:fillRef idx="3">
+            <a:schemeClr val="accent1"/>
+          </a:fillRef>
+          <a:effectRef idx="2">
+            <a:schemeClr val="accent1"/>
+          </a:effectRef>
+          <a:fontRef idx="minor">
+            <a:schemeClr val="lt1"/>
+          </a:fontRef>
+        </p:style>
+        <p:txBody>
+          <a:bodyPr rtlCol="0" anchor="ctr"/>
+          <a:lstStyle/>
+          <a:p>
+            <a:pPr algn="ctr"/>
+          </a:p>
+        </p:txBody>
+      </p:sp>
+      <p:sp>
+        <p:nvSpPr>
+          <p:cNvPr id="18" name="TextBox 17"/>
+          <p:cNvSpPr txBox="1"/>
+          <p:nvPr/>
+        </p:nvSpPr>
+        <p:spPr>
+          <a:xfrm>
+            <a:off x="6263640" y="5029200"/>
+            <a:ext cx="4709160" cy="365760"/>
+          </a:xfrm>
+          <a:prstGeom prst="rect">
+            <a:avLst/>
+          </a:prstGeom>
+          <a:noFill/>
+        </p:spPr>
+        <p:txBody>
+          <a:bodyPr wrap="square" anchor="t" lIns="0" rIns="0" tIns="0" bIns="0">
+            <a:spAutoFit/>
+          </a:bodyPr>
+          <a:lstStyle/>
+          <a:p>
+            <a:pPr algn="l">
+              <a:lnSpc>
+                <a:spcPct val="115000"/>
+              </a:lnSpc>
+            </a:pPr>
+            <a:r>
+              <a:rPr sz="1350" b="0" i="0">
+                <a:solidFill>
+                  <a:srgbClr val="1C1730"/>
+                </a:solidFill>
+                <a:latin typeface="Calibri"/>
+              </a:rPr>
+              <a:t>A real-life analogy</a:t>
+            </a:r>
+          </a:p>
+        </p:txBody>
+      </p:sp>
+      <p:sp>
+        <p:nvSpPr>
+          <p:cNvPr id="19" name="Rectangle 18"/>
+          <p:cNvSpPr/>
+          <p:nvPr/>
+        </p:nvSpPr>
+        <p:spPr>
+          <a:xfrm>
+            <a:off x="822960" y="5568696"/>
+            <a:ext cx="82296" cy="82296"/>
+          </a:xfrm>
+          <a:prstGeom prst="rect">
+            <a:avLst/>
+          </a:prstGeom>
+          <a:solidFill>
+            <a:srgbClr val="33506A"/>
+          </a:solidFill>
+          <a:ln>
+            <a:noFill/>
+          </a:ln>
+          <a:effectLst/>
+        </p:spPr>
+        <p:style>
+          <a:lnRef idx="1">
+            <a:schemeClr val="accent1"/>
+          </a:lnRef>
+          <a:fillRef idx="3">
+            <a:schemeClr val="accent1"/>
+          </a:fillRef>
+          <a:effectRef idx="2">
+            <a:schemeClr val="accent1"/>
+          </a:effectRef>
+          <a:fontRef idx="minor">
+            <a:schemeClr val="lt1"/>
+          </a:fontRef>
+        </p:style>
+        <p:txBody>
+          <a:bodyPr rtlCol="0" anchor="ctr"/>
+          <a:lstStyle/>
+          <a:p>
+            <a:pPr algn="ctr"/>
+          </a:p>
+        </p:txBody>
+      </p:sp>
+      <p:sp>
+        <p:nvSpPr>
+          <p:cNvPr id="20" name="TextBox 19"/>
+          <p:cNvSpPr txBox="1"/>
+          <p:nvPr/>
+        </p:nvSpPr>
+        <p:spPr>
+          <a:xfrm>
+            <a:off x="1051560" y="5486400"/>
+            <a:ext cx="4709160" cy="365760"/>
+          </a:xfrm>
+          <a:prstGeom prst="rect">
+            <a:avLst/>
+          </a:prstGeom>
+          <a:noFill/>
+        </p:spPr>
+        <p:txBody>
+          <a:bodyPr wrap="square" anchor="t" lIns="0" rIns="0" tIns="0" bIns="0">
+            <a:spAutoFit/>
+          </a:bodyPr>
+          <a:lstStyle/>
+          <a:p>
+            <a:pPr algn="l">
+              <a:lnSpc>
+                <a:spcPct val="115000"/>
+              </a:lnSpc>
+            </a:pPr>
+            <a:r>
+              <a:rPr sz="1350" b="0" i="0">
+                <a:solidFill>
+                  <a:srgbClr val="1C1730"/>
+                </a:solidFill>
+                <a:latin typeface="Calibri"/>
+              </a:rPr>
+              <a:t>Common misconceptions</a:t>
+            </a:r>
+          </a:p>
+        </p:txBody>
+      </p:sp>
+      <p:sp>
+        <p:nvSpPr>
+          <p:cNvPr id="21" name="Rectangle 20"/>
+          <p:cNvSpPr/>
+          <p:nvPr/>
+        </p:nvSpPr>
+        <p:spPr>
+          <a:xfrm>
+            <a:off x="6035040" y="5568696"/>
+            <a:ext cx="82296" cy="82296"/>
+          </a:xfrm>
+          <a:prstGeom prst="rect">
+            <a:avLst/>
+          </a:prstGeom>
+          <a:solidFill>
+            <a:srgbClr val="33506A"/>
+          </a:solidFill>
+          <a:ln>
+            <a:noFill/>
+          </a:ln>
+          <a:effectLst/>
+        </p:spPr>
+        <p:style>
+          <a:lnRef idx="1">
+            <a:schemeClr val="accent1"/>
+          </a:lnRef>
+          <a:fillRef idx="3">
+            <a:schemeClr val="accent1"/>
+          </a:fillRef>
+          <a:effectRef idx="2">
+            <a:schemeClr val="accent1"/>
+          </a:effectRef>
+          <a:fontRef idx="minor">
+            <a:schemeClr val="lt1"/>
+          </a:fontRef>
+        </p:style>
+        <p:txBody>
+          <a:bodyPr rtlCol="0" anchor="ctr"/>
+          <a:lstStyle/>
+          <a:p>
+            <a:pPr algn="ctr"/>
+          </a:p>
+        </p:txBody>
+      </p:sp>
+      <p:sp>
+        <p:nvSpPr>
+          <p:cNvPr id="22" name="TextBox 21"/>
+          <p:cNvSpPr txBox="1"/>
+          <p:nvPr/>
+        </p:nvSpPr>
+        <p:spPr>
+          <a:xfrm>
+            <a:off x="6263640" y="5486400"/>
+            <a:ext cx="4709160" cy="365760"/>
+          </a:xfrm>
+          <a:prstGeom prst="rect">
+            <a:avLst/>
+          </a:prstGeom>
+          <a:noFill/>
+        </p:spPr>
+        <p:txBody>
+          <a:bodyPr wrap="square" anchor="t" lIns="0" rIns="0" tIns="0" bIns="0">
+            <a:spAutoFit/>
+          </a:bodyPr>
+          <a:lstStyle/>
+          <a:p>
+            <a:pPr algn="l">
+              <a:lnSpc>
+                <a:spcPct val="115000"/>
+              </a:lnSpc>
+            </a:pPr>
+            <a:r>
+              <a:rPr sz="1350" b="0" i="0">
+                <a:solidFill>
+                  <a:srgbClr val="1C1730"/>
+                </a:solidFill>
+                <a:latin typeface="Calibri"/>
+              </a:rPr>
+              <a:t>Hands-on practice</a:t>
+            </a:r>
+          </a:p>
+        </p:txBody>
+      </p:sp>
+      <p:sp>
+        <p:nvSpPr>
+          <p:cNvPr id="23" name="Rectangle 22"/>
+          <p:cNvSpPr/>
+          <p:nvPr/>
+        </p:nvSpPr>
+        <p:spPr>
+          <a:xfrm>
+            <a:off x="822960" y="6025896"/>
+            <a:ext cx="82296" cy="82296"/>
+          </a:xfrm>
+          <a:prstGeom prst="rect">
+            <a:avLst/>
+          </a:prstGeom>
+          <a:solidFill>
+            <a:srgbClr val="33506A"/>
+          </a:solidFill>
+          <a:ln>
+            <a:noFill/>
+          </a:ln>
+          <a:effectLst/>
+        </p:spPr>
+        <p:style>
+          <a:lnRef idx="1">
+            <a:schemeClr val="accent1"/>
+          </a:lnRef>
+          <a:fillRef idx="3">
+            <a:schemeClr val="accent1"/>
+          </a:fillRef>
+          <a:effectRef idx="2">
+            <a:schemeClr val="accent1"/>
+          </a:effectRef>
+          <a:fontRef idx="minor">
+            <a:schemeClr val="lt1"/>
+          </a:fontRef>
+        </p:style>
+        <p:txBody>
+          <a:bodyPr rtlCol="0" anchor="ctr"/>
+          <a:lstStyle/>
+          <a:p>
+            <a:pPr algn="ctr"/>
+          </a:p>
+        </p:txBody>
+      </p:sp>
+      <p:sp>
+        <p:nvSpPr>
+          <p:cNvPr id="24" name="TextBox 23"/>
+          <p:cNvSpPr txBox="1"/>
+          <p:nvPr/>
+        </p:nvSpPr>
+        <p:spPr>
+          <a:xfrm>
+            <a:off x="1051560" y="5943600"/>
+            <a:ext cx="4709160" cy="365760"/>
+          </a:xfrm>
+          <a:prstGeom prst="rect">
+            <a:avLst/>
+          </a:prstGeom>
+          <a:noFill/>
+        </p:spPr>
+        <p:txBody>
+          <a:bodyPr wrap="square" anchor="t" lIns="0" rIns="0" tIns="0" bIns="0">
+            <a:spAutoFit/>
+          </a:bodyPr>
+          <a:lstStyle/>
+          <a:p>
+            <a:pPr algn="l">
+              <a:lnSpc>
+                <a:spcPct val="115000"/>
+              </a:lnSpc>
+            </a:pPr>
+            <a:r>
+              <a:rPr sz="1350" b="0" i="0">
+                <a:solidFill>
+                  <a:srgbClr val="1C1730"/>
+                </a:solidFill>
+                <a:latin typeface="Calibri"/>
+              </a:rPr>
+              <a:t>Take-home assignment</a:t>
+            </a:r>
+          </a:p>
+        </p:txBody>
+      </p:sp>
+      <p:sp>
+        <p:nvSpPr>
+          <p:cNvPr id="25" name="TextBox 24"/>
           <p:cNvSpPr txBox="1"/>
           <p:nvPr/>
         </p:nvSpPr>
@@ -8565,7 +10574,7 @@
                 </a:solidFill>
                 <a:latin typeface="Consolas"/>
               </a:rPr>
-              <a:t>05 / 15</a:t>
+              <a:t>05 / 18</a:t>
             </a:r>
           </a:p>
         </p:txBody>
@@ -8679,45 +10688,6 @@
         </p:nvSpPr>
         <p:spPr>
           <a:xfrm>
-            <a:off x="8503920" y="640080"/>
-            <a:ext cx="2834640" cy="365760"/>
-          </a:xfrm>
-          <a:prstGeom prst="rect">
-            <a:avLst/>
-          </a:prstGeom>
-          <a:noFill/>
-        </p:spPr>
-        <p:txBody>
-          <a:bodyPr wrap="square" anchor="t" lIns="0" rIns="0" tIns="0" bIns="0">
-            <a:spAutoFit/>
-          </a:bodyPr>
-          <a:lstStyle/>
-          <a:p>
-            <a:pPr algn="r">
-              <a:lnSpc>
-                <a:spcPct val="115000"/>
-              </a:lnSpc>
-            </a:pPr>
-            <a:r>
-              <a:rPr sz="1200" b="1" i="0">
-                <a:solidFill>
-                  <a:srgbClr val="5C576E"/>
-                </a:solidFill>
-                <a:latin typeface="Calibri"/>
-              </a:rPr>
-              <a:t>KEY IDEA 3 / 4</a:t>
-            </a:r>
-          </a:p>
-        </p:txBody>
-      </p:sp>
-      <p:sp>
-        <p:nvSpPr>
-          <p:cNvPr id="5" name="TextBox 4"/>
-          <p:cNvSpPr txBox="1"/>
-          <p:nvPr/>
-        </p:nvSpPr>
-        <p:spPr>
-          <a:xfrm>
             <a:off x="822960" y="1097280"/>
             <a:ext cx="9601200" cy="1005840"/>
           </a:xfrm>
@@ -8738,74 +10708,35 @@
               </a:lnSpc>
             </a:pPr>
             <a:r>
-              <a:rPr sz="3200" b="1" i="0">
+              <a:rPr sz="3400" b="1" i="0">
                 <a:solidFill>
                   <a:srgbClr val="1C1730"/>
                 </a:solidFill>
                 <a:latin typeface="Century Gothic"/>
               </a:rPr>
-              <a:t>Own Hash</a:t>
-            </a:r>
-          </a:p>
-        </p:txBody>
-      </p:sp>
-      <p:sp>
-        <p:nvSpPr>
-          <p:cNvPr id="6" name="TextBox 5"/>
-          <p:cNvSpPr txBox="1"/>
-          <p:nvPr/>
-        </p:nvSpPr>
-        <p:spPr>
-          <a:xfrm>
-            <a:off x="822960" y="2148840"/>
-            <a:ext cx="9875520" cy="2011680"/>
-          </a:xfrm>
-          <a:prstGeom prst="rect">
-            <a:avLst/>
-          </a:prstGeom>
-          <a:noFill/>
-        </p:spPr>
-        <p:txBody>
-          <a:bodyPr wrap="square" anchor="t" lIns="0" rIns="0" tIns="0" bIns="0">
-            <a:spAutoFit/>
-          </a:bodyPr>
-          <a:lstStyle/>
-          <a:p>
-            <a:pPr algn="l">
-              <a:lnSpc>
-                <a:spcPct val="150000"/>
-              </a:lnSpc>
-            </a:pPr>
-            <a:r>
-              <a:rPr sz="1650" b="0" i="0">
-                <a:solidFill>
-                  <a:srgbClr val="1C1730"/>
-                </a:solidFill>
-                <a:latin typeface="Calibri"/>
-              </a:rPr>
-              <a:t>Computed from everything inside the block — including the previous hash. This is where the avalanche effect from Topic 01 creates the domino effect that makes tampering detectable.</a:t>
-            </a:r>
-          </a:p>
-        </p:txBody>
-      </p:sp>
-      <p:sp>
-        <p:nvSpPr>
-          <p:cNvPr id="7" name="Rounded Rectangle 6"/>
+              <a:t>The Core Concept</a:t>
+            </a:r>
+          </a:p>
+        </p:txBody>
+      </p:sp>
+      <p:sp>
+        <p:nvSpPr>
+          <p:cNvPr id="5" name="Rounded Rectangle 4"/>
           <p:cNvSpPr/>
           <p:nvPr/>
         </p:nvSpPr>
         <p:spPr>
           <a:xfrm>
-            <a:off x="822960" y="4434840"/>
-            <a:ext cx="10515600" cy="1280160"/>
+            <a:off x="822960" y="2286000"/>
+            <a:ext cx="10515600" cy="3291840"/>
           </a:xfrm>
           <a:prstGeom prst="roundRect">
             <a:avLst>
-              <a:gd name="adj" fmla="val 6000"/>
+              <a:gd name="adj" fmla="val 4000"/>
             </a:avLst>
           </a:prstGeom>
           <a:solidFill>
-            <a:srgbClr val="EAEDF0"/>
+            <a:srgbClr val="FFFFFF"/>
           </a:solidFill>
           <a:ln>
             <a:noFill/>
@@ -8836,85 +10767,90 @@
       </p:sp>
       <p:sp>
         <p:nvSpPr>
+          <p:cNvPr id="6" name="Rectangle 5"/>
+          <p:cNvSpPr/>
+          <p:nvPr/>
+        </p:nvSpPr>
+        <p:spPr>
+          <a:xfrm>
+            <a:off x="822960" y="2286000"/>
+            <a:ext cx="91440" cy="3291840"/>
+          </a:xfrm>
+          <a:prstGeom prst="rect">
+            <a:avLst/>
+          </a:prstGeom>
+          <a:solidFill>
+            <a:srgbClr val="33506A"/>
+          </a:solidFill>
+          <a:ln>
+            <a:noFill/>
+          </a:ln>
+          <a:effectLst/>
+        </p:spPr>
+        <p:style>
+          <a:lnRef idx="1">
+            <a:schemeClr val="accent1"/>
+          </a:lnRef>
+          <a:fillRef idx="3">
+            <a:schemeClr val="accent1"/>
+          </a:fillRef>
+          <a:effectRef idx="2">
+            <a:schemeClr val="accent1"/>
+          </a:effectRef>
+          <a:fontRef idx="minor">
+            <a:schemeClr val="lt1"/>
+          </a:fontRef>
+        </p:style>
+        <p:txBody>
+          <a:bodyPr rtlCol="0" anchor="ctr"/>
+          <a:lstStyle/>
+          <a:p>
+            <a:pPr algn="ctr"/>
+          </a:p>
+        </p:txBody>
+      </p:sp>
+      <p:sp>
+        <p:nvSpPr>
+          <p:cNvPr id="7" name="TextBox 6"/>
+          <p:cNvSpPr txBox="1"/>
+          <p:nvPr/>
+        </p:nvSpPr>
+        <p:spPr>
+          <a:xfrm>
+            <a:off x="1280160" y="2697480"/>
+            <a:ext cx="9601200" cy="2560320"/>
+          </a:xfrm>
+          <a:prstGeom prst="rect">
+            <a:avLst/>
+          </a:prstGeom>
+          <a:noFill/>
+        </p:spPr>
+        <p:txBody>
+          <a:bodyPr wrap="square" anchor="t" lIns="0" rIns="0" tIns="0" bIns="0">
+            <a:spAutoFit/>
+          </a:bodyPr>
+          <a:lstStyle/>
+          <a:p>
+            <a:pPr algn="l">
+              <a:lnSpc>
+                <a:spcPct val="155000"/>
+              </a:lnSpc>
+            </a:pPr>
+            <a:r>
+              <a:rPr sz="2000" b="0" i="0">
+                <a:solidFill>
+                  <a:srgbClr val="1C1730"/>
+                </a:solidFill>
+                <a:latin typeface="Calibri"/>
+              </a:rPr>
+              <a:t>A block is a batch of transactions plus metadata — critically, the hash of the block before it. Because of the avalanche effect from Topic 01, editing an old block changes its hash, which breaks every block chained after it. That domino effect is the entire trick.</a:t>
+            </a:r>
+          </a:p>
+        </p:txBody>
+      </p:sp>
+      <p:sp>
+        <p:nvSpPr>
           <p:cNvPr id="8" name="TextBox 7"/>
-          <p:cNvSpPr txBox="1"/>
-          <p:nvPr/>
-        </p:nvSpPr>
-        <p:spPr>
-          <a:xfrm>
-            <a:off x="1143000" y="4617720"/>
-            <a:ext cx="9875520" cy="320040"/>
-          </a:xfrm>
-          <a:prstGeom prst="rect">
-            <a:avLst/>
-          </a:prstGeom>
-          <a:noFill/>
-        </p:spPr>
-        <p:txBody>
-          <a:bodyPr wrap="square" anchor="t" lIns="0" rIns="0" tIns="0" bIns="0">
-            <a:spAutoFit/>
-          </a:bodyPr>
-          <a:lstStyle/>
-          <a:p>
-            <a:pPr algn="l">
-              <a:lnSpc>
-                <a:spcPct val="115000"/>
-              </a:lnSpc>
-            </a:pPr>
-            <a:r>
-              <a:rPr sz="1100" b="1" i="0">
-                <a:solidFill>
-                  <a:srgbClr val="33506A"/>
-                </a:solidFill>
-                <a:latin typeface="Calibri"/>
-              </a:rPr>
-              <a:t>EXAMPLE</a:t>
-            </a:r>
-          </a:p>
-        </p:txBody>
-      </p:sp>
-      <p:sp>
-        <p:nvSpPr>
-          <p:cNvPr id="9" name="TextBox 8"/>
-          <p:cNvSpPr txBox="1"/>
-          <p:nvPr/>
-        </p:nvSpPr>
-        <p:spPr>
-          <a:xfrm>
-            <a:off x="1143000" y="4956048"/>
-            <a:ext cx="9875520" cy="640080"/>
-          </a:xfrm>
-          <a:prstGeom prst="rect">
-            <a:avLst/>
-          </a:prstGeom>
-          <a:noFill/>
-        </p:spPr>
-        <p:txBody>
-          <a:bodyPr wrap="square" anchor="t" lIns="0" rIns="0" tIns="0" bIns="0">
-            <a:spAutoFit/>
-          </a:bodyPr>
-          <a:lstStyle/>
-          <a:p>
-            <a:pPr algn="l">
-              <a:lnSpc>
-                <a:spcPct val="130000"/>
-              </a:lnSpc>
-            </a:pPr>
-            <a:r>
-              <a:rPr sz="1400" b="0" i="0">
-                <a:solidFill>
-                  <a:srgbClr val="1C1730"/>
-                </a:solidFill>
-                <a:latin typeface="Consolas"/>
-              </a:rPr>
-              <a:t>hash(Block #100) = hash(transactions + prevHash + timestamp)</a:t>
-            </a:r>
-          </a:p>
-        </p:txBody>
-      </p:sp>
-      <p:sp>
-        <p:nvSpPr>
-          <p:cNvPr id="10" name="TextBox 9"/>
           <p:cNvSpPr txBox="1"/>
           <p:nvPr/>
         </p:nvSpPr>
@@ -8946,7 +10882,7 @@
                 </a:solidFill>
                 <a:latin typeface="Consolas"/>
               </a:rPr>
-              <a:t>06 / 15</a:t>
+              <a:t>06 / 18</a:t>
             </a:r>
           </a:p>
         </p:txBody>
@@ -9086,7 +11022,7 @@
                 </a:solidFill>
                 <a:latin typeface="Calibri"/>
               </a:rPr>
-              <a:t>KEY IDEA 4 / 4</a:t>
+              <a:t>KEY IDEA 1 / 4</a:t>
             </a:r>
           </a:p>
         </p:txBody>
@@ -9125,7 +11061,7 @@
                 </a:solidFill>
                 <a:latin typeface="Century Gothic"/>
               </a:rPr>
-              <a:t>Confirmations</a:t>
+              <a:t>Timestamp &amp; Transactions</a:t>
             </a:r>
           </a:p>
         </p:txBody>
@@ -9164,7 +11100,7 @@
                 </a:solidFill>
                 <a:latin typeface="Calibri"/>
               </a:rPr>
-              <a:t>The more blocks get built on top of a given block, the more expensive and difficult it becomes to rewrite it — this is exactly what "number of confirmations" means in practice on a block explorer.</a:t>
+              <a:t>Every block records when it was created, plus the batch of transaction data it holds — Ethereum groups a new batch roughly every 12 seconds.</a:t>
             </a:r>
           </a:p>
         </p:txBody>
@@ -9288,7 +11224,7 @@
                 </a:solidFill>
                 <a:latin typeface="Consolas"/>
               </a:rPr>
-              <a:t>6 confirmations = 6 blocks now depend on this one being correct.</a:t>
+              <a:t>One block ≈ hundreds of transactions, bundled together.</a:t>
             </a:r>
           </a:p>
         </p:txBody>
@@ -9327,7 +11263,7 @@
                 </a:solidFill>
                 <a:latin typeface="Consolas"/>
               </a:rPr>
-              <a:t>07 / 15</a:t>
+              <a:t>07 / 18</a:t>
             </a:r>
           </a:p>
         </p:txBody>
@@ -9428,7 +11364,7 @@
                 </a:solidFill>
                 <a:latin typeface="Calibri"/>
               </a:rPr>
-              <a:t>WORKED EXAMPLE — PART 1</a:t>
+              <a:t>TOPIC 03 — BLOCKS &amp; CHAINS</a:t>
             </a:r>
           </a:p>
         </p:txBody>
@@ -9441,8 +11377,47 @@
         </p:nvSpPr>
         <p:spPr>
           <a:xfrm>
-            <a:off x="822960" y="1051560"/>
-            <a:ext cx="10332720" cy="1005840"/>
+            <a:off x="8503920" y="640080"/>
+            <a:ext cx="2834640" cy="365760"/>
+          </a:xfrm>
+          <a:prstGeom prst="rect">
+            <a:avLst/>
+          </a:prstGeom>
+          <a:noFill/>
+        </p:spPr>
+        <p:txBody>
+          <a:bodyPr wrap="square" anchor="t" lIns="0" rIns="0" tIns="0" bIns="0">
+            <a:spAutoFit/>
+          </a:bodyPr>
+          <a:lstStyle/>
+          <a:p>
+            <a:pPr algn="r">
+              <a:lnSpc>
+                <a:spcPct val="115000"/>
+              </a:lnSpc>
+            </a:pPr>
+            <a:r>
+              <a:rPr sz="1200" b="1" i="0">
+                <a:solidFill>
+                  <a:srgbClr val="5C576E"/>
+                </a:solidFill>
+                <a:latin typeface="Calibri"/>
+              </a:rPr>
+              <a:t>KEY IDEA 2 / 4</a:t>
+            </a:r>
+          </a:p>
+        </p:txBody>
+      </p:sp>
+      <p:sp>
+        <p:nvSpPr>
+          <p:cNvPr id="5" name="TextBox 4"/>
+          <p:cNvSpPr txBox="1"/>
+          <p:nvPr/>
+        </p:nvSpPr>
+        <p:spPr>
+          <a:xfrm>
+            <a:off x="822960" y="1097280"/>
+            <a:ext cx="9601200" cy="1005840"/>
           </a:xfrm>
           <a:prstGeom prst="rect">
             <a:avLst/>
@@ -9461,35 +11436,74 @@
               </a:lnSpc>
             </a:pPr>
             <a:r>
-              <a:rPr sz="2700" b="1" i="0">
+              <a:rPr sz="3200" b="1" i="0">
                 <a:solidFill>
                   <a:srgbClr val="1C1730"/>
                 </a:solidFill>
                 <a:latin typeface="Century Gothic"/>
               </a:rPr>
-              <a:t>A Real, Runnable 3-Block Chain — And A Real Tampering Attempt</a:t>
-            </a:r>
-          </a:p>
-        </p:txBody>
-      </p:sp>
-      <p:sp>
-        <p:nvSpPr>
-          <p:cNvPr id="5" name="Rounded Rectangle 4"/>
+              <a:t>Previous Hash</a:t>
+            </a:r>
+          </a:p>
+        </p:txBody>
+      </p:sp>
+      <p:sp>
+        <p:nvSpPr>
+          <p:cNvPr id="6" name="TextBox 5"/>
+          <p:cNvSpPr txBox="1"/>
+          <p:nvPr/>
+        </p:nvSpPr>
+        <p:spPr>
+          <a:xfrm>
+            <a:off x="822960" y="2148840"/>
+            <a:ext cx="9875520" cy="2011680"/>
+          </a:xfrm>
+          <a:prstGeom prst="rect">
+            <a:avLst/>
+          </a:prstGeom>
+          <a:noFill/>
+        </p:spPr>
+        <p:txBody>
+          <a:bodyPr wrap="square" anchor="t" lIns="0" rIns="0" tIns="0" bIns="0">
+            <a:spAutoFit/>
+          </a:bodyPr>
+          <a:lstStyle/>
+          <a:p>
+            <a:pPr algn="l">
+              <a:lnSpc>
+                <a:spcPct val="150000"/>
+              </a:lnSpc>
+            </a:pPr>
+            <a:r>
+              <a:rPr sz="1650" b="0" i="0">
+                <a:solidFill>
+                  <a:srgbClr val="1C1730"/>
+                </a:solidFill>
+                <a:latin typeface="Calibri"/>
+              </a:rPr>
+              <a:t>The literal link to the block directly before it. This single field is what makes it a "chain" at all, rather than just a list of unconnected blocks.</a:t>
+            </a:r>
+          </a:p>
+        </p:txBody>
+      </p:sp>
+      <p:sp>
+        <p:nvSpPr>
+          <p:cNvPr id="7" name="Rounded Rectangle 6"/>
           <p:cNvSpPr/>
           <p:nvPr/>
         </p:nvSpPr>
         <p:spPr>
           <a:xfrm>
-            <a:off x="822960" y="1965960"/>
-            <a:ext cx="10515600" cy="3840480"/>
+            <a:off x="822960" y="4434840"/>
+            <a:ext cx="10515600" cy="1280160"/>
           </a:xfrm>
           <a:prstGeom prst="roundRect">
             <a:avLst>
-              <a:gd name="adj" fmla="val 4500"/>
+              <a:gd name="adj" fmla="val 6000"/>
             </a:avLst>
           </a:prstGeom>
           <a:solidFill>
-            <a:srgbClr val="141026"/>
+            <a:srgbClr val="EAEDF0"/>
           </a:solidFill>
           <a:ln>
             <a:noFill/>
@@ -9520,133 +11534,40 @@
       </p:sp>
       <p:sp>
         <p:nvSpPr>
-          <p:cNvPr id="6" name="Oval 5"/>
-          <p:cNvSpPr/>
-          <p:nvPr/>
-        </p:nvSpPr>
-        <p:spPr>
-          <a:xfrm>
-            <a:off x="1024128" y="2130552"/>
-            <a:ext cx="109728" cy="109728"/>
-          </a:xfrm>
-          <a:prstGeom prst="ellipse">
-            <a:avLst/>
-          </a:prstGeom>
-          <a:solidFill>
-            <a:srgbClr val="FF6459"/>
-          </a:solidFill>
-          <a:ln>
-            <a:noFill/>
-          </a:ln>
-          <a:effectLst/>
-        </p:spPr>
-        <p:style>
-          <a:lnRef idx="1">
-            <a:schemeClr val="accent1"/>
-          </a:lnRef>
-          <a:fillRef idx="3">
-            <a:schemeClr val="accent1"/>
-          </a:fillRef>
-          <a:effectRef idx="2">
-            <a:schemeClr val="accent1"/>
-          </a:effectRef>
-          <a:fontRef idx="minor">
-            <a:schemeClr val="lt1"/>
-          </a:fontRef>
-        </p:style>
-        <p:txBody>
-          <a:bodyPr rtlCol="0" anchor="ctr"/>
-          <a:lstStyle/>
-          <a:p>
-            <a:pPr algn="ctr"/>
-          </a:p>
-        </p:txBody>
-      </p:sp>
-      <p:sp>
-        <p:nvSpPr>
-          <p:cNvPr id="7" name="Oval 6"/>
-          <p:cNvSpPr/>
-          <p:nvPr/>
-        </p:nvSpPr>
-        <p:spPr>
-          <a:xfrm>
-            <a:off x="1225296" y="2130552"/>
-            <a:ext cx="109728" cy="109728"/>
-          </a:xfrm>
-          <a:prstGeom prst="ellipse">
-            <a:avLst/>
-          </a:prstGeom>
-          <a:solidFill>
-            <a:srgbClr val="FFC02E"/>
-          </a:solidFill>
-          <a:ln>
-            <a:noFill/>
-          </a:ln>
-          <a:effectLst/>
-        </p:spPr>
-        <p:style>
-          <a:lnRef idx="1">
-            <a:schemeClr val="accent1"/>
-          </a:lnRef>
-          <a:fillRef idx="3">
-            <a:schemeClr val="accent1"/>
-          </a:fillRef>
-          <a:effectRef idx="2">
-            <a:schemeClr val="accent1"/>
-          </a:effectRef>
-          <a:fontRef idx="minor">
-            <a:schemeClr val="lt1"/>
-          </a:fontRef>
-        </p:style>
-        <p:txBody>
-          <a:bodyPr rtlCol="0" anchor="ctr"/>
-          <a:lstStyle/>
-          <a:p>
-            <a:pPr algn="ctr"/>
-          </a:p>
-        </p:txBody>
-      </p:sp>
-      <p:sp>
-        <p:nvSpPr>
-          <p:cNvPr id="8" name="Oval 7"/>
-          <p:cNvSpPr/>
-          <p:nvPr/>
-        </p:nvSpPr>
-        <p:spPr>
-          <a:xfrm>
-            <a:off x="1426464" y="2130552"/>
-            <a:ext cx="109728" cy="109728"/>
-          </a:xfrm>
-          <a:prstGeom prst="ellipse">
-            <a:avLst/>
-          </a:prstGeom>
-          <a:solidFill>
-            <a:srgbClr val="28C93F"/>
-          </a:solidFill>
-          <a:ln>
-            <a:noFill/>
-          </a:ln>
-          <a:effectLst/>
-        </p:spPr>
-        <p:style>
-          <a:lnRef idx="1">
-            <a:schemeClr val="accent1"/>
-          </a:lnRef>
-          <a:fillRef idx="3">
-            <a:schemeClr val="accent1"/>
-          </a:fillRef>
-          <a:effectRef idx="2">
-            <a:schemeClr val="accent1"/>
-          </a:effectRef>
-          <a:fontRef idx="minor">
-            <a:schemeClr val="lt1"/>
-          </a:fontRef>
-        </p:style>
-        <p:txBody>
-          <a:bodyPr rtlCol="0" anchor="ctr"/>
-          <a:lstStyle/>
-          <a:p>
-            <a:pPr algn="ctr"/>
+          <p:cNvPr id="8" name="TextBox 7"/>
+          <p:cNvSpPr txBox="1"/>
+          <p:nvPr/>
+        </p:nvSpPr>
+        <p:spPr>
+          <a:xfrm>
+            <a:off x="1143000" y="4617720"/>
+            <a:ext cx="9875520" cy="320040"/>
+          </a:xfrm>
+          <a:prstGeom prst="rect">
+            <a:avLst/>
+          </a:prstGeom>
+          <a:noFill/>
+        </p:spPr>
+        <p:txBody>
+          <a:bodyPr wrap="square" anchor="t" lIns="0" rIns="0" tIns="0" bIns="0">
+            <a:spAutoFit/>
+          </a:bodyPr>
+          <a:lstStyle/>
+          <a:p>
+            <a:pPr algn="l">
+              <a:lnSpc>
+                <a:spcPct val="115000"/>
+              </a:lnSpc>
+            </a:pPr>
+            <a:r>
+              <a:rPr sz="1100" b="1" i="0">
+                <a:solidFill>
+                  <a:srgbClr val="33506A"/>
+                </a:solidFill>
+                <a:latin typeface="Calibri"/>
+              </a:rPr>
+              <a:t>EXAMPLE</a:t>
+            </a:r>
           </a:p>
         </p:txBody>
       </p:sp>
@@ -9658,8 +11579,8 @@
         </p:nvSpPr>
         <p:spPr>
           <a:xfrm>
-            <a:off x="1078992" y="2350008"/>
-            <a:ext cx="10003536" cy="3273552"/>
+            <a:off x="1143000" y="4956048"/>
+            <a:ext cx="9875520" cy="640080"/>
           </a:xfrm>
           <a:prstGeom prst="rect">
             <a:avLst/>
@@ -9674,154 +11595,17 @@
           <a:p>
             <a:pPr algn="l">
               <a:lnSpc>
-                <a:spcPct val="135000"/>
-              </a:lnSpc>
-            </a:pPr>
-            <a:r>
-              <a:rPr sz="1350" b="0">
-                <a:solidFill>
-                  <a:srgbClr val="8B84AD"/>
+                <a:spcPct val="130000"/>
+              </a:lnSpc>
+            </a:pPr>
+            <a:r>
+              <a:rPr sz="1400" b="0" i="0">
+                <a:solidFill>
+                  <a:srgbClr val="1C1730"/>
                 </a:solidFill>
                 <a:latin typeface="Consolas"/>
               </a:rPr>
-              <a:t># attacker edits Block 2's data after the fact:</a:t>
-            </a:r>
-          </a:p>
-          <a:p>
-            <a:pPr algn="l">
-              <a:lnSpc>
-                <a:spcPct val="135000"/>
-              </a:lnSpc>
-            </a:pPr>
-            <a:r>
-              <a:rPr sz="1350" b="0">
-                <a:solidFill>
-                  <a:srgbClr val="EDE9F7"/>
-                </a:solidFill>
-                <a:latin typeface="Consolas"/>
-              </a:rPr>
-              <a:t>Block 2 ORIGINAL hash:</a:t>
-            </a:r>
-          </a:p>
-          <a:p>
-            <a:pPr algn="l">
-              <a:lnSpc>
-                <a:spcPct val="135000"/>
-              </a:lnSpc>
-            </a:pPr>
-            <a:r>
-              <a:rPr sz="1350" b="0">
-                <a:solidFill>
-                  <a:srgbClr val="7FE0C4"/>
-                </a:solidFill>
-                <a:latin typeface="Consolas"/>
-              </a:rPr>
-              <a:t>7dd7f6149021fd741a6b1cf5ef626f386a2d8c0cfa68de41c75f29f3b824623f</a:t>
-            </a:r>
-          </a:p>
-          <a:p>
-            <a:pPr algn="l">
-              <a:lnSpc>
-                <a:spcPct val="135000"/>
-              </a:lnSpc>
-            </a:pPr>
-            <a:r>
-              <a:rPr sz="1350" b="0">
-                <a:solidFill>
-                  <a:srgbClr val="EDE9F7"/>
-                </a:solidFill>
-                <a:latin typeface="Consolas"/>
-              </a:rPr>
-              <a:t>Block 3 still expects prev =</a:t>
-            </a:r>
-          </a:p>
-          <a:p>
-            <a:pPr algn="l">
-              <a:lnSpc>
-                <a:spcPct val="135000"/>
-              </a:lnSpc>
-            </a:pPr>
-            <a:r>
-              <a:rPr sz="1350" b="0">
-                <a:solidFill>
-                  <a:srgbClr val="7FE0C4"/>
-                </a:solidFill>
-                <a:latin typeface="Consolas"/>
-              </a:rPr>
-              <a:t>7dd7f6149021fd741a6b1cf5ef626f386a2d8c0cfa68de41c75f29f3b824623f</a:t>
-            </a:r>
-          </a:p>
-          <a:p>
-            <a:pPr algn="l">
-              <a:lnSpc>
-                <a:spcPct val="135000"/>
-              </a:lnSpc>
-            </a:pPr>
-            <a:r>
-              <a:rPr sz="1350" b="0">
-                <a:solidFill>
-                  <a:srgbClr val="EDE9F7"/>
-                </a:solidFill>
-                <a:latin typeface="Consolas"/>
-              </a:rPr>
-              <a:t/>
-            </a:r>
-          </a:p>
-          <a:p>
-            <a:pPr algn="l">
-              <a:lnSpc>
-                <a:spcPct val="135000"/>
-              </a:lnSpc>
-            </a:pPr>
-            <a:r>
-              <a:rPr sz="1350" b="0">
-                <a:solidFill>
-                  <a:srgbClr val="EDE9F7"/>
-                </a:solidFill>
-                <a:latin typeface="Consolas"/>
-              </a:rPr>
-              <a:t>Block 2 hash AFTER the edit:</a:t>
-            </a:r>
-          </a:p>
-          <a:p>
-            <a:pPr algn="l">
-              <a:lnSpc>
-                <a:spcPct val="135000"/>
-              </a:lnSpc>
-            </a:pPr>
-            <a:r>
-              <a:rPr sz="1350" b="0">
-                <a:solidFill>
-                  <a:srgbClr val="FF8E7D"/>
-                </a:solidFill>
-                <a:latin typeface="Consolas"/>
-              </a:rPr>
-              <a:t>6c7db182ce1b8061543e98d0549c337486a15d1bb8ff7a675ccc681b59e5a216</a:t>
-            </a:r>
-          </a:p>
-          <a:p>
-            <a:pPr algn="l">
-              <a:lnSpc>
-                <a:spcPct val="135000"/>
-              </a:lnSpc>
-            </a:pPr>
-            <a:r>
-              <a:rPr sz="1350" b="0">
-                <a:solidFill>
-                  <a:srgbClr val="EDE9F7"/>
-                </a:solidFill>
-                <a:latin typeface="Consolas"/>
-              </a:rPr>
-              <a:t>Match? </a:t>
-            </a:r>
-            <a:r>
-              <a:rPr sz="1350" b="1">
-                <a:solidFill>
-                  <a:srgbClr val="FF8E7D"/>
-                </a:solidFill>
-                <a:latin typeface="Consolas"/>
-              </a:rPr>
-              <a:t>False</a:t>
+              <a:t>Block #101's data includes: prevHash = hash(Block #100)</a:t>
             </a:r>
           </a:p>
         </p:txBody>
@@ -9829,45 +11613,6 @@
       <p:sp>
         <p:nvSpPr>
           <p:cNvPr id="10" name="TextBox 9"/>
-          <p:cNvSpPr txBox="1"/>
-          <p:nvPr/>
-        </p:nvSpPr>
-        <p:spPr>
-          <a:xfrm>
-            <a:off x="822960" y="6446520"/>
-            <a:ext cx="10058400" cy="320040"/>
-          </a:xfrm>
-          <a:prstGeom prst="rect">
-            <a:avLst/>
-          </a:prstGeom>
-          <a:noFill/>
-        </p:spPr>
-        <p:txBody>
-          <a:bodyPr wrap="square" anchor="t" lIns="0" rIns="0" tIns="0" bIns="0">
-            <a:spAutoFit/>
-          </a:bodyPr>
-          <a:lstStyle/>
-          <a:p>
-            <a:pPr algn="l">
-              <a:lnSpc>
-                <a:spcPct val="115000"/>
-              </a:lnSpc>
-            </a:pPr>
-            <a:r>
-              <a:rPr sz="1050" b="0" i="0">
-                <a:solidFill>
-                  <a:srgbClr val="5C576E"/>
-                </a:solidFill>
-                <a:latin typeface="Calibri"/>
-              </a:rPr>
-              <a:t>Built with Python's hashlib — the same primitive from Topic 01, applied exactly as described.</a:t>
-            </a:r>
-          </a:p>
-        </p:txBody>
-      </p:sp>
-      <p:sp>
-        <p:nvSpPr>
-          <p:cNvPr id="11" name="TextBox 10"/>
           <p:cNvSpPr txBox="1"/>
           <p:nvPr/>
         </p:nvSpPr>
@@ -9899,7 +11644,7 @@
                 </a:solidFill>
                 <a:latin typeface="Consolas"/>
               </a:rPr>
-              <a:t>08 / 15</a:t>
+              <a:t>08 / 18</a:t>
             </a:r>
           </a:p>
         </p:txBody>
@@ -10000,7 +11745,7 @@
                 </a:solidFill>
                 <a:latin typeface="Calibri"/>
               </a:rPr>
-              <a:t>WORKED EXAMPLE — PART 2</a:t>
+              <a:t>TOPIC 03 — BLOCKS &amp; CHAINS</a:t>
             </a:r>
           </a:p>
         </p:txBody>
@@ -10013,8 +11758,47 @@
         </p:nvSpPr>
         <p:spPr>
           <a:xfrm>
-            <a:off x="822960" y="1051560"/>
-            <a:ext cx="10332720" cy="1005840"/>
+            <a:off x="8503920" y="640080"/>
+            <a:ext cx="2834640" cy="365760"/>
+          </a:xfrm>
+          <a:prstGeom prst="rect">
+            <a:avLst/>
+          </a:prstGeom>
+          <a:noFill/>
+        </p:spPr>
+        <p:txBody>
+          <a:bodyPr wrap="square" anchor="t" lIns="0" rIns="0" tIns="0" bIns="0">
+            <a:spAutoFit/>
+          </a:bodyPr>
+          <a:lstStyle/>
+          <a:p>
+            <a:pPr algn="r">
+              <a:lnSpc>
+                <a:spcPct val="115000"/>
+              </a:lnSpc>
+            </a:pPr>
+            <a:r>
+              <a:rPr sz="1200" b="1" i="0">
+                <a:solidFill>
+                  <a:srgbClr val="5C576E"/>
+                </a:solidFill>
+                <a:latin typeface="Calibri"/>
+              </a:rPr>
+              <a:t>KEY IDEA 3 / 4</a:t>
+            </a:r>
+          </a:p>
+        </p:txBody>
+      </p:sp>
+      <p:sp>
+        <p:nvSpPr>
+          <p:cNvPr id="5" name="TextBox 4"/>
+          <p:cNvSpPr txBox="1"/>
+          <p:nvPr/>
+        </p:nvSpPr>
+        <p:spPr>
+          <a:xfrm>
+            <a:off x="822960" y="1097280"/>
+            <a:ext cx="9601200" cy="1005840"/>
           </a:xfrm>
           <a:prstGeom prst="rect">
             <a:avLst/>
@@ -10033,35 +11817,74 @@
               </a:lnSpc>
             </a:pPr>
             <a:r>
-              <a:rPr sz="2700" b="1" i="0">
+              <a:rPr sz="3200" b="1" i="0">
                 <a:solidFill>
                   <a:srgbClr val="1C1730"/>
                 </a:solidFill>
                 <a:latin typeface="Century Gothic"/>
               </a:rPr>
-              <a:t>You Already Use This Structure — It's Called Git</a:t>
-            </a:r>
-          </a:p>
-        </p:txBody>
-      </p:sp>
-      <p:sp>
-        <p:nvSpPr>
-          <p:cNvPr id="5" name="Rounded Rectangle 4"/>
+              <a:t>Own Hash</a:t>
+            </a:r>
+          </a:p>
+        </p:txBody>
+      </p:sp>
+      <p:sp>
+        <p:nvSpPr>
+          <p:cNvPr id="6" name="TextBox 5"/>
+          <p:cNvSpPr txBox="1"/>
+          <p:nvPr/>
+        </p:nvSpPr>
+        <p:spPr>
+          <a:xfrm>
+            <a:off x="822960" y="2148840"/>
+            <a:ext cx="9875520" cy="2011680"/>
+          </a:xfrm>
+          <a:prstGeom prst="rect">
+            <a:avLst/>
+          </a:prstGeom>
+          <a:noFill/>
+        </p:spPr>
+        <p:txBody>
+          <a:bodyPr wrap="square" anchor="t" lIns="0" rIns="0" tIns="0" bIns="0">
+            <a:spAutoFit/>
+          </a:bodyPr>
+          <a:lstStyle/>
+          <a:p>
+            <a:pPr algn="l">
+              <a:lnSpc>
+                <a:spcPct val="150000"/>
+              </a:lnSpc>
+            </a:pPr>
+            <a:r>
+              <a:rPr sz="1650" b="0" i="0">
+                <a:solidFill>
+                  <a:srgbClr val="1C1730"/>
+                </a:solidFill>
+                <a:latin typeface="Calibri"/>
+              </a:rPr>
+              <a:t>Computed from everything inside the block — including the previous hash. This is where the avalanche effect from Topic 01 creates the domino effect that makes tampering detectable.</a:t>
+            </a:r>
+          </a:p>
+        </p:txBody>
+      </p:sp>
+      <p:sp>
+        <p:nvSpPr>
+          <p:cNvPr id="7" name="Rounded Rectangle 6"/>
           <p:cNvSpPr/>
           <p:nvPr/>
         </p:nvSpPr>
         <p:spPr>
           <a:xfrm>
-            <a:off x="822960" y="1965960"/>
-            <a:ext cx="10515600" cy="3840480"/>
+            <a:off x="822960" y="4434840"/>
+            <a:ext cx="10515600" cy="1280160"/>
           </a:xfrm>
           <a:prstGeom prst="roundRect">
             <a:avLst>
-              <a:gd name="adj" fmla="val 4500"/>
+              <a:gd name="adj" fmla="val 6000"/>
             </a:avLst>
           </a:prstGeom>
           <a:solidFill>
-            <a:srgbClr val="141026"/>
+            <a:srgbClr val="EAEDF0"/>
           </a:solidFill>
           <a:ln>
             <a:noFill/>
@@ -10092,133 +11915,40 @@
       </p:sp>
       <p:sp>
         <p:nvSpPr>
-          <p:cNvPr id="6" name="Oval 5"/>
-          <p:cNvSpPr/>
-          <p:nvPr/>
-        </p:nvSpPr>
-        <p:spPr>
-          <a:xfrm>
-            <a:off x="1024128" y="2130552"/>
-            <a:ext cx="109728" cy="109728"/>
-          </a:xfrm>
-          <a:prstGeom prst="ellipse">
-            <a:avLst/>
-          </a:prstGeom>
-          <a:solidFill>
-            <a:srgbClr val="FF6459"/>
-          </a:solidFill>
-          <a:ln>
-            <a:noFill/>
-          </a:ln>
-          <a:effectLst/>
-        </p:spPr>
-        <p:style>
-          <a:lnRef idx="1">
-            <a:schemeClr val="accent1"/>
-          </a:lnRef>
-          <a:fillRef idx="3">
-            <a:schemeClr val="accent1"/>
-          </a:fillRef>
-          <a:effectRef idx="2">
-            <a:schemeClr val="accent1"/>
-          </a:effectRef>
-          <a:fontRef idx="minor">
-            <a:schemeClr val="lt1"/>
-          </a:fontRef>
-        </p:style>
-        <p:txBody>
-          <a:bodyPr rtlCol="0" anchor="ctr"/>
-          <a:lstStyle/>
-          <a:p>
-            <a:pPr algn="ctr"/>
-          </a:p>
-        </p:txBody>
-      </p:sp>
-      <p:sp>
-        <p:nvSpPr>
-          <p:cNvPr id="7" name="Oval 6"/>
-          <p:cNvSpPr/>
-          <p:nvPr/>
-        </p:nvSpPr>
-        <p:spPr>
-          <a:xfrm>
-            <a:off x="1225296" y="2130552"/>
-            <a:ext cx="109728" cy="109728"/>
-          </a:xfrm>
-          <a:prstGeom prst="ellipse">
-            <a:avLst/>
-          </a:prstGeom>
-          <a:solidFill>
-            <a:srgbClr val="FFC02E"/>
-          </a:solidFill>
-          <a:ln>
-            <a:noFill/>
-          </a:ln>
-          <a:effectLst/>
-        </p:spPr>
-        <p:style>
-          <a:lnRef idx="1">
-            <a:schemeClr val="accent1"/>
-          </a:lnRef>
-          <a:fillRef idx="3">
-            <a:schemeClr val="accent1"/>
-          </a:fillRef>
-          <a:effectRef idx="2">
-            <a:schemeClr val="accent1"/>
-          </a:effectRef>
-          <a:fontRef idx="minor">
-            <a:schemeClr val="lt1"/>
-          </a:fontRef>
-        </p:style>
-        <p:txBody>
-          <a:bodyPr rtlCol="0" anchor="ctr"/>
-          <a:lstStyle/>
-          <a:p>
-            <a:pPr algn="ctr"/>
-          </a:p>
-        </p:txBody>
-      </p:sp>
-      <p:sp>
-        <p:nvSpPr>
-          <p:cNvPr id="8" name="Oval 7"/>
-          <p:cNvSpPr/>
-          <p:nvPr/>
-        </p:nvSpPr>
-        <p:spPr>
-          <a:xfrm>
-            <a:off x="1426464" y="2130552"/>
-            <a:ext cx="109728" cy="109728"/>
-          </a:xfrm>
-          <a:prstGeom prst="ellipse">
-            <a:avLst/>
-          </a:prstGeom>
-          <a:solidFill>
-            <a:srgbClr val="28C93F"/>
-          </a:solidFill>
-          <a:ln>
-            <a:noFill/>
-          </a:ln>
-          <a:effectLst/>
-        </p:spPr>
-        <p:style>
-          <a:lnRef idx="1">
-            <a:schemeClr val="accent1"/>
-          </a:lnRef>
-          <a:fillRef idx="3">
-            <a:schemeClr val="accent1"/>
-          </a:fillRef>
-          <a:effectRef idx="2">
-            <a:schemeClr val="accent1"/>
-          </a:effectRef>
-          <a:fontRef idx="minor">
-            <a:schemeClr val="lt1"/>
-          </a:fontRef>
-        </p:style>
-        <p:txBody>
-          <a:bodyPr rtlCol="0" anchor="ctr"/>
-          <a:lstStyle/>
-          <a:p>
-            <a:pPr algn="ctr"/>
+          <p:cNvPr id="8" name="TextBox 7"/>
+          <p:cNvSpPr txBox="1"/>
+          <p:nvPr/>
+        </p:nvSpPr>
+        <p:spPr>
+          <a:xfrm>
+            <a:off x="1143000" y="4617720"/>
+            <a:ext cx="9875520" cy="320040"/>
+          </a:xfrm>
+          <a:prstGeom prst="rect">
+            <a:avLst/>
+          </a:prstGeom>
+          <a:noFill/>
+        </p:spPr>
+        <p:txBody>
+          <a:bodyPr wrap="square" anchor="t" lIns="0" rIns="0" tIns="0" bIns="0">
+            <a:spAutoFit/>
+          </a:bodyPr>
+          <a:lstStyle/>
+          <a:p>
+            <a:pPr algn="l">
+              <a:lnSpc>
+                <a:spcPct val="115000"/>
+              </a:lnSpc>
+            </a:pPr>
+            <a:r>
+              <a:rPr sz="1100" b="1" i="0">
+                <a:solidFill>
+                  <a:srgbClr val="33506A"/>
+                </a:solidFill>
+                <a:latin typeface="Calibri"/>
+              </a:rPr>
+              <a:t>EXAMPLE</a:t>
+            </a:r>
           </a:p>
         </p:txBody>
       </p:sp>
@@ -10230,8 +11960,8 @@
         </p:nvSpPr>
         <p:spPr>
           <a:xfrm>
-            <a:off x="1078992" y="2350008"/>
-            <a:ext cx="10003536" cy="3273552"/>
+            <a:off x="1143000" y="4956048"/>
+            <a:ext cx="9875520" cy="640080"/>
           </a:xfrm>
           <a:prstGeom prst="rect">
             <a:avLst/>
@@ -10246,158 +11976,17 @@
           <a:p>
             <a:pPr algn="l">
               <a:lnSpc>
-                <a:spcPct val="135000"/>
-              </a:lnSpc>
-            </a:pPr>
-            <a:r>
-              <a:rPr sz="1350" b="1">
-                <a:solidFill>
-                  <a:srgbClr val="9C93C9"/>
+                <a:spcPct val="130000"/>
+              </a:lnSpc>
+            </a:pPr>
+            <a:r>
+              <a:rPr sz="1400" b="0" i="0">
+                <a:solidFill>
+                  <a:srgbClr val="1C1730"/>
                 </a:solidFill>
                 <a:latin typeface="Consolas"/>
               </a:rPr>
-              <a:t>$ </a:t>
-            </a:r>
-            <a:r>
-              <a:rPr sz="1350" b="0">
-                <a:solidFill>
-                  <a:srgbClr val="EDE9F7"/>
-                </a:solidFill>
-                <a:latin typeface="Consolas"/>
-              </a:rPr>
-              <a:t>git log --format="commit %H%nparent %P"</a:t>
-            </a:r>
-          </a:p>
-          <a:p>
-            <a:pPr algn="l">
-              <a:lnSpc>
-                <a:spcPct val="135000"/>
-              </a:lnSpc>
-            </a:pPr>
-            <a:r>
-              <a:rPr sz="1350" b="0">
-                <a:solidFill>
-                  <a:srgbClr val="EDE9F7"/>
-                </a:solidFill>
-                <a:latin typeface="Consolas"/>
-              </a:rPr>
-              <a:t/>
-            </a:r>
-          </a:p>
-          <a:p>
-            <a:pPr algn="l">
-              <a:lnSpc>
-                <a:spcPct val="135000"/>
-              </a:lnSpc>
-            </a:pPr>
-            <a:r>
-              <a:rPr sz="1350" b="0">
-                <a:solidFill>
-                  <a:srgbClr val="EDE9F7"/>
-                </a:solidFill>
-                <a:latin typeface="Consolas"/>
-              </a:rPr>
-              <a:t>commit </a:t>
-            </a:r>
-            <a:r>
-              <a:rPr sz="1350" b="0">
-                <a:solidFill>
-                  <a:srgbClr val="7FE0C4"/>
-                </a:solidFill>
-                <a:latin typeface="Consolas"/>
-              </a:rPr>
-              <a:t>14170b8693832cd89ca256741e1af856ede4361</a:t>
-            </a:r>
-          </a:p>
-          <a:p>
-            <a:pPr algn="l">
-              <a:lnSpc>
-                <a:spcPct val="135000"/>
-              </a:lnSpc>
-            </a:pPr>
-            <a:r>
-              <a:rPr sz="1350" b="0">
-                <a:solidFill>
-                  <a:srgbClr val="EDE9F7"/>
-                </a:solidFill>
-                <a:latin typeface="Consolas"/>
-              </a:rPr>
-              <a:t>parent </a:t>
-            </a:r>
-            <a:r>
-              <a:rPr sz="1350" b="0">
-                <a:solidFill>
-                  <a:srgbClr val="7FE0C4"/>
-                </a:solidFill>
-                <a:latin typeface="Consolas"/>
-              </a:rPr>
-              <a:t>5c0144c7a07feca64a44f84b71b369c6b9d1304</a:t>
-            </a:r>
-          </a:p>
-          <a:p>
-            <a:pPr algn="l">
-              <a:lnSpc>
-                <a:spcPct val="135000"/>
-              </a:lnSpc>
-            </a:pPr>
-            <a:r>
-              <a:rPr sz="1350" b="0">
-                <a:solidFill>
-                  <a:srgbClr val="EDE9F7"/>
-                </a:solidFill>
-                <a:latin typeface="Consolas"/>
-              </a:rPr>
-              <a:t/>
-            </a:r>
-          </a:p>
-          <a:p>
-            <a:pPr algn="l">
-              <a:lnSpc>
-                <a:spcPct val="135000"/>
-              </a:lnSpc>
-            </a:pPr>
-            <a:r>
-              <a:rPr sz="1350" b="0">
-                <a:solidFill>
-                  <a:srgbClr val="EDE9F7"/>
-                </a:solidFill>
-                <a:latin typeface="Consolas"/>
-              </a:rPr>
-              <a:t>commit </a:t>
-            </a:r>
-            <a:r>
-              <a:rPr sz="1350" b="0">
-                <a:solidFill>
-                  <a:srgbClr val="7FE0C4"/>
-                </a:solidFill>
-                <a:latin typeface="Consolas"/>
-              </a:rPr>
-              <a:t>5c0144c7a07feca64a44f84b71b369c6b9d1304</a:t>
-            </a:r>
-          </a:p>
-          <a:p>
-            <a:pPr algn="l">
-              <a:lnSpc>
-                <a:spcPct val="135000"/>
-              </a:lnSpc>
-            </a:pPr>
-            <a:r>
-              <a:rPr sz="1350" b="0">
-                <a:solidFill>
-                  <a:srgbClr val="EDE9F7"/>
-                </a:solidFill>
-                <a:latin typeface="Consolas"/>
-              </a:rPr>
-              <a:t>parent </a:t>
-            </a:r>
-            <a:r>
-              <a:rPr sz="1350" b="0">
-                <a:solidFill>
-                  <a:srgbClr val="8B84AD"/>
-                </a:solidFill>
-                <a:latin typeface="Consolas"/>
-              </a:rPr>
-              <a:t>(none — first commit)</a:t>
+              <a:t>hash(Block #100) = hash(transactions + prevHash + timestamp)</a:t>
             </a:r>
           </a:p>
         </p:txBody>
@@ -10405,45 +11994,6 @@
       <p:sp>
         <p:nvSpPr>
           <p:cNvPr id="10" name="TextBox 9"/>
-          <p:cNvSpPr txBox="1"/>
-          <p:nvPr/>
-        </p:nvSpPr>
-        <p:spPr>
-          <a:xfrm>
-            <a:off x="822960" y="6446520"/>
-            <a:ext cx="10058400" cy="320040"/>
-          </a:xfrm>
-          <a:prstGeom prst="rect">
-            <a:avLst/>
-          </a:prstGeom>
-          <a:noFill/>
-        </p:spPr>
-        <p:txBody>
-          <a:bodyPr wrap="square" anchor="t" lIns="0" rIns="0" tIns="0" bIns="0">
-            <a:spAutoFit/>
-          </a:bodyPr>
-          <a:lstStyle/>
-          <a:p>
-            <a:pPr algn="l">
-              <a:lnSpc>
-                <a:spcPct val="115000"/>
-              </a:lnSpc>
-            </a:pPr>
-            <a:r>
-              <a:rPr sz="1050" b="0" i="0">
-                <a:solidFill>
-                  <a:srgbClr val="5C576E"/>
-                </a:solidFill>
-                <a:latin typeface="Calibri"/>
-              </a:rPr>
-              <a:t>Real output from a real git repo. Every commit you've made stores its parent's hash — same structure.</a:t>
-            </a:r>
-          </a:p>
-        </p:txBody>
-      </p:sp>
-      <p:sp>
-        <p:nvSpPr>
-          <p:cNvPr id="11" name="TextBox 10"/>
           <p:cNvSpPr txBox="1"/>
           <p:nvPr/>
         </p:nvSpPr>
@@ -10475,7 +12025,7 @@
                 </a:solidFill>
                 <a:latin typeface="Consolas"/>
               </a:rPr>
-              <a:t>09 / 15</a:t>
+              <a:t>09 / 18</a:t>
             </a:r>
           </a:p>
         </p:txBody>
